--- a/lectures/in-class_activities/class_1.pptx
+++ b/lectures/in-class_activities/class_1.pptx
@@ -5,20 +5,21 @@
     <p:sldMasterId id="2147483648" r:id="rId1"/>
   </p:sldMasterIdLst>
   <p:notesMasterIdLst>
-    <p:notesMasterId r:id="rId13"/>
+    <p:notesMasterId r:id="rId14"/>
   </p:notesMasterIdLst>
   <p:sldIdLst>
     <p:sldId id="318" r:id="rId2"/>
     <p:sldId id="319" r:id="rId3"/>
-    <p:sldId id="682" r:id="rId4"/>
-    <p:sldId id="683" r:id="rId5"/>
-    <p:sldId id="674" r:id="rId6"/>
-    <p:sldId id="471" r:id="rId7"/>
-    <p:sldId id="685" r:id="rId8"/>
-    <p:sldId id="681" r:id="rId9"/>
-    <p:sldId id="672" r:id="rId10"/>
-    <p:sldId id="684" r:id="rId11"/>
-    <p:sldId id="673" r:id="rId12"/>
+    <p:sldId id="686" r:id="rId4"/>
+    <p:sldId id="682" r:id="rId5"/>
+    <p:sldId id="683" r:id="rId6"/>
+    <p:sldId id="674" r:id="rId7"/>
+    <p:sldId id="471" r:id="rId8"/>
+    <p:sldId id="685" r:id="rId9"/>
+    <p:sldId id="681" r:id="rId10"/>
+    <p:sldId id="672" r:id="rId11"/>
+    <p:sldId id="684" r:id="rId12"/>
+    <p:sldId id="673" r:id="rId13"/>
   </p:sldIdLst>
   <p:sldSz cx="12192000" cy="6858000"/>
   <p:notesSz cx="6858000" cy="9144000"/>
@@ -790,7 +791,26 @@
           <a:bodyPr/>
           <a:lstStyle/>
           <a:p>
-            <a:endParaRPr lang="en-US"/>
+            <a:r>
+              <a:rPr lang="en-US" dirty="0"/>
+              <a:t>https://</a:t>
+            </a:r>
+            <a:r>
+              <a:rPr lang="en-US" dirty="0" err="1"/>
+              <a:t>docs.google.com</a:t>
+            </a:r>
+            <a:r>
+              <a:rPr lang="en-US" dirty="0"/>
+              <a:t>/document/d/1Kk92IApqR0dqP8pjU8KjXSjuFePxToeInctn_EKyqx0/</a:t>
+            </a:r>
+            <a:r>
+              <a:rPr lang="en-US" dirty="0" err="1"/>
+              <a:t>edit?usp</a:t>
+            </a:r>
+            <a:r>
+              <a:rPr lang="en-US" dirty="0"/>
+              <a:t>=sharing</a:t>
+            </a:r>
           </a:p>
         </p:txBody>
       </p:sp>
@@ -820,7 +840,7 @@
     </p:spTree>
     <p:extLst>
       <p:ext uri="{BB962C8B-B14F-4D97-AF65-F5344CB8AC3E}">
-        <p14:creationId xmlns:p14="http://schemas.microsoft.com/office/powerpoint/2010/main" val="2210722112"/>
+        <p14:creationId xmlns:p14="http://schemas.microsoft.com/office/powerpoint/2010/main" val="983902734"/>
       </p:ext>
     </p:extLst>
   </p:cSld>
@@ -849,6 +869,90 @@
       </p:grpSpPr>
       <p:sp>
         <p:nvSpPr>
+          <p:cNvPr id="2" name="Slide Image Placeholder 1"/>
+          <p:cNvSpPr>
+            <a:spLocks noGrp="1" noRot="1" noChangeAspect="1"/>
+          </p:cNvSpPr>
+          <p:nvPr>
+            <p:ph type="sldImg"/>
+          </p:nvPr>
+        </p:nvSpPr>
+        <p:spPr/>
+      </p:sp>
+      <p:sp>
+        <p:nvSpPr>
+          <p:cNvPr id="3" name="Notes Placeholder 2"/>
+          <p:cNvSpPr>
+            <a:spLocks noGrp="1"/>
+          </p:cNvSpPr>
+          <p:nvPr>
+            <p:ph type="body" idx="1"/>
+          </p:nvPr>
+        </p:nvSpPr>
+        <p:spPr/>
+        <p:txBody>
+          <a:bodyPr/>
+          <a:lstStyle/>
+          <a:p>
+            <a:endParaRPr lang="en-US"/>
+          </a:p>
+        </p:txBody>
+      </p:sp>
+      <p:sp>
+        <p:nvSpPr>
+          <p:cNvPr id="4" name="Slide Number Placeholder 3"/>
+          <p:cNvSpPr>
+            <a:spLocks noGrp="1"/>
+          </p:cNvSpPr>
+          <p:nvPr>
+            <p:ph type="sldNum" sz="quarter" idx="5"/>
+          </p:nvPr>
+        </p:nvSpPr>
+        <p:spPr/>
+        <p:txBody>
+          <a:bodyPr/>
+          <a:lstStyle/>
+          <a:p>
+            <a:fld id="{34649269-E026-4E44-9951-397123D7CFB5}" type="slidenum">
+              <a:rPr lang="en-US" smtClean="0"/>
+              <a:t>11</a:t>
+            </a:fld>
+            <a:endParaRPr lang="en-US"/>
+          </a:p>
+        </p:txBody>
+      </p:sp>
+    </p:spTree>
+    <p:extLst>
+      <p:ext uri="{BB962C8B-B14F-4D97-AF65-F5344CB8AC3E}">
+        <p14:creationId xmlns:p14="http://schemas.microsoft.com/office/powerpoint/2010/main" val="2210722112"/>
+      </p:ext>
+    </p:extLst>
+  </p:cSld>
+  <p:clrMapOvr>
+    <a:masterClrMapping/>
+  </p:clrMapOvr>
+</p:notes>
+</file>
+
+<file path=ppt/notesSlides/notesSlide12.xml><?xml version="1.0" encoding="utf-8"?>
+<p:notes xmlns:a="http://schemas.openxmlformats.org/drawingml/2006/main" xmlns:r="http://schemas.openxmlformats.org/officeDocument/2006/relationships" xmlns:p="http://schemas.openxmlformats.org/presentationml/2006/main">
+  <p:cSld>
+    <p:spTree>
+      <p:nvGrpSpPr>
+        <p:cNvPr id="1" name=""/>
+        <p:cNvGrpSpPr/>
+        <p:nvPr/>
+      </p:nvGrpSpPr>
+      <p:grpSpPr>
+        <a:xfrm>
+          <a:off x="0" y="0"/>
+          <a:ext cx="0" cy="0"/>
+          <a:chOff x="0" y="0"/>
+          <a:chExt cx="0" cy="0"/>
+        </a:xfrm>
+      </p:grpSpPr>
+      <p:sp>
+        <p:nvSpPr>
           <p:cNvPr id="16385" name="Rectangle 7"/>
           <p:cNvSpPr>
             <a:spLocks noGrp="1" noChangeArrowheads="1"/>
@@ -994,7 +1098,7 @@
             <a:fld id="{2C1D408F-3F93-4F43-8A63-5C97F2D4AA7C}" type="slidenum">
               <a:rPr lang="en-US" sz="1200"/>
               <a:pPr/>
-              <a:t>11</a:t>
+              <a:t>12</a:t>
             </a:fld>
             <a:endParaRPr lang="en-US" sz="1200"/>
           </a:p>
@@ -1323,7 +1427,13 @@
   <p:cSld>
     <p:spTree>
       <p:nvGrpSpPr>
-        <p:cNvPr id="1" name=""/>
+        <p:cNvPr id="1" name="">
+          <a:extLst>
+            <a:ext uri="{FF2B5EF4-FFF2-40B4-BE49-F238E27FC236}">
+              <a16:creationId xmlns:a16="http://schemas.microsoft.com/office/drawing/2014/main" id="{325033DC-17F3-2FD1-DE9D-7E5F1BB91CBC}"/>
+            </a:ext>
+          </a:extLst>
+        </p:cNvPr>
         <p:cNvGrpSpPr/>
         <p:nvPr/>
       </p:nvGrpSpPr>
@@ -1337,7 +1447,13 @@
       </p:grpSpPr>
       <p:sp>
         <p:nvSpPr>
-          <p:cNvPr id="2" name="Slide Image Placeholder 1"/>
+          <p:cNvPr id="2" name="Slide Image Placeholder 1">
+            <a:extLst>
+              <a:ext uri="{FF2B5EF4-FFF2-40B4-BE49-F238E27FC236}">
+                <a16:creationId xmlns:a16="http://schemas.microsoft.com/office/drawing/2014/main" id="{3883BC72-99A0-50F0-68C5-4F7AD9EF1277}"/>
+              </a:ext>
+            </a:extLst>
+          </p:cNvPr>
           <p:cNvSpPr>
             <a:spLocks noGrp="1" noRot="1" noChangeAspect="1"/>
           </p:cNvSpPr>
@@ -1349,7 +1465,13 @@
       </p:sp>
       <p:sp>
         <p:nvSpPr>
-          <p:cNvPr id="3" name="Notes Placeholder 2"/>
+          <p:cNvPr id="3" name="Notes Placeholder 2">
+            <a:extLst>
+              <a:ext uri="{FF2B5EF4-FFF2-40B4-BE49-F238E27FC236}">
+                <a16:creationId xmlns:a16="http://schemas.microsoft.com/office/drawing/2014/main" id="{8E71FD66-5F6C-E94A-EBD7-14855ED4C37A}"/>
+              </a:ext>
+            </a:extLst>
+          </p:cNvPr>
           <p:cNvSpPr>
             <a:spLocks noGrp="1"/>
           </p:cNvSpPr>
@@ -1368,7 +1490,13 @@
       </p:sp>
       <p:sp>
         <p:nvSpPr>
-          <p:cNvPr id="4" name="Slide Number Placeholder 3"/>
+          <p:cNvPr id="4" name="Slide Number Placeholder 3">
+            <a:extLst>
+              <a:ext uri="{FF2B5EF4-FFF2-40B4-BE49-F238E27FC236}">
+                <a16:creationId xmlns:a16="http://schemas.microsoft.com/office/drawing/2014/main" id="{3FE813DE-80C5-6DE3-11E3-B754A0085D5A}"/>
+              </a:ext>
+            </a:extLst>
+          </p:cNvPr>
           <p:cNvSpPr>
             <a:spLocks noGrp="1"/>
           </p:cNvSpPr>
@@ -1392,7 +1520,7 @@
     </p:spTree>
     <p:extLst>
       <p:ext uri="{BB962C8B-B14F-4D97-AF65-F5344CB8AC3E}">
-        <p14:creationId xmlns:p14="http://schemas.microsoft.com/office/powerpoint/2010/main" val="2104405"/>
+        <p14:creationId xmlns:p14="http://schemas.microsoft.com/office/powerpoint/2010/main" val="1216782946"/>
       </p:ext>
     </p:extLst>
   </p:cSld>
@@ -1476,7 +1604,7 @@
     </p:spTree>
     <p:extLst>
       <p:ext uri="{BB962C8B-B14F-4D97-AF65-F5344CB8AC3E}">
-        <p14:creationId xmlns:p14="http://schemas.microsoft.com/office/powerpoint/2010/main" val="51791727"/>
+        <p14:creationId xmlns:p14="http://schemas.microsoft.com/office/powerpoint/2010/main" val="2104405"/>
       </p:ext>
     </p:extLst>
   </p:cSld>
@@ -1505,222 +1633,62 @@
       </p:grpSpPr>
       <p:sp>
         <p:nvSpPr>
-          <p:cNvPr id="18433" name="Rectangle 7"/>
-          <p:cNvSpPr>
-            <a:spLocks noGrp="1" noChangeArrowheads="1"/>
+          <p:cNvPr id="2" name="Slide Image Placeholder 1"/>
+          <p:cNvSpPr>
+            <a:spLocks noGrp="1" noRot="1" noChangeAspect="1"/>
+          </p:cNvSpPr>
+          <p:nvPr>
+            <p:ph type="sldImg"/>
+          </p:nvPr>
+        </p:nvSpPr>
+        <p:spPr/>
+      </p:sp>
+      <p:sp>
+        <p:nvSpPr>
+          <p:cNvPr id="3" name="Notes Placeholder 2"/>
+          <p:cNvSpPr>
+            <a:spLocks noGrp="1"/>
+          </p:cNvSpPr>
+          <p:nvPr>
+            <p:ph type="body" idx="1"/>
+          </p:nvPr>
+        </p:nvSpPr>
+        <p:spPr/>
+        <p:txBody>
+          <a:bodyPr/>
+          <a:lstStyle/>
+          <a:p>
+            <a:endParaRPr lang="en-US"/>
+          </a:p>
+        </p:txBody>
+      </p:sp>
+      <p:sp>
+        <p:nvSpPr>
+          <p:cNvPr id="4" name="Slide Number Placeholder 3"/>
+          <p:cNvSpPr>
+            <a:spLocks noGrp="1"/>
           </p:cNvSpPr>
           <p:nvPr>
             <p:ph type="sldNum" sz="quarter" idx="5"/>
           </p:nvPr>
         </p:nvSpPr>
-        <p:spPr>
-          <a:noFill/>
-          <a:ln/>
-          <a:extLst>
-            <a:ext uri="{909E8E84-426E-40dd-AFC4-6F175D3DCCD1}">
-              <a14:hiddenFill xmlns:a14="http://schemas.microsoft.com/office/drawing/2010/main" xmlns="">
-                <a:solidFill>
-                  <a:srgbClr val="FFFFFF"/>
-                </a:solidFill>
-              </a14:hiddenFill>
-            </a:ext>
-            <a:ext uri="{91240B29-F687-4f45-9708-019B960494DF}">
-              <a14:hiddenLine xmlns:a14="http://schemas.microsoft.com/office/drawing/2010/main" xmlns="" w="9525">
-                <a:solidFill>
-                  <a:srgbClr val="000000"/>
-                </a:solidFill>
-                <a:miter lim="800000"/>
-                <a:headEnd/>
-                <a:tailEnd/>
-              </a14:hiddenLine>
-            </a:ext>
-          </a:extLst>
-        </p:spPr>
+        <p:spPr/>
         <p:txBody>
           <a:bodyPr/>
-          <a:lstStyle>
-            <a:lvl1pPr>
-              <a:defRPr sz="2400">
-                <a:solidFill>
-                  <a:schemeClr val="tx1"/>
-                </a:solidFill>
-                <a:latin typeface="Helvetica" charset="0"/>
-                <a:ea typeface="ＭＳ Ｐゴシック" charset="0"/>
-                <a:cs typeface="ＭＳ Ｐゴシック" charset="0"/>
-              </a:defRPr>
-            </a:lvl1pPr>
-            <a:lvl2pPr marL="742950" indent="-285750">
-              <a:defRPr sz="2400">
-                <a:solidFill>
-                  <a:schemeClr val="tx1"/>
-                </a:solidFill>
-                <a:latin typeface="Helvetica" charset="0"/>
-                <a:ea typeface="ＭＳ Ｐゴシック" charset="0"/>
-              </a:defRPr>
-            </a:lvl2pPr>
-            <a:lvl3pPr marL="1143000" indent="-228600">
-              <a:defRPr sz="2400">
-                <a:solidFill>
-                  <a:schemeClr val="tx1"/>
-                </a:solidFill>
-                <a:latin typeface="Helvetica" charset="0"/>
-                <a:ea typeface="ＭＳ Ｐゴシック" charset="0"/>
-              </a:defRPr>
-            </a:lvl3pPr>
-            <a:lvl4pPr marL="1600200" indent="-228600">
-              <a:defRPr sz="2400">
-                <a:solidFill>
-                  <a:schemeClr val="tx1"/>
-                </a:solidFill>
-                <a:latin typeface="Helvetica" charset="0"/>
-                <a:ea typeface="ＭＳ Ｐゴシック" charset="0"/>
-              </a:defRPr>
-            </a:lvl4pPr>
-            <a:lvl5pPr marL="2057400" indent="-228600">
-              <a:defRPr sz="2400">
-                <a:solidFill>
-                  <a:schemeClr val="tx1"/>
-                </a:solidFill>
-                <a:latin typeface="Helvetica" charset="0"/>
-                <a:ea typeface="ＭＳ Ｐゴシック" charset="0"/>
-              </a:defRPr>
-            </a:lvl5pPr>
-            <a:lvl6pPr marL="2514600" indent="-228600" eaLnBrk="0" fontAlgn="base" hangingPunct="0">
-              <a:spcBef>
-                <a:spcPct val="0"/>
-              </a:spcBef>
-              <a:spcAft>
-                <a:spcPct val="0"/>
-              </a:spcAft>
-              <a:defRPr sz="2400">
-                <a:solidFill>
-                  <a:schemeClr val="tx1"/>
-                </a:solidFill>
-                <a:latin typeface="Helvetica" charset="0"/>
-                <a:ea typeface="ＭＳ Ｐゴシック" charset="0"/>
-              </a:defRPr>
-            </a:lvl6pPr>
-            <a:lvl7pPr marL="2971800" indent="-228600" eaLnBrk="0" fontAlgn="base" hangingPunct="0">
-              <a:spcBef>
-                <a:spcPct val="0"/>
-              </a:spcBef>
-              <a:spcAft>
-                <a:spcPct val="0"/>
-              </a:spcAft>
-              <a:defRPr sz="2400">
-                <a:solidFill>
-                  <a:schemeClr val="tx1"/>
-                </a:solidFill>
-                <a:latin typeface="Helvetica" charset="0"/>
-                <a:ea typeface="ＭＳ Ｐゴシック" charset="0"/>
-              </a:defRPr>
-            </a:lvl7pPr>
-            <a:lvl8pPr marL="3429000" indent="-228600" eaLnBrk="0" fontAlgn="base" hangingPunct="0">
-              <a:spcBef>
-                <a:spcPct val="0"/>
-              </a:spcBef>
-              <a:spcAft>
-                <a:spcPct val="0"/>
-              </a:spcAft>
-              <a:defRPr sz="2400">
-                <a:solidFill>
-                  <a:schemeClr val="tx1"/>
-                </a:solidFill>
-                <a:latin typeface="Helvetica" charset="0"/>
-                <a:ea typeface="ＭＳ Ｐゴシック" charset="0"/>
-              </a:defRPr>
-            </a:lvl8pPr>
-            <a:lvl9pPr marL="3886200" indent="-228600" eaLnBrk="0" fontAlgn="base" hangingPunct="0">
-              <a:spcBef>
-                <a:spcPct val="0"/>
-              </a:spcBef>
-              <a:spcAft>
-                <a:spcPct val="0"/>
-              </a:spcAft>
-              <a:defRPr sz="2400">
-                <a:solidFill>
-                  <a:schemeClr val="tx1"/>
-                </a:solidFill>
-                <a:latin typeface="Helvetica" charset="0"/>
-                <a:ea typeface="ＭＳ Ｐゴシック" charset="0"/>
-              </a:defRPr>
-            </a:lvl9pPr>
-          </a:lstStyle>
-          <a:p>
-            <a:fld id="{6101AC86-C8CA-1847-A97E-2A060189EE9C}" type="slidenum">
-              <a:rPr lang="en-US" sz="1200"/>
-              <a:pPr/>
+          <a:lstStyle/>
+          <a:p>
+            <a:fld id="{34649269-E026-4E44-9951-397123D7CFB5}" type="slidenum">
+              <a:rPr lang="en-US" smtClean="0"/>
               <a:t>5</a:t>
             </a:fld>
-            <a:endParaRPr lang="en-US" sz="1200"/>
-          </a:p>
-        </p:txBody>
-      </p:sp>
-      <p:sp>
-        <p:nvSpPr>
-          <p:cNvPr id="18434" name="Rectangle 2"/>
-          <p:cNvSpPr>
-            <a:spLocks noGrp="1" noRot="1" noChangeAspect="1" noChangeArrowheads="1" noTextEdit="1"/>
-          </p:cNvSpPr>
-          <p:nvPr>
-            <p:ph type="sldImg"/>
-          </p:nvPr>
-        </p:nvSpPr>
-        <p:spPr>
-          <a:ln/>
-        </p:spPr>
-      </p:sp>
-      <p:sp>
-        <p:nvSpPr>
-          <p:cNvPr id="18435" name="Rectangle 3"/>
-          <p:cNvSpPr>
-            <a:spLocks noGrp="1" noChangeArrowheads="1"/>
-          </p:cNvSpPr>
-          <p:nvPr>
-            <p:ph type="body" idx="1"/>
-          </p:nvPr>
-        </p:nvSpPr>
-        <p:spPr>
-          <a:noFill/>
-          <a:ln/>
-          <a:extLst>
-            <a:ext uri="{909E8E84-426E-40dd-AFC4-6F175D3DCCD1}">
-              <a14:hiddenFill xmlns:a14="http://schemas.microsoft.com/office/drawing/2010/main" xmlns="">
-                <a:solidFill>
-                  <a:srgbClr val="FFFFFF"/>
-                </a:solidFill>
-              </a14:hiddenFill>
-            </a:ext>
-            <a:ext uri="{91240B29-F687-4f45-9708-019B960494DF}">
-              <a14:hiddenLine xmlns:a14="http://schemas.microsoft.com/office/drawing/2010/main" xmlns="" w="9525">
-                <a:solidFill>
-                  <a:srgbClr val="000000"/>
-                </a:solidFill>
-                <a:miter lim="800000"/>
-                <a:headEnd/>
-                <a:tailEnd/>
-              </a14:hiddenLine>
-            </a:ext>
-            <a:ext uri="{FAA26D3D-D897-4be2-8F04-BA451C77F1D7}">
-              <ma14:placeholderFlag xmlns:ma14="http://schemas.microsoft.com/office/mac/drawingml/2011/main" xmlns="" val="1"/>
-            </a:ext>
-          </a:extLst>
-        </p:spPr>
-        <p:txBody>
-          <a:bodyPr/>
-          <a:lstStyle/>
-          <a:p>
-            <a:pPr eaLnBrk="1" hangingPunct="1"/>
-            <a:endParaRPr lang="en-US">
-              <a:latin typeface="Times" charset="0"/>
-            </a:endParaRPr>
+            <a:endParaRPr lang="en-US"/>
           </a:p>
         </p:txBody>
       </p:sp>
     </p:spTree>
     <p:extLst>
       <p:ext uri="{BB962C8B-B14F-4D97-AF65-F5344CB8AC3E}">
-        <p14:creationId xmlns:p14="http://schemas.microsoft.com/office/powerpoint/2010/main" val="1694909980"/>
+        <p14:creationId xmlns:p14="http://schemas.microsoft.com/office/powerpoint/2010/main" val="51791727"/>
       </p:ext>
     </p:extLst>
   </p:cSld>
@@ -1749,7 +1717,7 @@
       </p:grpSpPr>
       <p:sp>
         <p:nvSpPr>
-          <p:cNvPr id="16385" name="Rectangle 7"/>
+          <p:cNvPr id="18433" name="Rectangle 7"/>
           <p:cNvSpPr>
             <a:spLocks noGrp="1" noChangeArrowheads="1"/>
           </p:cNvSpPr>
@@ -1891,7 +1859,7 @@
             </a:lvl9pPr>
           </a:lstStyle>
           <a:p>
-            <a:fld id="{2C1D408F-3F93-4F43-8A63-5C97F2D4AA7C}" type="slidenum">
+            <a:fld id="{6101AC86-C8CA-1847-A97E-2A060189EE9C}" type="slidenum">
               <a:rPr lang="en-US" sz="1200"/>
               <a:pPr/>
               <a:t>6</a:t>
@@ -1902,7 +1870,7 @@
       </p:sp>
       <p:sp>
         <p:nvSpPr>
-          <p:cNvPr id="16386" name="Rectangle 2"/>
+          <p:cNvPr id="18434" name="Rectangle 2"/>
           <p:cNvSpPr>
             <a:spLocks noGrp="1" noRot="1" noChangeAspect="1" noChangeArrowheads="1" noTextEdit="1"/>
           </p:cNvSpPr>
@@ -1916,7 +1884,7 @@
       </p:sp>
       <p:sp>
         <p:nvSpPr>
-          <p:cNvPr id="16387" name="Rectangle 3"/>
+          <p:cNvPr id="18435" name="Rectangle 3"/>
           <p:cNvSpPr>
             <a:spLocks noGrp="1" noChangeArrowheads="1"/>
           </p:cNvSpPr>
@@ -1964,7 +1932,7 @@
     </p:spTree>
     <p:extLst>
       <p:ext uri="{BB962C8B-B14F-4D97-AF65-F5344CB8AC3E}">
-        <p14:creationId xmlns:p14="http://schemas.microsoft.com/office/powerpoint/2010/main" val="881785046"/>
+        <p14:creationId xmlns:p14="http://schemas.microsoft.com/office/powerpoint/2010/main" val="1694909980"/>
       </p:ext>
     </p:extLst>
   </p:cSld>
@@ -1993,73 +1961,222 @@
       </p:grpSpPr>
       <p:sp>
         <p:nvSpPr>
-          <p:cNvPr id="2" name="Slide Image Placeholder 1"/>
-          <p:cNvSpPr>
-            <a:spLocks noGrp="1" noRot="1" noChangeAspect="1"/>
+          <p:cNvPr id="16385" name="Rectangle 7"/>
+          <p:cNvSpPr>
+            <a:spLocks noGrp="1" noChangeArrowheads="1"/>
+          </p:cNvSpPr>
+          <p:nvPr>
+            <p:ph type="sldNum" sz="quarter" idx="5"/>
+          </p:nvPr>
+        </p:nvSpPr>
+        <p:spPr>
+          <a:noFill/>
+          <a:ln/>
+          <a:extLst>
+            <a:ext uri="{909E8E84-426E-40dd-AFC4-6F175D3DCCD1}">
+              <a14:hiddenFill xmlns:a14="http://schemas.microsoft.com/office/drawing/2010/main" xmlns="">
+                <a:solidFill>
+                  <a:srgbClr val="FFFFFF"/>
+                </a:solidFill>
+              </a14:hiddenFill>
+            </a:ext>
+            <a:ext uri="{91240B29-F687-4f45-9708-019B960494DF}">
+              <a14:hiddenLine xmlns:a14="http://schemas.microsoft.com/office/drawing/2010/main" xmlns="" w="9525">
+                <a:solidFill>
+                  <a:srgbClr val="000000"/>
+                </a:solidFill>
+                <a:miter lim="800000"/>
+                <a:headEnd/>
+                <a:tailEnd/>
+              </a14:hiddenLine>
+            </a:ext>
+          </a:extLst>
+        </p:spPr>
+        <p:txBody>
+          <a:bodyPr/>
+          <a:lstStyle>
+            <a:lvl1pPr>
+              <a:defRPr sz="2400">
+                <a:solidFill>
+                  <a:schemeClr val="tx1"/>
+                </a:solidFill>
+                <a:latin typeface="Helvetica" charset="0"/>
+                <a:ea typeface="ＭＳ Ｐゴシック" charset="0"/>
+                <a:cs typeface="ＭＳ Ｐゴシック" charset="0"/>
+              </a:defRPr>
+            </a:lvl1pPr>
+            <a:lvl2pPr marL="742950" indent="-285750">
+              <a:defRPr sz="2400">
+                <a:solidFill>
+                  <a:schemeClr val="tx1"/>
+                </a:solidFill>
+                <a:latin typeface="Helvetica" charset="0"/>
+                <a:ea typeface="ＭＳ Ｐゴシック" charset="0"/>
+              </a:defRPr>
+            </a:lvl2pPr>
+            <a:lvl3pPr marL="1143000" indent="-228600">
+              <a:defRPr sz="2400">
+                <a:solidFill>
+                  <a:schemeClr val="tx1"/>
+                </a:solidFill>
+                <a:latin typeface="Helvetica" charset="0"/>
+                <a:ea typeface="ＭＳ Ｐゴシック" charset="0"/>
+              </a:defRPr>
+            </a:lvl3pPr>
+            <a:lvl4pPr marL="1600200" indent="-228600">
+              <a:defRPr sz="2400">
+                <a:solidFill>
+                  <a:schemeClr val="tx1"/>
+                </a:solidFill>
+                <a:latin typeface="Helvetica" charset="0"/>
+                <a:ea typeface="ＭＳ Ｐゴシック" charset="0"/>
+              </a:defRPr>
+            </a:lvl4pPr>
+            <a:lvl5pPr marL="2057400" indent="-228600">
+              <a:defRPr sz="2400">
+                <a:solidFill>
+                  <a:schemeClr val="tx1"/>
+                </a:solidFill>
+                <a:latin typeface="Helvetica" charset="0"/>
+                <a:ea typeface="ＭＳ Ｐゴシック" charset="0"/>
+              </a:defRPr>
+            </a:lvl5pPr>
+            <a:lvl6pPr marL="2514600" indent="-228600" eaLnBrk="0" fontAlgn="base" hangingPunct="0">
+              <a:spcBef>
+                <a:spcPct val="0"/>
+              </a:spcBef>
+              <a:spcAft>
+                <a:spcPct val="0"/>
+              </a:spcAft>
+              <a:defRPr sz="2400">
+                <a:solidFill>
+                  <a:schemeClr val="tx1"/>
+                </a:solidFill>
+                <a:latin typeface="Helvetica" charset="0"/>
+                <a:ea typeface="ＭＳ Ｐゴシック" charset="0"/>
+              </a:defRPr>
+            </a:lvl6pPr>
+            <a:lvl7pPr marL="2971800" indent="-228600" eaLnBrk="0" fontAlgn="base" hangingPunct="0">
+              <a:spcBef>
+                <a:spcPct val="0"/>
+              </a:spcBef>
+              <a:spcAft>
+                <a:spcPct val="0"/>
+              </a:spcAft>
+              <a:defRPr sz="2400">
+                <a:solidFill>
+                  <a:schemeClr val="tx1"/>
+                </a:solidFill>
+                <a:latin typeface="Helvetica" charset="0"/>
+                <a:ea typeface="ＭＳ Ｐゴシック" charset="0"/>
+              </a:defRPr>
+            </a:lvl7pPr>
+            <a:lvl8pPr marL="3429000" indent="-228600" eaLnBrk="0" fontAlgn="base" hangingPunct="0">
+              <a:spcBef>
+                <a:spcPct val="0"/>
+              </a:spcBef>
+              <a:spcAft>
+                <a:spcPct val="0"/>
+              </a:spcAft>
+              <a:defRPr sz="2400">
+                <a:solidFill>
+                  <a:schemeClr val="tx1"/>
+                </a:solidFill>
+                <a:latin typeface="Helvetica" charset="0"/>
+                <a:ea typeface="ＭＳ Ｐゴシック" charset="0"/>
+              </a:defRPr>
+            </a:lvl8pPr>
+            <a:lvl9pPr marL="3886200" indent="-228600" eaLnBrk="0" fontAlgn="base" hangingPunct="0">
+              <a:spcBef>
+                <a:spcPct val="0"/>
+              </a:spcBef>
+              <a:spcAft>
+                <a:spcPct val="0"/>
+              </a:spcAft>
+              <a:defRPr sz="2400">
+                <a:solidFill>
+                  <a:schemeClr val="tx1"/>
+                </a:solidFill>
+                <a:latin typeface="Helvetica" charset="0"/>
+                <a:ea typeface="ＭＳ Ｐゴシック" charset="0"/>
+              </a:defRPr>
+            </a:lvl9pPr>
+          </a:lstStyle>
+          <a:p>
+            <a:fld id="{2C1D408F-3F93-4F43-8A63-5C97F2D4AA7C}" type="slidenum">
+              <a:rPr lang="en-US" sz="1200"/>
+              <a:pPr/>
+              <a:t>7</a:t>
+            </a:fld>
+            <a:endParaRPr lang="en-US" sz="1200"/>
+          </a:p>
+        </p:txBody>
+      </p:sp>
+      <p:sp>
+        <p:nvSpPr>
+          <p:cNvPr id="16386" name="Rectangle 2"/>
+          <p:cNvSpPr>
+            <a:spLocks noGrp="1" noRot="1" noChangeAspect="1" noChangeArrowheads="1" noTextEdit="1"/>
           </p:cNvSpPr>
           <p:nvPr>
             <p:ph type="sldImg"/>
           </p:nvPr>
         </p:nvSpPr>
-        <p:spPr/>
-      </p:sp>
-      <p:sp>
-        <p:nvSpPr>
-          <p:cNvPr id="3" name="Notes Placeholder 2"/>
-          <p:cNvSpPr>
-            <a:spLocks noGrp="1"/>
+        <p:spPr>
+          <a:ln/>
+        </p:spPr>
+      </p:sp>
+      <p:sp>
+        <p:nvSpPr>
+          <p:cNvPr id="16387" name="Rectangle 3"/>
+          <p:cNvSpPr>
+            <a:spLocks noGrp="1" noChangeArrowheads="1"/>
           </p:cNvSpPr>
           <p:nvPr>
             <p:ph type="body" idx="1"/>
           </p:nvPr>
         </p:nvSpPr>
-        <p:spPr/>
+        <p:spPr>
+          <a:noFill/>
+          <a:ln/>
+          <a:extLst>
+            <a:ext uri="{909E8E84-426E-40dd-AFC4-6F175D3DCCD1}">
+              <a14:hiddenFill xmlns:a14="http://schemas.microsoft.com/office/drawing/2010/main" xmlns="">
+                <a:solidFill>
+                  <a:srgbClr val="FFFFFF"/>
+                </a:solidFill>
+              </a14:hiddenFill>
+            </a:ext>
+            <a:ext uri="{91240B29-F687-4f45-9708-019B960494DF}">
+              <a14:hiddenLine xmlns:a14="http://schemas.microsoft.com/office/drawing/2010/main" xmlns="" w="9525">
+                <a:solidFill>
+                  <a:srgbClr val="000000"/>
+                </a:solidFill>
+                <a:miter lim="800000"/>
+                <a:headEnd/>
+                <a:tailEnd/>
+              </a14:hiddenLine>
+            </a:ext>
+            <a:ext uri="{FAA26D3D-D897-4be2-8F04-BA451C77F1D7}">
+              <ma14:placeholderFlag xmlns:ma14="http://schemas.microsoft.com/office/mac/drawingml/2011/main" xmlns="" val="1"/>
+            </a:ext>
+          </a:extLst>
+        </p:spPr>
         <p:txBody>
           <a:bodyPr/>
           <a:lstStyle/>
           <a:p>
-            <a:r>
-              <a:rPr lang="en-US"/>
-              <a:t>Do not modify the notes in this section to avoid tampering with the Poll Everywhere activity.
-More info at polleverywhere.com/support
-Have you watched today's assigned video lectures on the course website?</a:t>
-            </a:r>
-          </a:p>
-          <a:p>
-            <a:r>
-              <a:rPr lang="en-US"/>
-              <a:t>https://www.polleverywhere.com/multiple_choice_polls/C5Mf4wqoOzxgPhTX3YZyj?state=opened&amp;flow=Default&amp;onscreen=persist</a:t>
-            </a:r>
-          </a:p>
-        </p:txBody>
-      </p:sp>
-      <p:sp>
-        <p:nvSpPr>
-          <p:cNvPr id="4" name="Slide Number Placeholder 3"/>
-          <p:cNvSpPr>
-            <a:spLocks noGrp="1"/>
-          </p:cNvSpPr>
-          <p:nvPr>
-            <p:ph type="sldNum" sz="quarter" idx="5"/>
-          </p:nvPr>
-        </p:nvSpPr>
-        <p:spPr/>
-        <p:txBody>
-          <a:bodyPr/>
-          <a:lstStyle/>
-          <a:p>
-            <a:fld id="{34649269-E026-4E44-9951-397123D7CFB5}" type="slidenum">
-              <a:rPr lang="en-US" smtClean="0"/>
-              <a:t>7</a:t>
-            </a:fld>
-            <a:endParaRPr lang="en-US"/>
+            <a:pPr eaLnBrk="1" hangingPunct="1"/>
+            <a:endParaRPr lang="en-US">
+              <a:latin typeface="Times" charset="0"/>
+            </a:endParaRPr>
           </a:p>
         </p:txBody>
       </p:sp>
     </p:spTree>
     <p:extLst>
       <p:ext uri="{BB962C8B-B14F-4D97-AF65-F5344CB8AC3E}">
-        <p14:creationId xmlns:p14="http://schemas.microsoft.com/office/powerpoint/2010/main" val="3672834496"/>
+        <p14:creationId xmlns:p14="http://schemas.microsoft.com/office/powerpoint/2010/main" val="881785046"/>
       </p:ext>
     </p:extLst>
   </p:cSld>
@@ -2117,13 +2234,13 @@
               <a:rPr lang="en-US"/>
               <a:t>Do not modify the notes in this section to avoid tampering with the Poll Everywhere activity.
 More info at polleverywhere.com/support
-What comes to mind when I say the word "parasite"?</a:t>
+Have you watched today's assigned video lectures on the course website?</a:t>
             </a:r>
           </a:p>
           <a:p>
             <a:r>
               <a:rPr lang="en-US"/>
-              <a:t>https://www.polleverywhere.com/free_text_polls/n8mRsosII42qUWMLxN3aH</a:t>
+              <a:t>https://www.polleverywhere.com/multiple_choice_polls/C5Mf4wqoOzxgPhTX3YZyj?state=opened&amp;flow=Default&amp;onscreen=persist</a:t>
             </a:r>
           </a:p>
         </p:txBody>
@@ -2154,7 +2271,7 @@
     </p:spTree>
     <p:extLst>
       <p:ext uri="{BB962C8B-B14F-4D97-AF65-F5344CB8AC3E}">
-        <p14:creationId xmlns:p14="http://schemas.microsoft.com/office/powerpoint/2010/main" val="824592114"/>
+        <p14:creationId xmlns:p14="http://schemas.microsoft.com/office/powerpoint/2010/main" val="3672834496"/>
       </p:ext>
     </p:extLst>
   </p:cSld>
@@ -2209,24 +2326,16 @@
           <a:lstStyle/>
           <a:p>
             <a:r>
-              <a:rPr lang="en-US" dirty="0"/>
-              <a:t>https://</a:t>
-            </a:r>
-            <a:r>
-              <a:rPr lang="en-US" dirty="0" err="1"/>
-              <a:t>docs.google.com</a:t>
-            </a:r>
-            <a:r>
-              <a:rPr lang="en-US" dirty="0"/>
-              <a:t>/document/d/1Kk92IApqR0dqP8pjU8KjXSjuFePxToeInctn_EKyqx0/</a:t>
-            </a:r>
-            <a:r>
-              <a:rPr lang="en-US" dirty="0" err="1"/>
-              <a:t>edit?usp</a:t>
-            </a:r>
-            <a:r>
-              <a:rPr lang="en-US" dirty="0"/>
-              <a:t>=sharing</a:t>
+              <a:rPr lang="en-US"/>
+              <a:t>Do not modify the notes in this section to avoid tampering with the Poll Everywhere activity.
+More info at polleverywhere.com/support
+What comes to mind when I say the word "parasite"?</a:t>
+            </a:r>
+          </a:p>
+          <a:p>
+            <a:r>
+              <a:rPr lang="en-US"/>
+              <a:t>https://www.polleverywhere.com/free_text_polls/n8mRsosII42qUWMLxN3aH</a:t>
             </a:r>
           </a:p>
         </p:txBody>
@@ -2257,7 +2366,7 @@
     </p:spTree>
     <p:extLst>
       <p:ext uri="{BB962C8B-B14F-4D97-AF65-F5344CB8AC3E}">
-        <p14:creationId xmlns:p14="http://schemas.microsoft.com/office/powerpoint/2010/main" val="983902734"/>
+        <p14:creationId xmlns:p14="http://schemas.microsoft.com/office/powerpoint/2010/main" val="824592114"/>
       </p:ext>
     </p:extLst>
   </p:cSld>
@@ -5813,1748 +5922,6 @@
 </file>
 
 <file path=ppt/slides/slide10.xml><?xml version="1.0" encoding="utf-8"?>
-<p:sld xmlns:a="http://schemas.openxmlformats.org/drawingml/2006/main" xmlns:r="http://schemas.openxmlformats.org/officeDocument/2006/relationships" xmlns:p="http://schemas.openxmlformats.org/presentationml/2006/main">
-  <p:cSld>
-    <p:bg>
-      <p:bgPr>
-        <a:solidFill>
-          <a:schemeClr val="tx1"/>
-        </a:solidFill>
-        <a:effectLst/>
-      </p:bgPr>
-    </p:bg>
-    <p:spTree>
-      <p:nvGrpSpPr>
-        <p:cNvPr id="1" name="">
-          <a:extLst>
-            <a:ext uri="{FF2B5EF4-FFF2-40B4-BE49-F238E27FC236}">
-              <a16:creationId xmlns:a16="http://schemas.microsoft.com/office/drawing/2014/main" id="{27AB001B-AA19-243B-C0B0-5F6C092FF108}"/>
-            </a:ext>
-          </a:extLst>
-        </p:cNvPr>
-        <p:cNvGrpSpPr/>
-        <p:nvPr/>
-      </p:nvGrpSpPr>
-      <p:grpSpPr>
-        <a:xfrm>
-          <a:off x="0" y="0"/>
-          <a:ext cx="0" cy="0"/>
-          <a:chOff x="0" y="0"/>
-          <a:chExt cx="0" cy="0"/>
-        </a:xfrm>
-      </p:grpSpPr>
-      <p:sp>
-        <p:nvSpPr>
-          <p:cNvPr id="2" name="Rectangle 2">
-            <a:extLst>
-              <a:ext uri="{FF2B5EF4-FFF2-40B4-BE49-F238E27FC236}">
-                <a16:creationId xmlns:a16="http://schemas.microsoft.com/office/drawing/2014/main" id="{BB08F228-F440-0446-E520-DEFF6265B668}"/>
-              </a:ext>
-            </a:extLst>
-          </p:cNvPr>
-          <p:cNvSpPr>
-            <a:spLocks noChangeArrowheads="1"/>
-          </p:cNvSpPr>
-          <p:nvPr/>
-        </p:nvSpPr>
-        <p:spPr bwMode="auto">
-          <a:xfrm>
-            <a:off x="1159918" y="3151193"/>
-            <a:ext cx="9677400" cy="707886"/>
-          </a:xfrm>
-          <a:prstGeom prst="rect">
-            <a:avLst/>
-          </a:prstGeom>
-          <a:noFill/>
-          <a:ln w="9525">
-            <a:noFill/>
-            <a:miter lim="800000"/>
-            <a:headEnd/>
-            <a:tailEnd/>
-          </a:ln>
-          <a:effectLst/>
-        </p:spPr>
-        <p:txBody>
-          <a:bodyPr wrap="square">
-            <a:spAutoFit/>
-          </a:bodyPr>
-          <a:lstStyle/>
-          <a:p>
-            <a:pPr algn="ctr">
-              <a:defRPr/>
-            </a:pPr>
-            <a:r>
-              <a:rPr lang="en-US" sz="4000" dirty="0">
-                <a:solidFill>
-                  <a:srgbClr val="FFFFFF"/>
-                </a:solidFill>
-                <a:effectLst>
-                  <a:outerShdw blurRad="38100" dist="38100" dir="2700000" algn="tl">
-                    <a:srgbClr val="000000"/>
-                  </a:outerShdw>
-                </a:effectLst>
-                <a:latin typeface="Avenir"/>
-                <a:cs typeface="Avenir"/>
-              </a:rPr>
-              <a:t>Take the Qualtrics survey!</a:t>
-            </a:r>
-          </a:p>
-        </p:txBody>
-      </p:sp>
-    </p:spTree>
-    <p:extLst>
-      <p:ext uri="{BB962C8B-B14F-4D97-AF65-F5344CB8AC3E}">
-        <p14:creationId xmlns:p14="http://schemas.microsoft.com/office/powerpoint/2010/main" val="1363838274"/>
-      </p:ext>
-    </p:extLst>
-  </p:cSld>
-  <p:clrMapOvr>
-    <a:masterClrMapping/>
-  </p:clrMapOvr>
-</p:sld>
-</file>
-
-<file path=ppt/slides/slide11.xml><?xml version="1.0" encoding="utf-8"?>
-<p:sld xmlns:a="http://schemas.openxmlformats.org/drawingml/2006/main" xmlns:r="http://schemas.openxmlformats.org/officeDocument/2006/relationships" xmlns:p="http://schemas.openxmlformats.org/presentationml/2006/main">
-  <p:cSld>
-    <p:bg>
-      <p:bgPr>
-        <a:solidFill>
-          <a:schemeClr val="tx1"/>
-        </a:solidFill>
-        <a:effectLst/>
-      </p:bgPr>
-    </p:bg>
-    <p:spTree>
-      <p:nvGrpSpPr>
-        <p:cNvPr id="1" name=""/>
-        <p:cNvGrpSpPr/>
-        <p:nvPr/>
-      </p:nvGrpSpPr>
-      <p:grpSpPr>
-        <a:xfrm>
-          <a:off x="0" y="0"/>
-          <a:ext cx="0" cy="0"/>
-          <a:chOff x="0" y="0"/>
-          <a:chExt cx="0" cy="0"/>
-        </a:xfrm>
-      </p:grpSpPr>
-      <p:sp>
-        <p:nvSpPr>
-          <p:cNvPr id="15361" name="Text Box 3"/>
-          <p:cNvSpPr txBox="1">
-            <a:spLocks noChangeArrowheads="1"/>
-          </p:cNvSpPr>
-          <p:nvPr/>
-        </p:nvSpPr>
-        <p:spPr bwMode="auto">
-          <a:xfrm>
-            <a:off x="6353176" y="3489326"/>
-            <a:ext cx="697627" cy="830997"/>
-          </a:xfrm>
-          <a:prstGeom prst="rect">
-            <a:avLst/>
-          </a:prstGeom>
-          <a:noFill/>
-          <a:ln>
-            <a:noFill/>
-          </a:ln>
-          <a:extLst>
-            <a:ext uri="{909E8E84-426E-40dd-AFC4-6F175D3DCCD1}">
-              <a14:hiddenFill xmlns="" xmlns:a14="http://schemas.microsoft.com/office/drawing/2010/main">
-                <a:solidFill>
-                  <a:srgbClr val="FFFFFF"/>
-                </a:solidFill>
-              </a14:hiddenFill>
-            </a:ext>
-            <a:ext uri="{91240B29-F687-4f45-9708-019B960494DF}">
-              <a14:hiddenLine xmlns="" xmlns:a14="http://schemas.microsoft.com/office/drawing/2010/main" w="9525">
-                <a:solidFill>
-                  <a:srgbClr val="000000"/>
-                </a:solidFill>
-                <a:miter lim="800000"/>
-                <a:headEnd/>
-                <a:tailEnd/>
-              </a14:hiddenLine>
-            </a:ext>
-          </a:extLst>
-        </p:spPr>
-        <p:txBody>
-          <a:bodyPr wrap="none">
-            <a:spAutoFit/>
-          </a:bodyPr>
-          <a:lstStyle>
-            <a:lvl1pPr>
-              <a:defRPr sz="2400">
-                <a:solidFill>
-                  <a:schemeClr val="tx1"/>
-                </a:solidFill>
-                <a:latin typeface="Helvetica" charset="0"/>
-                <a:ea typeface="ＭＳ Ｐゴシック" charset="0"/>
-                <a:cs typeface="ＭＳ Ｐゴシック" charset="0"/>
-              </a:defRPr>
-            </a:lvl1pPr>
-            <a:lvl2pPr marL="742950" indent="-285750">
-              <a:defRPr sz="2400">
-                <a:solidFill>
-                  <a:schemeClr val="tx1"/>
-                </a:solidFill>
-                <a:latin typeface="Helvetica" charset="0"/>
-                <a:ea typeface="ＭＳ Ｐゴシック" charset="0"/>
-              </a:defRPr>
-            </a:lvl2pPr>
-            <a:lvl3pPr marL="1143000" indent="-228600">
-              <a:defRPr sz="2400">
-                <a:solidFill>
-                  <a:schemeClr val="tx1"/>
-                </a:solidFill>
-                <a:latin typeface="Helvetica" charset="0"/>
-                <a:ea typeface="ＭＳ Ｐゴシック" charset="0"/>
-              </a:defRPr>
-            </a:lvl3pPr>
-            <a:lvl4pPr marL="1600200" indent="-228600">
-              <a:defRPr sz="2400">
-                <a:solidFill>
-                  <a:schemeClr val="tx1"/>
-                </a:solidFill>
-                <a:latin typeface="Helvetica" charset="0"/>
-                <a:ea typeface="ＭＳ Ｐゴシック" charset="0"/>
-              </a:defRPr>
-            </a:lvl4pPr>
-            <a:lvl5pPr marL="2057400" indent="-228600">
-              <a:defRPr sz="2400">
-                <a:solidFill>
-                  <a:schemeClr val="tx1"/>
-                </a:solidFill>
-                <a:latin typeface="Helvetica" charset="0"/>
-                <a:ea typeface="ＭＳ Ｐゴシック" charset="0"/>
-              </a:defRPr>
-            </a:lvl5pPr>
-            <a:lvl6pPr marL="2514600" indent="-228600" eaLnBrk="0" fontAlgn="base" hangingPunct="0">
-              <a:spcBef>
-                <a:spcPct val="0"/>
-              </a:spcBef>
-              <a:spcAft>
-                <a:spcPct val="0"/>
-              </a:spcAft>
-              <a:defRPr sz="2400">
-                <a:solidFill>
-                  <a:schemeClr val="tx1"/>
-                </a:solidFill>
-                <a:latin typeface="Helvetica" charset="0"/>
-                <a:ea typeface="ＭＳ Ｐゴシック" charset="0"/>
-              </a:defRPr>
-            </a:lvl6pPr>
-            <a:lvl7pPr marL="2971800" indent="-228600" eaLnBrk="0" fontAlgn="base" hangingPunct="0">
-              <a:spcBef>
-                <a:spcPct val="0"/>
-              </a:spcBef>
-              <a:spcAft>
-                <a:spcPct val="0"/>
-              </a:spcAft>
-              <a:defRPr sz="2400">
-                <a:solidFill>
-                  <a:schemeClr val="tx1"/>
-                </a:solidFill>
-                <a:latin typeface="Helvetica" charset="0"/>
-                <a:ea typeface="ＭＳ Ｐゴシック" charset="0"/>
-              </a:defRPr>
-            </a:lvl7pPr>
-            <a:lvl8pPr marL="3429000" indent="-228600" eaLnBrk="0" fontAlgn="base" hangingPunct="0">
-              <a:spcBef>
-                <a:spcPct val="0"/>
-              </a:spcBef>
-              <a:spcAft>
-                <a:spcPct val="0"/>
-              </a:spcAft>
-              <a:defRPr sz="2400">
-                <a:solidFill>
-                  <a:schemeClr val="tx1"/>
-                </a:solidFill>
-                <a:latin typeface="Helvetica" charset="0"/>
-                <a:ea typeface="ＭＳ Ｐゴシック" charset="0"/>
-              </a:defRPr>
-            </a:lvl8pPr>
-            <a:lvl9pPr marL="3886200" indent="-228600" eaLnBrk="0" fontAlgn="base" hangingPunct="0">
-              <a:spcBef>
-                <a:spcPct val="0"/>
-              </a:spcBef>
-              <a:spcAft>
-                <a:spcPct val="0"/>
-              </a:spcAft>
-              <a:defRPr sz="2400">
-                <a:solidFill>
-                  <a:schemeClr val="tx1"/>
-                </a:solidFill>
-                <a:latin typeface="Helvetica" charset="0"/>
-                <a:ea typeface="ＭＳ Ｐゴシック" charset="0"/>
-              </a:defRPr>
-            </a:lvl9pPr>
-          </a:lstStyle>
-          <a:p>
-            <a:r>
-              <a:rPr lang="en-US">
-                <a:latin typeface="Times" charset="0"/>
-              </a:rPr>
-              <a:t>Bob</a:t>
-            </a:r>
-          </a:p>
-          <a:p>
-            <a:r>
-              <a:rPr lang="en-US">
-                <a:latin typeface="Times" charset="0"/>
-              </a:rPr>
-              <a:t>Bell</a:t>
-            </a:r>
-          </a:p>
-        </p:txBody>
-      </p:sp>
-      <p:pic>
-        <p:nvPicPr>
-          <p:cNvPr id="15362" name="Picture 4"/>
-          <p:cNvPicPr>
-            <a:picLocks noChangeAspect="1"/>
-          </p:cNvPicPr>
-          <p:nvPr/>
-        </p:nvPicPr>
-        <p:blipFill>
-          <a:blip r:embed="rId3">
-            <a:extLst>
-              <a:ext uri="{28A0092B-C50C-407E-A947-70E740481C1C}">
-                <a14:useLocalDpi xmlns:a14="http://schemas.microsoft.com/office/drawing/2010/main" val="0"/>
-              </a:ext>
-            </a:extLst>
-          </a:blip>
-          <a:srcRect/>
-          <a:stretch>
-            <a:fillRect/>
-          </a:stretch>
-        </p:blipFill>
-        <p:spPr bwMode="auto">
-          <a:xfrm>
-            <a:off x="6255835" y="11151"/>
-            <a:ext cx="5936166" cy="6852168"/>
-          </a:xfrm>
-          <a:prstGeom prst="rect">
-            <a:avLst/>
-          </a:prstGeom>
-          <a:noFill/>
-          <a:ln>
-            <a:noFill/>
-          </a:ln>
-          <a:extLst>
-            <a:ext uri="{909E8E84-426E-40dd-AFC4-6F175D3DCCD1}">
-              <a14:hiddenFill xmlns="" xmlns:a14="http://schemas.microsoft.com/office/drawing/2010/main">
-                <a:solidFill>
-                  <a:srgbClr val="FFFFFF"/>
-                </a:solidFill>
-              </a14:hiddenFill>
-            </a:ext>
-            <a:ext uri="{91240B29-F687-4f45-9708-019B960494DF}">
-              <a14:hiddenLine xmlns="" xmlns:a14="http://schemas.microsoft.com/office/drawing/2010/main" w="9525">
-                <a:solidFill>
-                  <a:srgbClr val="000000"/>
-                </a:solidFill>
-                <a:miter lim="800000"/>
-                <a:headEnd/>
-                <a:tailEnd/>
-              </a14:hiddenLine>
-            </a:ext>
-          </a:extLst>
-        </p:spPr>
-      </p:pic>
-      <p:sp>
-        <p:nvSpPr>
-          <p:cNvPr id="15363" name="Rectangle 4"/>
-          <p:cNvSpPr>
-            <a:spLocks noChangeArrowheads="1"/>
-          </p:cNvSpPr>
-          <p:nvPr/>
-        </p:nvSpPr>
-        <p:spPr bwMode="auto">
-          <a:xfrm>
-            <a:off x="-1685597" y="1890712"/>
-            <a:ext cx="7710488" cy="2862322"/>
-          </a:xfrm>
-          <a:prstGeom prst="rect">
-            <a:avLst/>
-          </a:prstGeom>
-          <a:noFill/>
-          <a:ln>
-            <a:noFill/>
-          </a:ln>
-          <a:extLst>
-            <a:ext uri="{909E8E84-426E-40dd-AFC4-6F175D3DCCD1}">
-              <a14:hiddenFill xmlns="" xmlns:a14="http://schemas.microsoft.com/office/drawing/2010/main">
-                <a:solidFill>
-                  <a:srgbClr val="FFFFFF"/>
-                </a:solidFill>
-              </a14:hiddenFill>
-            </a:ext>
-            <a:ext uri="{91240B29-F687-4f45-9708-019B960494DF}">
-              <a14:hiddenLine xmlns="" xmlns:a14="http://schemas.microsoft.com/office/drawing/2010/main" w="9525">
-                <a:solidFill>
-                  <a:srgbClr val="000000"/>
-                </a:solidFill>
-                <a:miter lim="800000"/>
-                <a:headEnd/>
-                <a:tailEnd/>
-              </a14:hiddenLine>
-            </a:ext>
-          </a:extLst>
-        </p:spPr>
-        <p:txBody>
-          <a:bodyPr>
-            <a:spAutoFit/>
-          </a:bodyPr>
-          <a:lstStyle/>
-          <a:p>
-            <a:pPr algn="r"/>
-            <a:r>
-              <a:rPr lang="en-US" sz="6000" dirty="0">
-                <a:solidFill>
-                  <a:srgbClr val="FFFFFF"/>
-                </a:solidFill>
-                <a:latin typeface="Avenir" charset="0"/>
-                <a:cs typeface="Avenir" charset="0"/>
-              </a:rPr>
-              <a:t>Welcome to </a:t>
-            </a:r>
-          </a:p>
-          <a:p>
-            <a:pPr algn="r"/>
-            <a:r>
-              <a:rPr lang="en-US" sz="6000" dirty="0">
-                <a:solidFill>
-                  <a:srgbClr val="FFFFFF"/>
-                </a:solidFill>
-                <a:latin typeface="Avenir" charset="0"/>
-                <a:cs typeface="Avenir" charset="0"/>
-              </a:rPr>
-              <a:t>FISH 406: </a:t>
-            </a:r>
-          </a:p>
-          <a:p>
-            <a:pPr algn="r"/>
-            <a:r>
-              <a:rPr lang="en-US" sz="6000" dirty="0">
-                <a:solidFill>
-                  <a:srgbClr val="FFFFFF"/>
-                </a:solidFill>
-                <a:latin typeface="Avenir" charset="0"/>
-                <a:cs typeface="Avenir" charset="0"/>
-              </a:rPr>
-              <a:t>Parasite Ecology</a:t>
-            </a:r>
-          </a:p>
-        </p:txBody>
-      </p:sp>
-    </p:spTree>
-    <p:extLst>
-      <p:ext uri="{BB962C8B-B14F-4D97-AF65-F5344CB8AC3E}">
-        <p14:creationId xmlns:p14="http://schemas.microsoft.com/office/powerpoint/2010/main" val="2771182970"/>
-      </p:ext>
-    </p:extLst>
-  </p:cSld>
-  <p:clrMapOvr>
-    <a:masterClrMapping/>
-  </p:clrMapOvr>
-</p:sld>
-</file>
-
-<file path=ppt/slides/slide2.xml><?xml version="1.0" encoding="utf-8"?>
-<p:sld xmlns:a="http://schemas.openxmlformats.org/drawingml/2006/main" xmlns:r="http://schemas.openxmlformats.org/officeDocument/2006/relationships" xmlns:p="http://schemas.openxmlformats.org/presentationml/2006/main">
-  <p:cSld>
-    <p:bg>
-      <p:bgPr>
-        <a:solidFill>
-          <a:schemeClr val="tx1"/>
-        </a:solidFill>
-        <a:effectLst/>
-      </p:bgPr>
-    </p:bg>
-    <p:spTree>
-      <p:nvGrpSpPr>
-        <p:cNvPr id="1" name=""/>
-        <p:cNvGrpSpPr/>
-        <p:nvPr/>
-      </p:nvGrpSpPr>
-      <p:grpSpPr>
-        <a:xfrm>
-          <a:off x="0" y="0"/>
-          <a:ext cx="0" cy="0"/>
-          <a:chOff x="0" y="0"/>
-          <a:chExt cx="0" cy="0"/>
-        </a:xfrm>
-      </p:grpSpPr>
-      <p:sp>
-        <p:nvSpPr>
-          <p:cNvPr id="2050" name="Rectangle 2"/>
-          <p:cNvSpPr>
-            <a:spLocks noChangeArrowheads="1"/>
-          </p:cNvSpPr>
-          <p:nvPr/>
-        </p:nvSpPr>
-        <p:spPr bwMode="auto">
-          <a:xfrm>
-            <a:off x="1188948" y="1467536"/>
-            <a:ext cx="9677400" cy="3693319"/>
-          </a:xfrm>
-          <a:prstGeom prst="rect">
-            <a:avLst/>
-          </a:prstGeom>
-          <a:noFill/>
-          <a:ln w="9525">
-            <a:noFill/>
-            <a:miter lim="800000"/>
-            <a:headEnd/>
-            <a:tailEnd/>
-          </a:ln>
-          <a:effectLst/>
-        </p:spPr>
-        <p:txBody>
-          <a:bodyPr wrap="square">
-            <a:spAutoFit/>
-          </a:bodyPr>
-          <a:lstStyle/>
-          <a:p>
-            <a:pPr algn="ctr">
-              <a:defRPr/>
-            </a:pPr>
-            <a:r>
-              <a:rPr lang="en-US" sz="4000" dirty="0">
-                <a:solidFill>
-                  <a:srgbClr val="FFFFFF"/>
-                </a:solidFill>
-                <a:effectLst>
-                  <a:outerShdw blurRad="38100" dist="38100" dir="2700000" algn="tl">
-                    <a:srgbClr val="000000"/>
-                  </a:outerShdw>
-                </a:effectLst>
-                <a:latin typeface="Avenir"/>
-                <a:cs typeface="Avenir"/>
-              </a:rPr>
-              <a:t>FISH 406</a:t>
-            </a:r>
-          </a:p>
-          <a:p>
-            <a:pPr algn="ctr">
-              <a:defRPr/>
-            </a:pPr>
-            <a:r>
-              <a:rPr lang="en-US" sz="4000" dirty="0">
-                <a:solidFill>
-                  <a:srgbClr val="FFFFFF"/>
-                </a:solidFill>
-                <a:effectLst>
-                  <a:outerShdw blurRad="38100" dist="38100" dir="2700000" algn="tl">
-                    <a:srgbClr val="000000"/>
-                  </a:outerShdw>
-                </a:effectLst>
-                <a:latin typeface="Avenir"/>
-                <a:cs typeface="Avenir"/>
-              </a:rPr>
-              <a:t>Parasite Ecology</a:t>
-            </a:r>
-          </a:p>
-          <a:p>
-            <a:pPr algn="ctr">
-              <a:defRPr/>
-            </a:pPr>
-            <a:r>
-              <a:rPr lang="en-US" sz="4000" dirty="0">
-                <a:solidFill>
-                  <a:srgbClr val="FFFFFF"/>
-                </a:solidFill>
-                <a:effectLst>
-                  <a:outerShdw blurRad="38100" dist="38100" dir="2700000" algn="tl">
-                    <a:srgbClr val="000000"/>
-                  </a:outerShdw>
-                </a:effectLst>
-                <a:latin typeface="Avenir"/>
-                <a:cs typeface="Avenir"/>
-              </a:rPr>
-              <a:t>Autumn 2025</a:t>
-            </a:r>
-          </a:p>
-          <a:p>
-            <a:pPr>
-              <a:defRPr/>
-            </a:pPr>
-            <a:endParaRPr lang="en-US" dirty="0">
-              <a:solidFill>
-                <a:srgbClr val="FFFFFF"/>
-              </a:solidFill>
-              <a:effectLst>
-                <a:outerShdw blurRad="38100" dist="38100" dir="2700000" algn="tl">
-                  <a:srgbClr val="000000"/>
-                </a:outerShdw>
-              </a:effectLst>
-              <a:latin typeface="Avenir"/>
-              <a:cs typeface="Avenir"/>
-            </a:endParaRPr>
-          </a:p>
-          <a:p>
-            <a:pPr lvl="2">
-              <a:defRPr/>
-            </a:pPr>
-            <a:r>
-              <a:rPr lang="en-US" sz="3200" dirty="0">
-                <a:solidFill>
-                  <a:srgbClr val="FFFFFF"/>
-                </a:solidFill>
-                <a:effectLst>
-                  <a:outerShdw blurRad="38100" dist="38100" dir="2700000" algn="tl">
-                    <a:srgbClr val="000000"/>
-                  </a:outerShdw>
-                </a:effectLst>
-                <a:latin typeface="Avenir"/>
-                <a:cs typeface="Avenir"/>
-              </a:rPr>
-              <a:t>Instructor: 	Dr. Chelsea Wood</a:t>
-            </a:r>
-          </a:p>
-          <a:p>
-            <a:pPr lvl="2">
-              <a:defRPr/>
-            </a:pPr>
-            <a:r>
-              <a:rPr lang="en-US" sz="3200" dirty="0">
-                <a:solidFill>
-                  <a:srgbClr val="FFFFFF"/>
-                </a:solidFill>
-                <a:effectLst>
-                  <a:outerShdw blurRad="38100" dist="38100" dir="2700000" algn="tl">
-                    <a:srgbClr val="000000"/>
-                  </a:outerShdw>
-                </a:effectLst>
-                <a:latin typeface="Avenir"/>
-                <a:cs typeface="Avenir"/>
-              </a:rPr>
-              <a:t>TAs:			Gabby Commisso and </a:t>
-            </a:r>
-          </a:p>
-          <a:p>
-            <a:pPr lvl="2">
-              <a:defRPr/>
-            </a:pPr>
-            <a:r>
-              <a:rPr lang="en-US" sz="3200" dirty="0">
-                <a:solidFill>
-                  <a:srgbClr val="FFFFFF"/>
-                </a:solidFill>
-                <a:effectLst>
-                  <a:outerShdw blurRad="38100" dist="38100" dir="2700000" algn="tl">
-                    <a:srgbClr val="000000"/>
-                  </a:outerShdw>
-                </a:effectLst>
-                <a:latin typeface="Avenir"/>
-                <a:cs typeface="Avenir"/>
-              </a:rPr>
-              <a:t>			Connor Whalen	</a:t>
-            </a:r>
-          </a:p>
-        </p:txBody>
-      </p:sp>
-    </p:spTree>
-    <p:extLst>
-      <p:ext uri="{BB962C8B-B14F-4D97-AF65-F5344CB8AC3E}">
-        <p14:creationId xmlns:p14="http://schemas.microsoft.com/office/powerpoint/2010/main" val="352723627"/>
-      </p:ext>
-    </p:extLst>
-  </p:cSld>
-  <p:clrMapOvr>
-    <a:masterClrMapping/>
-  </p:clrMapOvr>
-</p:sld>
-</file>
-
-<file path=ppt/slides/slide3.xml><?xml version="1.0" encoding="utf-8"?>
-<p:sld xmlns:a="http://schemas.openxmlformats.org/drawingml/2006/main" xmlns:r="http://schemas.openxmlformats.org/officeDocument/2006/relationships" xmlns:p="http://schemas.openxmlformats.org/presentationml/2006/main">
-  <p:cSld>
-    <p:bg>
-      <p:bgPr>
-        <a:solidFill>
-          <a:schemeClr val="tx1"/>
-        </a:solidFill>
-        <a:effectLst/>
-      </p:bgPr>
-    </p:bg>
-    <p:spTree>
-      <p:nvGrpSpPr>
-        <p:cNvPr id="1" name=""/>
-        <p:cNvGrpSpPr/>
-        <p:nvPr/>
-      </p:nvGrpSpPr>
-      <p:grpSpPr>
-        <a:xfrm>
-          <a:off x="0" y="0"/>
-          <a:ext cx="0" cy="0"/>
-          <a:chOff x="0" y="0"/>
-          <a:chExt cx="0" cy="0"/>
-        </a:xfrm>
-      </p:grpSpPr>
-      <p:sp>
-        <p:nvSpPr>
-          <p:cNvPr id="2" name="Rectangle 2">
-            <a:extLst>
-              <a:ext uri="{FF2B5EF4-FFF2-40B4-BE49-F238E27FC236}">
-                <a16:creationId xmlns:a16="http://schemas.microsoft.com/office/drawing/2014/main" id="{B524D076-306C-BB7A-FF7C-13EB668776DF}"/>
-              </a:ext>
-            </a:extLst>
-          </p:cNvPr>
-          <p:cNvSpPr>
-            <a:spLocks noChangeArrowheads="1"/>
-          </p:cNvSpPr>
-          <p:nvPr/>
-        </p:nvSpPr>
-        <p:spPr bwMode="auto">
-          <a:xfrm>
-            <a:off x="1232490" y="2251307"/>
-            <a:ext cx="9677400" cy="1938992"/>
-          </a:xfrm>
-          <a:prstGeom prst="rect">
-            <a:avLst/>
-          </a:prstGeom>
-          <a:noFill/>
-          <a:ln w="9525">
-            <a:noFill/>
-            <a:miter lim="800000"/>
-            <a:headEnd/>
-            <a:tailEnd/>
-          </a:ln>
-          <a:effectLst/>
-        </p:spPr>
-        <p:txBody>
-          <a:bodyPr wrap="square">
-            <a:spAutoFit/>
-          </a:bodyPr>
-          <a:lstStyle/>
-          <a:p>
-            <a:pPr algn="ctr">
-              <a:defRPr/>
-            </a:pPr>
-            <a:r>
-              <a:rPr lang="en-US" sz="4000" dirty="0">
-                <a:solidFill>
-                  <a:srgbClr val="FFFFFF"/>
-                </a:solidFill>
-                <a:effectLst>
-                  <a:outerShdw blurRad="38100" dist="38100" dir="2700000" algn="tl">
-                    <a:srgbClr val="000000"/>
-                  </a:outerShdw>
-                </a:effectLst>
-                <a:latin typeface="Avenir"/>
-                <a:cs typeface="Avenir"/>
-              </a:rPr>
-              <a:t>Course website: </a:t>
-            </a:r>
-          </a:p>
-          <a:p>
-            <a:pPr algn="ctr">
-              <a:defRPr/>
-            </a:pPr>
-            <a:endParaRPr lang="en-US" sz="4000" dirty="0">
-              <a:solidFill>
-                <a:srgbClr val="FFFFFF"/>
-              </a:solidFill>
-              <a:effectLst>
-                <a:outerShdw blurRad="38100" dist="38100" dir="2700000" algn="tl">
-                  <a:srgbClr val="000000"/>
-                </a:outerShdw>
-              </a:effectLst>
-              <a:latin typeface="Avenir"/>
-              <a:cs typeface="Avenir"/>
-            </a:endParaRPr>
-          </a:p>
-          <a:p>
-            <a:pPr algn="ctr">
-              <a:defRPr/>
-            </a:pPr>
-            <a:r>
-              <a:rPr lang="en-US" sz="4000" dirty="0">
-                <a:solidFill>
-                  <a:srgbClr val="FFFFFF"/>
-                </a:solidFill>
-                <a:effectLst>
-                  <a:outerShdw blurRad="38100" dist="38100" dir="2700000" algn="tl">
-                    <a:srgbClr val="000000"/>
-                  </a:outerShdw>
-                </a:effectLst>
-                <a:latin typeface="Avenir"/>
-                <a:cs typeface="Avenir"/>
-              </a:rPr>
-              <a:t>https://wood-</a:t>
-            </a:r>
-            <a:r>
-              <a:rPr lang="en-US" sz="4000" dirty="0" err="1">
-                <a:solidFill>
-                  <a:srgbClr val="FFFFFF"/>
-                </a:solidFill>
-                <a:effectLst>
-                  <a:outerShdw blurRad="38100" dist="38100" dir="2700000" algn="tl">
-                    <a:srgbClr val="000000"/>
-                  </a:outerShdw>
-                </a:effectLst>
-                <a:latin typeface="Avenir"/>
-                <a:cs typeface="Avenir"/>
-              </a:rPr>
-              <a:t>lab.github.io</a:t>
-            </a:r>
-            <a:r>
-              <a:rPr lang="en-US" sz="4000" dirty="0">
-                <a:solidFill>
-                  <a:srgbClr val="FFFFFF"/>
-                </a:solidFill>
-                <a:effectLst>
-                  <a:outerShdw blurRad="38100" dist="38100" dir="2700000" algn="tl">
-                    <a:srgbClr val="000000"/>
-                  </a:outerShdw>
-                </a:effectLst>
-                <a:latin typeface="Avenir"/>
-                <a:cs typeface="Avenir"/>
-              </a:rPr>
-              <a:t>/fish_406</a:t>
-            </a:r>
-          </a:p>
-        </p:txBody>
-      </p:sp>
-    </p:spTree>
-    <p:extLst>
-      <p:ext uri="{BB962C8B-B14F-4D97-AF65-F5344CB8AC3E}">
-        <p14:creationId xmlns:p14="http://schemas.microsoft.com/office/powerpoint/2010/main" val="2405787196"/>
-      </p:ext>
-    </p:extLst>
-  </p:cSld>
-  <p:clrMapOvr>
-    <a:masterClrMapping/>
-  </p:clrMapOvr>
-</p:sld>
-</file>
-
-<file path=ppt/slides/slide4.xml><?xml version="1.0" encoding="utf-8"?>
-<p:sld xmlns:a="http://schemas.openxmlformats.org/drawingml/2006/main" xmlns:r="http://schemas.openxmlformats.org/officeDocument/2006/relationships" xmlns:p="http://schemas.openxmlformats.org/presentationml/2006/main">
-  <p:cSld>
-    <p:bg>
-      <p:bgPr>
-        <a:solidFill>
-          <a:schemeClr val="tx1"/>
-        </a:solidFill>
-        <a:effectLst/>
-      </p:bgPr>
-    </p:bg>
-    <p:spTree>
-      <p:nvGrpSpPr>
-        <p:cNvPr id="1" name="">
-          <a:extLst>
-            <a:ext uri="{FF2B5EF4-FFF2-40B4-BE49-F238E27FC236}">
-              <a16:creationId xmlns:a16="http://schemas.microsoft.com/office/drawing/2014/main" id="{FF7C0096-F98B-6232-876E-41380BE9913E}"/>
-            </a:ext>
-          </a:extLst>
-        </p:cNvPr>
-        <p:cNvGrpSpPr/>
-        <p:nvPr/>
-      </p:nvGrpSpPr>
-      <p:grpSpPr>
-        <a:xfrm>
-          <a:off x="0" y="0"/>
-          <a:ext cx="0" cy="0"/>
-          <a:chOff x="0" y="0"/>
-          <a:chExt cx="0" cy="0"/>
-        </a:xfrm>
-      </p:grpSpPr>
-      <p:sp>
-        <p:nvSpPr>
-          <p:cNvPr id="2" name="Rectangle 2">
-            <a:extLst>
-              <a:ext uri="{FF2B5EF4-FFF2-40B4-BE49-F238E27FC236}">
-                <a16:creationId xmlns:a16="http://schemas.microsoft.com/office/drawing/2014/main" id="{AF4E8C28-3817-A241-2E96-0195316B06DD}"/>
-              </a:ext>
-            </a:extLst>
-          </p:cNvPr>
-          <p:cNvSpPr>
-            <a:spLocks noChangeArrowheads="1"/>
-          </p:cNvSpPr>
-          <p:nvPr/>
-        </p:nvSpPr>
-        <p:spPr bwMode="auto">
-          <a:xfrm>
-            <a:off x="1232490" y="2265821"/>
-            <a:ext cx="9677400" cy="1938992"/>
-          </a:xfrm>
-          <a:prstGeom prst="rect">
-            <a:avLst/>
-          </a:prstGeom>
-          <a:noFill/>
-          <a:ln w="9525">
-            <a:noFill/>
-            <a:miter lim="800000"/>
-            <a:headEnd/>
-            <a:tailEnd/>
-          </a:ln>
-          <a:effectLst/>
-        </p:spPr>
-        <p:txBody>
-          <a:bodyPr wrap="square">
-            <a:spAutoFit/>
-          </a:bodyPr>
-          <a:lstStyle/>
-          <a:p>
-            <a:pPr algn="ctr">
-              <a:defRPr/>
-            </a:pPr>
-            <a:r>
-              <a:rPr lang="en-US" sz="4000" dirty="0">
-                <a:solidFill>
-                  <a:srgbClr val="FFFFFF"/>
-                </a:solidFill>
-                <a:effectLst>
-                  <a:outerShdw blurRad="38100" dist="38100" dir="2700000" algn="tl">
-                    <a:srgbClr val="000000"/>
-                  </a:outerShdw>
-                </a:effectLst>
-                <a:latin typeface="Avenir"/>
-                <a:cs typeface="Avenir"/>
-              </a:rPr>
-              <a:t>Course Canvas page: </a:t>
-            </a:r>
-          </a:p>
-          <a:p>
-            <a:pPr algn="ctr">
-              <a:defRPr/>
-            </a:pPr>
-            <a:endParaRPr lang="en-US" sz="4000" dirty="0">
-              <a:solidFill>
-                <a:srgbClr val="FFFFFF"/>
-              </a:solidFill>
-              <a:effectLst>
-                <a:outerShdw blurRad="38100" dist="38100" dir="2700000" algn="tl">
-                  <a:srgbClr val="000000"/>
-                </a:outerShdw>
-              </a:effectLst>
-              <a:latin typeface="Avenir"/>
-              <a:cs typeface="Avenir"/>
-            </a:endParaRPr>
-          </a:p>
-          <a:p>
-            <a:pPr algn="ctr">
-              <a:defRPr/>
-            </a:pPr>
-            <a:r>
-              <a:rPr lang="en-US" sz="4000" dirty="0">
-                <a:solidFill>
-                  <a:srgbClr val="FFFFFF"/>
-                </a:solidFill>
-                <a:effectLst>
-                  <a:outerShdw blurRad="38100" dist="38100" dir="2700000" algn="tl">
-                    <a:srgbClr val="000000"/>
-                  </a:outerShdw>
-                </a:effectLst>
-                <a:latin typeface="Avenir"/>
-                <a:cs typeface="Avenir"/>
-              </a:rPr>
-              <a:t>https://</a:t>
-            </a:r>
-            <a:r>
-              <a:rPr lang="en-US" sz="4000" dirty="0" err="1">
-                <a:solidFill>
-                  <a:srgbClr val="FFFFFF"/>
-                </a:solidFill>
-                <a:effectLst>
-                  <a:outerShdw blurRad="38100" dist="38100" dir="2700000" algn="tl">
-                    <a:srgbClr val="000000"/>
-                  </a:outerShdw>
-                </a:effectLst>
-                <a:latin typeface="Avenir"/>
-                <a:cs typeface="Avenir"/>
-              </a:rPr>
-              <a:t>canvas.uw.edu</a:t>
-            </a:r>
-            <a:r>
-              <a:rPr lang="en-US" sz="4000" dirty="0">
-                <a:solidFill>
-                  <a:srgbClr val="FFFFFF"/>
-                </a:solidFill>
-                <a:effectLst>
-                  <a:outerShdw blurRad="38100" dist="38100" dir="2700000" algn="tl">
-                    <a:srgbClr val="000000"/>
-                  </a:outerShdw>
-                </a:effectLst>
-                <a:latin typeface="Avenir"/>
-                <a:cs typeface="Avenir"/>
-              </a:rPr>
-              <a:t>/courses/1829825</a:t>
-            </a:r>
-          </a:p>
-        </p:txBody>
-      </p:sp>
-    </p:spTree>
-    <p:extLst>
-      <p:ext uri="{BB962C8B-B14F-4D97-AF65-F5344CB8AC3E}">
-        <p14:creationId xmlns:p14="http://schemas.microsoft.com/office/powerpoint/2010/main" val="3370688028"/>
-      </p:ext>
-    </p:extLst>
-  </p:cSld>
-  <p:clrMapOvr>
-    <a:masterClrMapping/>
-  </p:clrMapOvr>
-</p:sld>
-</file>
-
-<file path=ppt/slides/slide5.xml><?xml version="1.0" encoding="utf-8"?>
-<p:sld xmlns:a="http://schemas.openxmlformats.org/drawingml/2006/main" xmlns:r="http://schemas.openxmlformats.org/officeDocument/2006/relationships" xmlns:p="http://schemas.openxmlformats.org/presentationml/2006/main">
-  <p:cSld>
-    <p:bg>
-      <p:bgPr>
-        <a:solidFill>
-          <a:schemeClr val="tx1"/>
-        </a:solidFill>
-        <a:effectLst/>
-      </p:bgPr>
-    </p:bg>
-    <p:spTree>
-      <p:nvGrpSpPr>
-        <p:cNvPr id="1" name=""/>
-        <p:cNvGrpSpPr/>
-        <p:nvPr/>
-      </p:nvGrpSpPr>
-      <p:grpSpPr>
-        <a:xfrm>
-          <a:off x="0" y="0"/>
-          <a:ext cx="0" cy="0"/>
-          <a:chOff x="0" y="0"/>
-          <a:chExt cx="0" cy="0"/>
-        </a:xfrm>
-      </p:grpSpPr>
-      <p:sp>
-        <p:nvSpPr>
-          <p:cNvPr id="2050" name="Rectangle 2"/>
-          <p:cNvSpPr>
-            <a:spLocks noChangeArrowheads="1"/>
-          </p:cNvSpPr>
-          <p:nvPr/>
-        </p:nvSpPr>
-        <p:spPr bwMode="auto">
-          <a:xfrm>
-            <a:off x="1874042" y="687328"/>
-            <a:ext cx="8443916" cy="5816977"/>
-          </a:xfrm>
-          <a:prstGeom prst="rect">
-            <a:avLst/>
-          </a:prstGeom>
-          <a:noFill/>
-          <a:ln w="9525">
-            <a:noFill/>
-            <a:miter lim="800000"/>
-            <a:headEnd/>
-            <a:tailEnd/>
-          </a:ln>
-          <a:effectLst/>
-        </p:spPr>
-        <p:txBody>
-          <a:bodyPr wrap="square">
-            <a:spAutoFit/>
-          </a:bodyPr>
-          <a:lstStyle/>
-          <a:p>
-            <a:pPr algn="ctr">
-              <a:defRPr/>
-            </a:pPr>
-            <a:r>
-              <a:rPr lang="en-US" sz="6000" b="1" dirty="0">
-                <a:solidFill>
-                  <a:srgbClr val="FFFFFF"/>
-                </a:solidFill>
-                <a:latin typeface="Avenir"/>
-                <a:cs typeface="Avenir"/>
-              </a:rPr>
-              <a:t>class norms</a:t>
-            </a:r>
-          </a:p>
-          <a:p>
-            <a:pPr algn="ctr">
-              <a:defRPr/>
-            </a:pPr>
-            <a:endParaRPr lang="en-US" sz="3000" dirty="0">
-              <a:solidFill>
-                <a:srgbClr val="FFFFFF"/>
-              </a:solidFill>
-              <a:latin typeface="Avenir"/>
-              <a:cs typeface="Avenir"/>
-            </a:endParaRPr>
-          </a:p>
-          <a:p>
-            <a:pPr marL="571500" indent="-571500">
-              <a:buFont typeface="Arial" panose="020B0604020202020204" pitchFamily="34" charset="0"/>
-              <a:buChar char="•"/>
-              <a:defRPr/>
-            </a:pPr>
-            <a:r>
-              <a:rPr lang="en-US" sz="4000" dirty="0">
-                <a:solidFill>
-                  <a:srgbClr val="FFFFFF"/>
-                </a:solidFill>
-                <a:latin typeface="Avenir"/>
-                <a:cs typeface="Avenir"/>
-              </a:rPr>
-              <a:t>growth mindset</a:t>
-            </a:r>
-          </a:p>
-          <a:p>
-            <a:pPr marL="571500" indent="-571500">
-              <a:buFont typeface="Arial" panose="020B0604020202020204" pitchFamily="34" charset="0"/>
-              <a:buChar char="•"/>
-              <a:defRPr/>
-            </a:pPr>
-            <a:r>
-              <a:rPr lang="en-US" sz="4000" dirty="0">
-                <a:solidFill>
-                  <a:srgbClr val="FFFFFF"/>
-                </a:solidFill>
-                <a:latin typeface="Avenir"/>
-                <a:cs typeface="Avenir"/>
-              </a:rPr>
-              <a:t>respect and support one another</a:t>
-            </a:r>
-          </a:p>
-          <a:p>
-            <a:pPr marL="571500" indent="-571500">
-              <a:buFont typeface="Arial" panose="020B0604020202020204" pitchFamily="34" charset="0"/>
-              <a:buChar char="•"/>
-              <a:defRPr/>
-            </a:pPr>
-            <a:r>
-              <a:rPr lang="en-US" sz="4000" dirty="0">
-                <a:solidFill>
-                  <a:srgbClr val="FFFFFF"/>
-                </a:solidFill>
-                <a:latin typeface="Avenir"/>
-                <a:cs typeface="Avenir"/>
-              </a:rPr>
-              <a:t>actively listen</a:t>
-            </a:r>
-          </a:p>
-          <a:p>
-            <a:pPr marL="571500" indent="-571500">
-              <a:buFont typeface="Arial" panose="020B0604020202020204" pitchFamily="34" charset="0"/>
-              <a:buChar char="•"/>
-              <a:defRPr/>
-            </a:pPr>
-            <a:r>
-              <a:rPr lang="en-US" sz="4000" dirty="0">
-                <a:solidFill>
-                  <a:srgbClr val="FFFFFF"/>
-                </a:solidFill>
-                <a:latin typeface="Avenir"/>
-                <a:cs typeface="Avenir"/>
-              </a:rPr>
-              <a:t>contribute</a:t>
-            </a:r>
-          </a:p>
-          <a:p>
-            <a:pPr marL="571500" indent="-571500">
-              <a:buFont typeface="Arial" panose="020B0604020202020204" pitchFamily="34" charset="0"/>
-              <a:buChar char="•"/>
-              <a:defRPr/>
-            </a:pPr>
-            <a:r>
-              <a:rPr lang="en-US" sz="4000" dirty="0">
-                <a:solidFill>
-                  <a:srgbClr val="FFFFFF"/>
-                </a:solidFill>
-                <a:latin typeface="Avenir"/>
-                <a:cs typeface="Avenir"/>
-              </a:rPr>
-              <a:t>ask questions</a:t>
-            </a:r>
-          </a:p>
-          <a:p>
-            <a:pPr marL="571500" indent="-571500">
-              <a:buFont typeface="Arial" panose="020B0604020202020204" pitchFamily="34" charset="0"/>
-              <a:buChar char="•"/>
-              <a:defRPr/>
-            </a:pPr>
-            <a:r>
-              <a:rPr lang="en-US" sz="4000" dirty="0">
-                <a:solidFill>
-                  <a:srgbClr val="FFFFFF"/>
-                </a:solidFill>
-                <a:latin typeface="Avenir"/>
-                <a:cs typeface="Avenir"/>
-              </a:rPr>
-              <a:t>monitor air time</a:t>
-            </a:r>
-          </a:p>
-          <a:p>
-            <a:pPr algn="ctr">
-              <a:defRPr/>
-            </a:pPr>
-            <a:endParaRPr lang="en-US" sz="3200" dirty="0">
-              <a:solidFill>
-                <a:srgbClr val="FFFFFF"/>
-              </a:solidFill>
-              <a:latin typeface="Avenir"/>
-              <a:cs typeface="Avenir"/>
-            </a:endParaRPr>
-          </a:p>
-        </p:txBody>
-      </p:sp>
-    </p:spTree>
-    <p:extLst>
-      <p:ext uri="{BB962C8B-B14F-4D97-AF65-F5344CB8AC3E}">
-        <p14:creationId xmlns:p14="http://schemas.microsoft.com/office/powerpoint/2010/main" val="2389094736"/>
-      </p:ext>
-    </p:extLst>
-  </p:cSld>
-  <p:clrMapOvr>
-    <a:masterClrMapping/>
-  </p:clrMapOvr>
-</p:sld>
-</file>
-
-<file path=ppt/slides/slide6.xml><?xml version="1.0" encoding="utf-8"?>
-<p:sld xmlns:a="http://schemas.openxmlformats.org/drawingml/2006/main" xmlns:r="http://schemas.openxmlformats.org/officeDocument/2006/relationships" xmlns:p="http://schemas.openxmlformats.org/presentationml/2006/main">
-  <p:cSld>
-    <p:bg>
-      <p:bgPr>
-        <a:solidFill>
-          <a:schemeClr val="tx1"/>
-        </a:solidFill>
-        <a:effectLst/>
-      </p:bgPr>
-    </p:bg>
-    <p:spTree>
-      <p:nvGrpSpPr>
-        <p:cNvPr id="1" name=""/>
-        <p:cNvGrpSpPr/>
-        <p:nvPr/>
-      </p:nvGrpSpPr>
-      <p:grpSpPr>
-        <a:xfrm>
-          <a:off x="0" y="0"/>
-          <a:ext cx="0" cy="0"/>
-          <a:chOff x="0" y="0"/>
-          <a:chExt cx="0" cy="0"/>
-        </a:xfrm>
-      </p:grpSpPr>
-      <p:sp>
-        <p:nvSpPr>
-          <p:cNvPr id="15361" name="Text Box 3"/>
-          <p:cNvSpPr txBox="1">
-            <a:spLocks noChangeArrowheads="1"/>
-          </p:cNvSpPr>
-          <p:nvPr/>
-        </p:nvSpPr>
-        <p:spPr bwMode="auto">
-          <a:xfrm>
-            <a:off x="6353176" y="3489326"/>
-            <a:ext cx="697627" cy="830997"/>
-          </a:xfrm>
-          <a:prstGeom prst="rect">
-            <a:avLst/>
-          </a:prstGeom>
-          <a:noFill/>
-          <a:ln>
-            <a:noFill/>
-          </a:ln>
-          <a:extLst>
-            <a:ext uri="{909E8E84-426E-40dd-AFC4-6F175D3DCCD1}">
-              <a14:hiddenFill xmlns="" xmlns:a14="http://schemas.microsoft.com/office/drawing/2010/main">
-                <a:solidFill>
-                  <a:srgbClr val="FFFFFF"/>
-                </a:solidFill>
-              </a14:hiddenFill>
-            </a:ext>
-            <a:ext uri="{91240B29-F687-4f45-9708-019B960494DF}">
-              <a14:hiddenLine xmlns="" xmlns:a14="http://schemas.microsoft.com/office/drawing/2010/main" w="9525">
-                <a:solidFill>
-                  <a:srgbClr val="000000"/>
-                </a:solidFill>
-                <a:miter lim="800000"/>
-                <a:headEnd/>
-                <a:tailEnd/>
-              </a14:hiddenLine>
-            </a:ext>
-          </a:extLst>
-        </p:spPr>
-        <p:txBody>
-          <a:bodyPr wrap="none">
-            <a:spAutoFit/>
-          </a:bodyPr>
-          <a:lstStyle>
-            <a:lvl1pPr>
-              <a:defRPr sz="2400">
-                <a:solidFill>
-                  <a:schemeClr val="tx1"/>
-                </a:solidFill>
-                <a:latin typeface="Helvetica" charset="0"/>
-                <a:ea typeface="ＭＳ Ｐゴシック" charset="0"/>
-                <a:cs typeface="ＭＳ Ｐゴシック" charset="0"/>
-              </a:defRPr>
-            </a:lvl1pPr>
-            <a:lvl2pPr marL="742950" indent="-285750">
-              <a:defRPr sz="2400">
-                <a:solidFill>
-                  <a:schemeClr val="tx1"/>
-                </a:solidFill>
-                <a:latin typeface="Helvetica" charset="0"/>
-                <a:ea typeface="ＭＳ Ｐゴシック" charset="0"/>
-              </a:defRPr>
-            </a:lvl2pPr>
-            <a:lvl3pPr marL="1143000" indent="-228600">
-              <a:defRPr sz="2400">
-                <a:solidFill>
-                  <a:schemeClr val="tx1"/>
-                </a:solidFill>
-                <a:latin typeface="Helvetica" charset="0"/>
-                <a:ea typeface="ＭＳ Ｐゴシック" charset="0"/>
-              </a:defRPr>
-            </a:lvl3pPr>
-            <a:lvl4pPr marL="1600200" indent="-228600">
-              <a:defRPr sz="2400">
-                <a:solidFill>
-                  <a:schemeClr val="tx1"/>
-                </a:solidFill>
-                <a:latin typeface="Helvetica" charset="0"/>
-                <a:ea typeface="ＭＳ Ｐゴシック" charset="0"/>
-              </a:defRPr>
-            </a:lvl4pPr>
-            <a:lvl5pPr marL="2057400" indent="-228600">
-              <a:defRPr sz="2400">
-                <a:solidFill>
-                  <a:schemeClr val="tx1"/>
-                </a:solidFill>
-                <a:latin typeface="Helvetica" charset="0"/>
-                <a:ea typeface="ＭＳ Ｐゴシック" charset="0"/>
-              </a:defRPr>
-            </a:lvl5pPr>
-            <a:lvl6pPr marL="2514600" indent="-228600" eaLnBrk="0" fontAlgn="base" hangingPunct="0">
-              <a:spcBef>
-                <a:spcPct val="0"/>
-              </a:spcBef>
-              <a:spcAft>
-                <a:spcPct val="0"/>
-              </a:spcAft>
-              <a:defRPr sz="2400">
-                <a:solidFill>
-                  <a:schemeClr val="tx1"/>
-                </a:solidFill>
-                <a:latin typeface="Helvetica" charset="0"/>
-                <a:ea typeface="ＭＳ Ｐゴシック" charset="0"/>
-              </a:defRPr>
-            </a:lvl6pPr>
-            <a:lvl7pPr marL="2971800" indent="-228600" eaLnBrk="0" fontAlgn="base" hangingPunct="0">
-              <a:spcBef>
-                <a:spcPct val="0"/>
-              </a:spcBef>
-              <a:spcAft>
-                <a:spcPct val="0"/>
-              </a:spcAft>
-              <a:defRPr sz="2400">
-                <a:solidFill>
-                  <a:schemeClr val="tx1"/>
-                </a:solidFill>
-                <a:latin typeface="Helvetica" charset="0"/>
-                <a:ea typeface="ＭＳ Ｐゴシック" charset="0"/>
-              </a:defRPr>
-            </a:lvl7pPr>
-            <a:lvl8pPr marL="3429000" indent="-228600" eaLnBrk="0" fontAlgn="base" hangingPunct="0">
-              <a:spcBef>
-                <a:spcPct val="0"/>
-              </a:spcBef>
-              <a:spcAft>
-                <a:spcPct val="0"/>
-              </a:spcAft>
-              <a:defRPr sz="2400">
-                <a:solidFill>
-                  <a:schemeClr val="tx1"/>
-                </a:solidFill>
-                <a:latin typeface="Helvetica" charset="0"/>
-                <a:ea typeface="ＭＳ Ｐゴシック" charset="0"/>
-              </a:defRPr>
-            </a:lvl8pPr>
-            <a:lvl9pPr marL="3886200" indent="-228600" eaLnBrk="0" fontAlgn="base" hangingPunct="0">
-              <a:spcBef>
-                <a:spcPct val="0"/>
-              </a:spcBef>
-              <a:spcAft>
-                <a:spcPct val="0"/>
-              </a:spcAft>
-              <a:defRPr sz="2400">
-                <a:solidFill>
-                  <a:schemeClr val="tx1"/>
-                </a:solidFill>
-                <a:latin typeface="Helvetica" charset="0"/>
-                <a:ea typeface="ＭＳ Ｐゴシック" charset="0"/>
-              </a:defRPr>
-            </a:lvl9pPr>
-          </a:lstStyle>
-          <a:p>
-            <a:r>
-              <a:rPr lang="en-US">
-                <a:latin typeface="Times" charset="0"/>
-              </a:rPr>
-              <a:t>Bob</a:t>
-            </a:r>
-          </a:p>
-          <a:p>
-            <a:r>
-              <a:rPr lang="en-US">
-                <a:latin typeface="Times" charset="0"/>
-              </a:rPr>
-              <a:t>Bell</a:t>
-            </a:r>
-          </a:p>
-        </p:txBody>
-      </p:sp>
-      <p:pic>
-        <p:nvPicPr>
-          <p:cNvPr id="15362" name="Picture 4"/>
-          <p:cNvPicPr>
-            <a:picLocks noChangeAspect="1"/>
-          </p:cNvPicPr>
-          <p:nvPr/>
-        </p:nvPicPr>
-        <p:blipFill>
-          <a:blip r:embed="rId3">
-            <a:extLst>
-              <a:ext uri="{28A0092B-C50C-407E-A947-70E740481C1C}">
-                <a14:useLocalDpi xmlns:a14="http://schemas.microsoft.com/office/drawing/2010/main" val="0"/>
-              </a:ext>
-            </a:extLst>
-          </a:blip>
-          <a:srcRect/>
-          <a:stretch>
-            <a:fillRect/>
-          </a:stretch>
-        </p:blipFill>
-        <p:spPr bwMode="auto">
-          <a:xfrm>
-            <a:off x="6255835" y="11151"/>
-            <a:ext cx="5936166" cy="6852168"/>
-          </a:xfrm>
-          <a:prstGeom prst="rect">
-            <a:avLst/>
-          </a:prstGeom>
-          <a:noFill/>
-          <a:ln>
-            <a:noFill/>
-          </a:ln>
-          <a:extLst>
-            <a:ext uri="{909E8E84-426E-40dd-AFC4-6F175D3DCCD1}">
-              <a14:hiddenFill xmlns="" xmlns:a14="http://schemas.microsoft.com/office/drawing/2010/main">
-                <a:solidFill>
-                  <a:srgbClr val="FFFFFF"/>
-                </a:solidFill>
-              </a14:hiddenFill>
-            </a:ext>
-            <a:ext uri="{91240B29-F687-4f45-9708-019B960494DF}">
-              <a14:hiddenLine xmlns="" xmlns:a14="http://schemas.microsoft.com/office/drawing/2010/main" w="9525">
-                <a:solidFill>
-                  <a:srgbClr val="000000"/>
-                </a:solidFill>
-                <a:miter lim="800000"/>
-                <a:headEnd/>
-                <a:tailEnd/>
-              </a14:hiddenLine>
-            </a:ext>
-          </a:extLst>
-        </p:spPr>
-      </p:pic>
-      <p:sp>
-        <p:nvSpPr>
-          <p:cNvPr id="15363" name="Rectangle 4"/>
-          <p:cNvSpPr>
-            <a:spLocks noChangeArrowheads="1"/>
-          </p:cNvSpPr>
-          <p:nvPr/>
-        </p:nvSpPr>
-        <p:spPr bwMode="auto">
-          <a:xfrm>
-            <a:off x="-1944330" y="2981494"/>
-            <a:ext cx="7710488" cy="1015663"/>
-          </a:xfrm>
-          <a:prstGeom prst="rect">
-            <a:avLst/>
-          </a:prstGeom>
-          <a:noFill/>
-          <a:ln>
-            <a:noFill/>
-          </a:ln>
-          <a:extLst>
-            <a:ext uri="{909E8E84-426E-40dd-AFC4-6F175D3DCCD1}">
-              <a14:hiddenFill xmlns="" xmlns:a14="http://schemas.microsoft.com/office/drawing/2010/main">
-                <a:solidFill>
-                  <a:srgbClr val="FFFFFF"/>
-                </a:solidFill>
-              </a14:hiddenFill>
-            </a:ext>
-            <a:ext uri="{91240B29-F687-4f45-9708-019B960494DF}">
-              <a14:hiddenLine xmlns="" xmlns:a14="http://schemas.microsoft.com/office/drawing/2010/main" w="9525">
-                <a:solidFill>
-                  <a:srgbClr val="000000"/>
-                </a:solidFill>
-                <a:miter lim="800000"/>
-                <a:headEnd/>
-                <a:tailEnd/>
-              </a14:hiddenLine>
-            </a:ext>
-          </a:extLst>
-        </p:spPr>
-        <p:txBody>
-          <a:bodyPr>
-            <a:spAutoFit/>
-          </a:bodyPr>
-          <a:lstStyle/>
-          <a:p>
-            <a:pPr algn="r"/>
-            <a:r>
-              <a:rPr lang="en-US" sz="6000" dirty="0">
-                <a:solidFill>
-                  <a:srgbClr val="FFFFFF"/>
-                </a:solidFill>
-                <a:latin typeface="Avenir" charset="0"/>
-                <a:cs typeface="Avenir" charset="0"/>
-              </a:rPr>
-              <a:t>let’s dive in…</a:t>
-            </a:r>
-          </a:p>
-        </p:txBody>
-      </p:sp>
-    </p:spTree>
-    <p:extLst>
-      <p:ext uri="{BB962C8B-B14F-4D97-AF65-F5344CB8AC3E}">
-        <p14:creationId xmlns:p14="http://schemas.microsoft.com/office/powerpoint/2010/main" val="1198608017"/>
-      </p:ext>
-    </p:extLst>
-  </p:cSld>
-  <p:clrMapOvr>
-    <a:masterClrMapping/>
-  </p:clrMapOvr>
-</p:sld>
-</file>
-
-<file path=ppt/slides/slide7.xml><?xml version="1.0" encoding="utf-8"?>
-<p:sld xmlns:a="http://schemas.openxmlformats.org/drawingml/2006/main" xmlns:r="http://schemas.openxmlformats.org/officeDocument/2006/relationships" xmlns:p="http://schemas.openxmlformats.org/presentationml/2006/main">
-  <p:cSld>
-    <p:spTree>
-      <p:nvGrpSpPr>
-        <p:cNvPr id="1" name=""/>
-        <p:cNvGrpSpPr/>
-        <p:nvPr/>
-      </p:nvGrpSpPr>
-      <p:grpSpPr>
-        <a:xfrm>
-          <a:off x="0" y="0"/>
-          <a:ext cx="0" cy="0"/>
-          <a:chOff x="0" y="0"/>
-          <a:chExt cx="0" cy="0"/>
-        </a:xfrm>
-      </p:grpSpPr>
-      <p:sp>
-        <p:nvSpPr>
-          <p:cNvPr id="2" name="Title 1">
-            <a:extLst>
-              <a:ext uri="{FF2B5EF4-FFF2-40B4-BE49-F238E27FC236}">
-                <a16:creationId xmlns:a16="http://schemas.microsoft.com/office/drawing/2014/main" id="{D46328C8-E57A-4548-E685-7C8547826A9D}"/>
-              </a:ext>
-            </a:extLst>
-          </p:cNvPr>
-          <p:cNvSpPr>
-            <a:spLocks noGrp="1"/>
-          </p:cNvSpPr>
-          <p:nvPr>
-            <p:ph type="ctrTitle"/>
-          </p:nvPr>
-        </p:nvSpPr>
-        <p:spPr/>
-        <p:txBody>
-          <a:bodyPr/>
-          <a:lstStyle/>
-          <a:p>
-            <a:endParaRPr lang="en-US"/>
-          </a:p>
-        </p:txBody>
-      </p:sp>
-      <p:sp>
-        <p:nvSpPr>
-          <p:cNvPr id="3" name="Subtitle 2">
-            <a:extLst>
-              <a:ext uri="{FF2B5EF4-FFF2-40B4-BE49-F238E27FC236}">
-                <a16:creationId xmlns:a16="http://schemas.microsoft.com/office/drawing/2014/main" id="{45A1BAE9-70C8-C269-8AD4-7B4B3D134C13}"/>
-              </a:ext>
-            </a:extLst>
-          </p:cNvPr>
-          <p:cNvSpPr>
-            <a:spLocks noGrp="1"/>
-          </p:cNvSpPr>
-          <p:nvPr>
-            <p:ph type="subTitle" idx="1"/>
-          </p:nvPr>
-        </p:nvSpPr>
-        <p:spPr/>
-        <p:txBody>
-          <a:bodyPr/>
-          <a:lstStyle/>
-          <a:p>
-            <a:endParaRPr lang="en-US"/>
-          </a:p>
-        </p:txBody>
-      </p:sp>
-      <p:pic>
-        <p:nvPicPr>
-          <p:cNvPr id="5" name="slide.url=https://www.polleverywhere.com/multiple_choice_polls/C5Mf4wqoOzxgPhTX3YZyj?state=opened&amp;flow=Default&amp;onscreen=persist">
-            <a:extLst>
-              <a:ext uri="{FF2B5EF4-FFF2-40B4-BE49-F238E27FC236}">
-                <a16:creationId xmlns:a16="http://schemas.microsoft.com/office/drawing/2014/main" id="{C1680DC4-93E8-614B-054E-9D7DCD24A5C6}"/>
-              </a:ext>
-            </a:extLst>
-          </p:cNvPr>
-          <p:cNvPicPr>
-            <a:picLocks/>
-          </p:cNvPicPr>
-          <p:nvPr/>
-        </p:nvPicPr>
-        <p:blipFill>
-          <a:blip r:embed="rId3"/>
-          <a:stretch>
-            <a:fillRect/>
-          </a:stretch>
-        </p:blipFill>
-        <p:spPr>
-          <a:xfrm>
-            <a:off x="63500" y="63500"/>
-            <a:ext cx="12065000" cy="6731000"/>
-          </a:xfrm>
-          <a:prstGeom prst="rect">
-            <a:avLst/>
-          </a:prstGeom>
-        </p:spPr>
-      </p:pic>
-    </p:spTree>
-    <p:extLst>
-      <p:ext uri="{BB962C8B-B14F-4D97-AF65-F5344CB8AC3E}">
-        <p14:creationId xmlns:p14="http://schemas.microsoft.com/office/powerpoint/2010/main" val="1511497431"/>
-      </p:ext>
-    </p:extLst>
-  </p:cSld>
-  <p:clrMapOvr>
-    <a:masterClrMapping/>
-  </p:clrMapOvr>
-</p:sld>
-</file>
-
-<file path=ppt/slides/slide8.xml><?xml version="1.0" encoding="utf-8"?>
-<p:sld xmlns:a="http://schemas.openxmlformats.org/drawingml/2006/main" xmlns:r="http://schemas.openxmlformats.org/officeDocument/2006/relationships" xmlns:p="http://schemas.openxmlformats.org/presentationml/2006/main">
-  <p:cSld>
-    <p:spTree>
-      <p:nvGrpSpPr>
-        <p:cNvPr id="1" name=""/>
-        <p:cNvGrpSpPr/>
-        <p:nvPr/>
-      </p:nvGrpSpPr>
-      <p:grpSpPr>
-        <a:xfrm>
-          <a:off x="0" y="0"/>
-          <a:ext cx="0" cy="0"/>
-          <a:chOff x="0" y="0"/>
-          <a:chExt cx="0" cy="0"/>
-        </a:xfrm>
-      </p:grpSpPr>
-      <p:sp>
-        <p:nvSpPr>
-          <p:cNvPr id="2" name="Title 1">
-            <a:extLst>
-              <a:ext uri="{FF2B5EF4-FFF2-40B4-BE49-F238E27FC236}">
-                <a16:creationId xmlns:a16="http://schemas.microsoft.com/office/drawing/2014/main" id="{817A132B-DB9E-494A-B78D-F786D5645CC0}"/>
-              </a:ext>
-            </a:extLst>
-          </p:cNvPr>
-          <p:cNvSpPr>
-            <a:spLocks noGrp="1"/>
-          </p:cNvSpPr>
-          <p:nvPr>
-            <p:ph type="ctrTitle"/>
-          </p:nvPr>
-        </p:nvSpPr>
-        <p:spPr/>
-        <p:txBody>
-          <a:bodyPr/>
-          <a:lstStyle/>
-          <a:p>
-            <a:endParaRPr lang="en-US"/>
-          </a:p>
-        </p:txBody>
-      </p:sp>
-      <p:sp>
-        <p:nvSpPr>
-          <p:cNvPr id="3" name="Subtitle 2">
-            <a:extLst>
-              <a:ext uri="{FF2B5EF4-FFF2-40B4-BE49-F238E27FC236}">
-                <a16:creationId xmlns:a16="http://schemas.microsoft.com/office/drawing/2014/main" id="{181C6761-0AFB-4A40-910C-04C7202DF597}"/>
-              </a:ext>
-            </a:extLst>
-          </p:cNvPr>
-          <p:cNvSpPr>
-            <a:spLocks noGrp="1"/>
-          </p:cNvSpPr>
-          <p:nvPr>
-            <p:ph type="subTitle" idx="1"/>
-          </p:nvPr>
-        </p:nvSpPr>
-        <p:spPr/>
-        <p:txBody>
-          <a:bodyPr/>
-          <a:lstStyle/>
-          <a:p>
-            <a:endParaRPr lang="en-US"/>
-          </a:p>
-        </p:txBody>
-      </p:sp>
-      <p:pic>
-        <p:nvPicPr>
-          <p:cNvPr id="5" name="slide.url=https://www.polleverywhere.com/free_text_polls/n8mRsosII42qUWMLxN3aH">
-            <a:extLst>
-              <a:ext uri="{FF2B5EF4-FFF2-40B4-BE49-F238E27FC236}">
-                <a16:creationId xmlns:a16="http://schemas.microsoft.com/office/drawing/2014/main" id="{72EB74FD-A9DE-7F46-9103-F417496D3DB3}"/>
-              </a:ext>
-            </a:extLst>
-          </p:cNvPr>
-          <p:cNvPicPr>
-            <a:picLocks/>
-          </p:cNvPicPr>
-          <p:nvPr/>
-        </p:nvPicPr>
-        <p:blipFill>
-          <a:blip r:embed="rId3"/>
-          <a:stretch>
-            <a:fillRect/>
-          </a:stretch>
-        </p:blipFill>
-        <p:spPr>
-          <a:xfrm>
-            <a:off x="63500" y="63500"/>
-            <a:ext cx="12065000" cy="6731000"/>
-          </a:xfrm>
-          <a:prstGeom prst="rect">
-            <a:avLst/>
-          </a:prstGeom>
-        </p:spPr>
-      </p:pic>
-    </p:spTree>
-    <p:extLst>
-      <p:ext uri="{BB962C8B-B14F-4D97-AF65-F5344CB8AC3E}">
-        <p14:creationId xmlns:p14="http://schemas.microsoft.com/office/powerpoint/2010/main" val="4242319848"/>
-      </p:ext>
-    </p:extLst>
-  </p:cSld>
-  <p:clrMapOvr>
-    <a:masterClrMapping/>
-  </p:clrMapOvr>
-</p:sld>
-</file>
-
-<file path=ppt/slides/slide9.xml><?xml version="1.0" encoding="utf-8"?>
 <p:sld xmlns:a="http://schemas.openxmlformats.org/drawingml/2006/main" xmlns:r="http://schemas.openxmlformats.org/officeDocument/2006/relationships" xmlns:p="http://schemas.openxmlformats.org/presentationml/2006/main">
   <p:cSld>
     <p:spTree>
@@ -8416,6 +6783,1850 @@
       <p:bldP spid="4" grpId="0" uiExpand="1" build="p" bldLvl="5"/>
     </p:bldLst>
   </p:timing>
+</p:sld>
+</file>
+
+<file path=ppt/slides/slide11.xml><?xml version="1.0" encoding="utf-8"?>
+<p:sld xmlns:a="http://schemas.openxmlformats.org/drawingml/2006/main" xmlns:r="http://schemas.openxmlformats.org/officeDocument/2006/relationships" xmlns:p="http://schemas.openxmlformats.org/presentationml/2006/main">
+  <p:cSld>
+    <p:bg>
+      <p:bgPr>
+        <a:solidFill>
+          <a:schemeClr val="tx1"/>
+        </a:solidFill>
+        <a:effectLst/>
+      </p:bgPr>
+    </p:bg>
+    <p:spTree>
+      <p:nvGrpSpPr>
+        <p:cNvPr id="1" name="">
+          <a:extLst>
+            <a:ext uri="{FF2B5EF4-FFF2-40B4-BE49-F238E27FC236}">
+              <a16:creationId xmlns:a16="http://schemas.microsoft.com/office/drawing/2014/main" id="{27AB001B-AA19-243B-C0B0-5F6C092FF108}"/>
+            </a:ext>
+          </a:extLst>
+        </p:cNvPr>
+        <p:cNvGrpSpPr/>
+        <p:nvPr/>
+      </p:nvGrpSpPr>
+      <p:grpSpPr>
+        <a:xfrm>
+          <a:off x="0" y="0"/>
+          <a:ext cx="0" cy="0"/>
+          <a:chOff x="0" y="0"/>
+          <a:chExt cx="0" cy="0"/>
+        </a:xfrm>
+      </p:grpSpPr>
+      <p:sp>
+        <p:nvSpPr>
+          <p:cNvPr id="2" name="Rectangle 2">
+            <a:extLst>
+              <a:ext uri="{FF2B5EF4-FFF2-40B4-BE49-F238E27FC236}">
+                <a16:creationId xmlns:a16="http://schemas.microsoft.com/office/drawing/2014/main" id="{BB08F228-F440-0446-E520-DEFF6265B668}"/>
+              </a:ext>
+            </a:extLst>
+          </p:cNvPr>
+          <p:cNvSpPr>
+            <a:spLocks noChangeArrowheads="1"/>
+          </p:cNvSpPr>
+          <p:nvPr/>
+        </p:nvSpPr>
+        <p:spPr bwMode="auto">
+          <a:xfrm>
+            <a:off x="1159918" y="3151193"/>
+            <a:ext cx="9677400" cy="707886"/>
+          </a:xfrm>
+          <a:prstGeom prst="rect">
+            <a:avLst/>
+          </a:prstGeom>
+          <a:noFill/>
+          <a:ln w="9525">
+            <a:noFill/>
+            <a:miter lim="800000"/>
+            <a:headEnd/>
+            <a:tailEnd/>
+          </a:ln>
+          <a:effectLst/>
+        </p:spPr>
+        <p:txBody>
+          <a:bodyPr wrap="square">
+            <a:spAutoFit/>
+          </a:bodyPr>
+          <a:lstStyle/>
+          <a:p>
+            <a:pPr algn="ctr">
+              <a:defRPr/>
+            </a:pPr>
+            <a:r>
+              <a:rPr lang="en-US" sz="4000" dirty="0">
+                <a:solidFill>
+                  <a:srgbClr val="FFFFFF"/>
+                </a:solidFill>
+                <a:effectLst>
+                  <a:outerShdw blurRad="38100" dist="38100" dir="2700000" algn="tl">
+                    <a:srgbClr val="000000"/>
+                  </a:outerShdw>
+                </a:effectLst>
+                <a:latin typeface="Avenir"/>
+                <a:cs typeface="Avenir"/>
+              </a:rPr>
+              <a:t>Take the Qualtrics survey!</a:t>
+            </a:r>
+          </a:p>
+        </p:txBody>
+      </p:sp>
+    </p:spTree>
+    <p:extLst>
+      <p:ext uri="{BB962C8B-B14F-4D97-AF65-F5344CB8AC3E}">
+        <p14:creationId xmlns:p14="http://schemas.microsoft.com/office/powerpoint/2010/main" val="1363838274"/>
+      </p:ext>
+    </p:extLst>
+  </p:cSld>
+  <p:clrMapOvr>
+    <a:masterClrMapping/>
+  </p:clrMapOvr>
+</p:sld>
+</file>
+
+<file path=ppt/slides/slide12.xml><?xml version="1.0" encoding="utf-8"?>
+<p:sld xmlns:a="http://schemas.openxmlformats.org/drawingml/2006/main" xmlns:r="http://schemas.openxmlformats.org/officeDocument/2006/relationships" xmlns:p="http://schemas.openxmlformats.org/presentationml/2006/main">
+  <p:cSld>
+    <p:bg>
+      <p:bgPr>
+        <a:solidFill>
+          <a:schemeClr val="tx1"/>
+        </a:solidFill>
+        <a:effectLst/>
+      </p:bgPr>
+    </p:bg>
+    <p:spTree>
+      <p:nvGrpSpPr>
+        <p:cNvPr id="1" name=""/>
+        <p:cNvGrpSpPr/>
+        <p:nvPr/>
+      </p:nvGrpSpPr>
+      <p:grpSpPr>
+        <a:xfrm>
+          <a:off x="0" y="0"/>
+          <a:ext cx="0" cy="0"/>
+          <a:chOff x="0" y="0"/>
+          <a:chExt cx="0" cy="0"/>
+        </a:xfrm>
+      </p:grpSpPr>
+      <p:sp>
+        <p:nvSpPr>
+          <p:cNvPr id="15361" name="Text Box 3"/>
+          <p:cNvSpPr txBox="1">
+            <a:spLocks noChangeArrowheads="1"/>
+          </p:cNvSpPr>
+          <p:nvPr/>
+        </p:nvSpPr>
+        <p:spPr bwMode="auto">
+          <a:xfrm>
+            <a:off x="6353176" y="3489326"/>
+            <a:ext cx="697627" cy="830997"/>
+          </a:xfrm>
+          <a:prstGeom prst="rect">
+            <a:avLst/>
+          </a:prstGeom>
+          <a:noFill/>
+          <a:ln>
+            <a:noFill/>
+          </a:ln>
+          <a:extLst>
+            <a:ext uri="{909E8E84-426E-40dd-AFC4-6F175D3DCCD1}">
+              <a14:hiddenFill xmlns="" xmlns:a14="http://schemas.microsoft.com/office/drawing/2010/main">
+                <a:solidFill>
+                  <a:srgbClr val="FFFFFF"/>
+                </a:solidFill>
+              </a14:hiddenFill>
+            </a:ext>
+            <a:ext uri="{91240B29-F687-4f45-9708-019B960494DF}">
+              <a14:hiddenLine xmlns="" xmlns:a14="http://schemas.microsoft.com/office/drawing/2010/main" w="9525">
+                <a:solidFill>
+                  <a:srgbClr val="000000"/>
+                </a:solidFill>
+                <a:miter lim="800000"/>
+                <a:headEnd/>
+                <a:tailEnd/>
+              </a14:hiddenLine>
+            </a:ext>
+          </a:extLst>
+        </p:spPr>
+        <p:txBody>
+          <a:bodyPr wrap="none">
+            <a:spAutoFit/>
+          </a:bodyPr>
+          <a:lstStyle>
+            <a:lvl1pPr>
+              <a:defRPr sz="2400">
+                <a:solidFill>
+                  <a:schemeClr val="tx1"/>
+                </a:solidFill>
+                <a:latin typeface="Helvetica" charset="0"/>
+                <a:ea typeface="ＭＳ Ｐゴシック" charset="0"/>
+                <a:cs typeface="ＭＳ Ｐゴシック" charset="0"/>
+              </a:defRPr>
+            </a:lvl1pPr>
+            <a:lvl2pPr marL="742950" indent="-285750">
+              <a:defRPr sz="2400">
+                <a:solidFill>
+                  <a:schemeClr val="tx1"/>
+                </a:solidFill>
+                <a:latin typeface="Helvetica" charset="0"/>
+                <a:ea typeface="ＭＳ Ｐゴシック" charset="0"/>
+              </a:defRPr>
+            </a:lvl2pPr>
+            <a:lvl3pPr marL="1143000" indent="-228600">
+              <a:defRPr sz="2400">
+                <a:solidFill>
+                  <a:schemeClr val="tx1"/>
+                </a:solidFill>
+                <a:latin typeface="Helvetica" charset="0"/>
+                <a:ea typeface="ＭＳ Ｐゴシック" charset="0"/>
+              </a:defRPr>
+            </a:lvl3pPr>
+            <a:lvl4pPr marL="1600200" indent="-228600">
+              <a:defRPr sz="2400">
+                <a:solidFill>
+                  <a:schemeClr val="tx1"/>
+                </a:solidFill>
+                <a:latin typeface="Helvetica" charset="0"/>
+                <a:ea typeface="ＭＳ Ｐゴシック" charset="0"/>
+              </a:defRPr>
+            </a:lvl4pPr>
+            <a:lvl5pPr marL="2057400" indent="-228600">
+              <a:defRPr sz="2400">
+                <a:solidFill>
+                  <a:schemeClr val="tx1"/>
+                </a:solidFill>
+                <a:latin typeface="Helvetica" charset="0"/>
+                <a:ea typeface="ＭＳ Ｐゴシック" charset="0"/>
+              </a:defRPr>
+            </a:lvl5pPr>
+            <a:lvl6pPr marL="2514600" indent="-228600" eaLnBrk="0" fontAlgn="base" hangingPunct="0">
+              <a:spcBef>
+                <a:spcPct val="0"/>
+              </a:spcBef>
+              <a:spcAft>
+                <a:spcPct val="0"/>
+              </a:spcAft>
+              <a:defRPr sz="2400">
+                <a:solidFill>
+                  <a:schemeClr val="tx1"/>
+                </a:solidFill>
+                <a:latin typeface="Helvetica" charset="0"/>
+                <a:ea typeface="ＭＳ Ｐゴシック" charset="0"/>
+              </a:defRPr>
+            </a:lvl6pPr>
+            <a:lvl7pPr marL="2971800" indent="-228600" eaLnBrk="0" fontAlgn="base" hangingPunct="0">
+              <a:spcBef>
+                <a:spcPct val="0"/>
+              </a:spcBef>
+              <a:spcAft>
+                <a:spcPct val="0"/>
+              </a:spcAft>
+              <a:defRPr sz="2400">
+                <a:solidFill>
+                  <a:schemeClr val="tx1"/>
+                </a:solidFill>
+                <a:latin typeface="Helvetica" charset="0"/>
+                <a:ea typeface="ＭＳ Ｐゴシック" charset="0"/>
+              </a:defRPr>
+            </a:lvl7pPr>
+            <a:lvl8pPr marL="3429000" indent="-228600" eaLnBrk="0" fontAlgn="base" hangingPunct="0">
+              <a:spcBef>
+                <a:spcPct val="0"/>
+              </a:spcBef>
+              <a:spcAft>
+                <a:spcPct val="0"/>
+              </a:spcAft>
+              <a:defRPr sz="2400">
+                <a:solidFill>
+                  <a:schemeClr val="tx1"/>
+                </a:solidFill>
+                <a:latin typeface="Helvetica" charset="0"/>
+                <a:ea typeface="ＭＳ Ｐゴシック" charset="0"/>
+              </a:defRPr>
+            </a:lvl8pPr>
+            <a:lvl9pPr marL="3886200" indent="-228600" eaLnBrk="0" fontAlgn="base" hangingPunct="0">
+              <a:spcBef>
+                <a:spcPct val="0"/>
+              </a:spcBef>
+              <a:spcAft>
+                <a:spcPct val="0"/>
+              </a:spcAft>
+              <a:defRPr sz="2400">
+                <a:solidFill>
+                  <a:schemeClr val="tx1"/>
+                </a:solidFill>
+                <a:latin typeface="Helvetica" charset="0"/>
+                <a:ea typeface="ＭＳ Ｐゴシック" charset="0"/>
+              </a:defRPr>
+            </a:lvl9pPr>
+          </a:lstStyle>
+          <a:p>
+            <a:r>
+              <a:rPr lang="en-US">
+                <a:latin typeface="Times" charset="0"/>
+              </a:rPr>
+              <a:t>Bob</a:t>
+            </a:r>
+          </a:p>
+          <a:p>
+            <a:r>
+              <a:rPr lang="en-US">
+                <a:latin typeface="Times" charset="0"/>
+              </a:rPr>
+              <a:t>Bell</a:t>
+            </a:r>
+          </a:p>
+        </p:txBody>
+      </p:sp>
+      <p:pic>
+        <p:nvPicPr>
+          <p:cNvPr id="15362" name="Picture 4"/>
+          <p:cNvPicPr>
+            <a:picLocks noChangeAspect="1"/>
+          </p:cNvPicPr>
+          <p:nvPr/>
+        </p:nvPicPr>
+        <p:blipFill>
+          <a:blip r:embed="rId3">
+            <a:extLst>
+              <a:ext uri="{28A0092B-C50C-407E-A947-70E740481C1C}">
+                <a14:useLocalDpi xmlns:a14="http://schemas.microsoft.com/office/drawing/2010/main" val="0"/>
+              </a:ext>
+            </a:extLst>
+          </a:blip>
+          <a:srcRect/>
+          <a:stretch>
+            <a:fillRect/>
+          </a:stretch>
+        </p:blipFill>
+        <p:spPr bwMode="auto">
+          <a:xfrm>
+            <a:off x="6255835" y="11151"/>
+            <a:ext cx="5936166" cy="6852168"/>
+          </a:xfrm>
+          <a:prstGeom prst="rect">
+            <a:avLst/>
+          </a:prstGeom>
+          <a:noFill/>
+          <a:ln>
+            <a:noFill/>
+          </a:ln>
+          <a:extLst>
+            <a:ext uri="{909E8E84-426E-40dd-AFC4-6F175D3DCCD1}">
+              <a14:hiddenFill xmlns="" xmlns:a14="http://schemas.microsoft.com/office/drawing/2010/main">
+                <a:solidFill>
+                  <a:srgbClr val="FFFFFF"/>
+                </a:solidFill>
+              </a14:hiddenFill>
+            </a:ext>
+            <a:ext uri="{91240B29-F687-4f45-9708-019B960494DF}">
+              <a14:hiddenLine xmlns="" xmlns:a14="http://schemas.microsoft.com/office/drawing/2010/main" w="9525">
+                <a:solidFill>
+                  <a:srgbClr val="000000"/>
+                </a:solidFill>
+                <a:miter lim="800000"/>
+                <a:headEnd/>
+                <a:tailEnd/>
+              </a14:hiddenLine>
+            </a:ext>
+          </a:extLst>
+        </p:spPr>
+      </p:pic>
+      <p:sp>
+        <p:nvSpPr>
+          <p:cNvPr id="15363" name="Rectangle 4"/>
+          <p:cNvSpPr>
+            <a:spLocks noChangeArrowheads="1"/>
+          </p:cNvSpPr>
+          <p:nvPr/>
+        </p:nvSpPr>
+        <p:spPr bwMode="auto">
+          <a:xfrm>
+            <a:off x="-1685597" y="1890712"/>
+            <a:ext cx="7710488" cy="2862322"/>
+          </a:xfrm>
+          <a:prstGeom prst="rect">
+            <a:avLst/>
+          </a:prstGeom>
+          <a:noFill/>
+          <a:ln>
+            <a:noFill/>
+          </a:ln>
+          <a:extLst>
+            <a:ext uri="{909E8E84-426E-40dd-AFC4-6F175D3DCCD1}">
+              <a14:hiddenFill xmlns="" xmlns:a14="http://schemas.microsoft.com/office/drawing/2010/main">
+                <a:solidFill>
+                  <a:srgbClr val="FFFFFF"/>
+                </a:solidFill>
+              </a14:hiddenFill>
+            </a:ext>
+            <a:ext uri="{91240B29-F687-4f45-9708-019B960494DF}">
+              <a14:hiddenLine xmlns="" xmlns:a14="http://schemas.microsoft.com/office/drawing/2010/main" w="9525">
+                <a:solidFill>
+                  <a:srgbClr val="000000"/>
+                </a:solidFill>
+                <a:miter lim="800000"/>
+                <a:headEnd/>
+                <a:tailEnd/>
+              </a14:hiddenLine>
+            </a:ext>
+          </a:extLst>
+        </p:spPr>
+        <p:txBody>
+          <a:bodyPr>
+            <a:spAutoFit/>
+          </a:bodyPr>
+          <a:lstStyle/>
+          <a:p>
+            <a:pPr algn="r"/>
+            <a:r>
+              <a:rPr lang="en-US" sz="6000" dirty="0">
+                <a:solidFill>
+                  <a:srgbClr val="FFFFFF"/>
+                </a:solidFill>
+                <a:latin typeface="Avenir" charset="0"/>
+                <a:cs typeface="Avenir" charset="0"/>
+              </a:rPr>
+              <a:t>Welcome to </a:t>
+            </a:r>
+          </a:p>
+          <a:p>
+            <a:pPr algn="r"/>
+            <a:r>
+              <a:rPr lang="en-US" sz="6000" dirty="0">
+                <a:solidFill>
+                  <a:srgbClr val="FFFFFF"/>
+                </a:solidFill>
+                <a:latin typeface="Avenir" charset="0"/>
+                <a:cs typeface="Avenir" charset="0"/>
+              </a:rPr>
+              <a:t>FISH 406: </a:t>
+            </a:r>
+          </a:p>
+          <a:p>
+            <a:pPr algn="r"/>
+            <a:r>
+              <a:rPr lang="en-US" sz="6000" dirty="0">
+                <a:solidFill>
+                  <a:srgbClr val="FFFFFF"/>
+                </a:solidFill>
+                <a:latin typeface="Avenir" charset="0"/>
+                <a:cs typeface="Avenir" charset="0"/>
+              </a:rPr>
+              <a:t>Parasite Ecology</a:t>
+            </a:r>
+          </a:p>
+        </p:txBody>
+      </p:sp>
+    </p:spTree>
+    <p:extLst>
+      <p:ext uri="{BB962C8B-B14F-4D97-AF65-F5344CB8AC3E}">
+        <p14:creationId xmlns:p14="http://schemas.microsoft.com/office/powerpoint/2010/main" val="2771182970"/>
+      </p:ext>
+    </p:extLst>
+  </p:cSld>
+  <p:clrMapOvr>
+    <a:masterClrMapping/>
+  </p:clrMapOvr>
+</p:sld>
+</file>
+
+<file path=ppt/slides/slide2.xml><?xml version="1.0" encoding="utf-8"?>
+<p:sld xmlns:a="http://schemas.openxmlformats.org/drawingml/2006/main" xmlns:r="http://schemas.openxmlformats.org/officeDocument/2006/relationships" xmlns:p="http://schemas.openxmlformats.org/presentationml/2006/main">
+  <p:cSld>
+    <p:bg>
+      <p:bgPr>
+        <a:solidFill>
+          <a:schemeClr val="tx1"/>
+        </a:solidFill>
+        <a:effectLst/>
+      </p:bgPr>
+    </p:bg>
+    <p:spTree>
+      <p:nvGrpSpPr>
+        <p:cNvPr id="1" name=""/>
+        <p:cNvGrpSpPr/>
+        <p:nvPr/>
+      </p:nvGrpSpPr>
+      <p:grpSpPr>
+        <a:xfrm>
+          <a:off x="0" y="0"/>
+          <a:ext cx="0" cy="0"/>
+          <a:chOff x="0" y="0"/>
+          <a:chExt cx="0" cy="0"/>
+        </a:xfrm>
+      </p:grpSpPr>
+      <p:sp>
+        <p:nvSpPr>
+          <p:cNvPr id="2050" name="Rectangle 2"/>
+          <p:cNvSpPr>
+            <a:spLocks noChangeArrowheads="1"/>
+          </p:cNvSpPr>
+          <p:nvPr/>
+        </p:nvSpPr>
+        <p:spPr bwMode="auto">
+          <a:xfrm>
+            <a:off x="1188948" y="1467536"/>
+            <a:ext cx="9677400" cy="3693319"/>
+          </a:xfrm>
+          <a:prstGeom prst="rect">
+            <a:avLst/>
+          </a:prstGeom>
+          <a:noFill/>
+          <a:ln w="9525">
+            <a:noFill/>
+            <a:miter lim="800000"/>
+            <a:headEnd/>
+            <a:tailEnd/>
+          </a:ln>
+          <a:effectLst/>
+        </p:spPr>
+        <p:txBody>
+          <a:bodyPr wrap="square">
+            <a:spAutoFit/>
+          </a:bodyPr>
+          <a:lstStyle/>
+          <a:p>
+            <a:pPr algn="ctr">
+              <a:defRPr/>
+            </a:pPr>
+            <a:r>
+              <a:rPr lang="en-US" sz="4000" dirty="0">
+                <a:solidFill>
+                  <a:srgbClr val="FFFFFF"/>
+                </a:solidFill>
+                <a:effectLst>
+                  <a:outerShdw blurRad="38100" dist="38100" dir="2700000" algn="tl">
+                    <a:srgbClr val="000000"/>
+                  </a:outerShdw>
+                </a:effectLst>
+                <a:latin typeface="Avenir"/>
+                <a:cs typeface="Avenir"/>
+              </a:rPr>
+              <a:t>FISH 406</a:t>
+            </a:r>
+          </a:p>
+          <a:p>
+            <a:pPr algn="ctr">
+              <a:defRPr/>
+            </a:pPr>
+            <a:r>
+              <a:rPr lang="en-US" sz="4000" dirty="0">
+                <a:solidFill>
+                  <a:srgbClr val="FFFFFF"/>
+                </a:solidFill>
+                <a:effectLst>
+                  <a:outerShdw blurRad="38100" dist="38100" dir="2700000" algn="tl">
+                    <a:srgbClr val="000000"/>
+                  </a:outerShdw>
+                </a:effectLst>
+                <a:latin typeface="Avenir"/>
+                <a:cs typeface="Avenir"/>
+              </a:rPr>
+              <a:t>Parasite Ecology</a:t>
+            </a:r>
+          </a:p>
+          <a:p>
+            <a:pPr algn="ctr">
+              <a:defRPr/>
+            </a:pPr>
+            <a:r>
+              <a:rPr lang="en-US" sz="4000" dirty="0">
+                <a:solidFill>
+                  <a:srgbClr val="FFFFFF"/>
+                </a:solidFill>
+                <a:effectLst>
+                  <a:outerShdw blurRad="38100" dist="38100" dir="2700000" algn="tl">
+                    <a:srgbClr val="000000"/>
+                  </a:outerShdw>
+                </a:effectLst>
+                <a:latin typeface="Avenir"/>
+                <a:cs typeface="Avenir"/>
+              </a:rPr>
+              <a:t>Autumn 2025</a:t>
+            </a:r>
+          </a:p>
+          <a:p>
+            <a:pPr>
+              <a:defRPr/>
+            </a:pPr>
+            <a:endParaRPr lang="en-US" dirty="0">
+              <a:solidFill>
+                <a:srgbClr val="FFFFFF"/>
+              </a:solidFill>
+              <a:effectLst>
+                <a:outerShdw blurRad="38100" dist="38100" dir="2700000" algn="tl">
+                  <a:srgbClr val="000000"/>
+                </a:outerShdw>
+              </a:effectLst>
+              <a:latin typeface="Avenir"/>
+              <a:cs typeface="Avenir"/>
+            </a:endParaRPr>
+          </a:p>
+          <a:p>
+            <a:pPr lvl="2">
+              <a:defRPr/>
+            </a:pPr>
+            <a:r>
+              <a:rPr lang="en-US" sz="3200" dirty="0">
+                <a:solidFill>
+                  <a:srgbClr val="FFFFFF"/>
+                </a:solidFill>
+                <a:effectLst>
+                  <a:outerShdw blurRad="38100" dist="38100" dir="2700000" algn="tl">
+                    <a:srgbClr val="000000"/>
+                  </a:outerShdw>
+                </a:effectLst>
+                <a:latin typeface="Avenir"/>
+                <a:cs typeface="Avenir"/>
+              </a:rPr>
+              <a:t>Instructor: 	Dr. Chelsea Wood</a:t>
+            </a:r>
+          </a:p>
+          <a:p>
+            <a:pPr lvl="2">
+              <a:defRPr/>
+            </a:pPr>
+            <a:r>
+              <a:rPr lang="en-US" sz="3200" dirty="0">
+                <a:solidFill>
+                  <a:srgbClr val="FFFFFF"/>
+                </a:solidFill>
+                <a:effectLst>
+                  <a:outerShdw blurRad="38100" dist="38100" dir="2700000" algn="tl">
+                    <a:srgbClr val="000000"/>
+                  </a:outerShdw>
+                </a:effectLst>
+                <a:latin typeface="Avenir"/>
+                <a:cs typeface="Avenir"/>
+              </a:rPr>
+              <a:t>TAs:			Gabby Commisso and </a:t>
+            </a:r>
+          </a:p>
+          <a:p>
+            <a:pPr lvl="2">
+              <a:defRPr/>
+            </a:pPr>
+            <a:r>
+              <a:rPr lang="en-US" sz="3200" dirty="0">
+                <a:solidFill>
+                  <a:srgbClr val="FFFFFF"/>
+                </a:solidFill>
+                <a:effectLst>
+                  <a:outerShdw blurRad="38100" dist="38100" dir="2700000" algn="tl">
+                    <a:srgbClr val="000000"/>
+                  </a:outerShdw>
+                </a:effectLst>
+                <a:latin typeface="Avenir"/>
+                <a:cs typeface="Avenir"/>
+              </a:rPr>
+              <a:t>			Connor Whalen	</a:t>
+            </a:r>
+          </a:p>
+        </p:txBody>
+      </p:sp>
+    </p:spTree>
+    <p:extLst>
+      <p:ext uri="{BB962C8B-B14F-4D97-AF65-F5344CB8AC3E}">
+        <p14:creationId xmlns:p14="http://schemas.microsoft.com/office/powerpoint/2010/main" val="352723627"/>
+      </p:ext>
+    </p:extLst>
+  </p:cSld>
+  <p:clrMapOvr>
+    <a:masterClrMapping/>
+  </p:clrMapOvr>
+</p:sld>
+</file>
+
+<file path=ppt/slides/slide3.xml><?xml version="1.0" encoding="utf-8"?>
+<p:sld xmlns:a="http://schemas.openxmlformats.org/drawingml/2006/main" xmlns:r="http://schemas.openxmlformats.org/officeDocument/2006/relationships" xmlns:p="http://schemas.openxmlformats.org/presentationml/2006/main">
+  <p:cSld>
+    <p:bg>
+      <p:bgPr>
+        <a:solidFill>
+          <a:schemeClr val="tx1"/>
+        </a:solidFill>
+        <a:effectLst/>
+      </p:bgPr>
+    </p:bg>
+    <p:spTree>
+      <p:nvGrpSpPr>
+        <p:cNvPr id="1" name="">
+          <a:extLst>
+            <a:ext uri="{FF2B5EF4-FFF2-40B4-BE49-F238E27FC236}">
+              <a16:creationId xmlns:a16="http://schemas.microsoft.com/office/drawing/2014/main" id="{ED59F089-B822-D305-22B6-38366F04134D}"/>
+            </a:ext>
+          </a:extLst>
+        </p:cNvPr>
+        <p:cNvGrpSpPr/>
+        <p:nvPr/>
+      </p:nvGrpSpPr>
+      <p:grpSpPr>
+        <a:xfrm>
+          <a:off x="0" y="0"/>
+          <a:ext cx="0" cy="0"/>
+          <a:chOff x="0" y="0"/>
+          <a:chExt cx="0" cy="0"/>
+        </a:xfrm>
+      </p:grpSpPr>
+      <p:sp>
+        <p:nvSpPr>
+          <p:cNvPr id="2" name="Rectangle 2">
+            <a:extLst>
+              <a:ext uri="{FF2B5EF4-FFF2-40B4-BE49-F238E27FC236}">
+                <a16:creationId xmlns:a16="http://schemas.microsoft.com/office/drawing/2014/main" id="{9CD3DD26-8185-4AE6-400C-00A883864BBA}"/>
+              </a:ext>
+            </a:extLst>
+          </p:cNvPr>
+          <p:cNvSpPr>
+            <a:spLocks noChangeArrowheads="1"/>
+          </p:cNvSpPr>
+          <p:nvPr/>
+        </p:nvSpPr>
+        <p:spPr bwMode="auto">
+          <a:xfrm>
+            <a:off x="1188948" y="2686735"/>
+            <a:ext cx="9677400" cy="1323439"/>
+          </a:xfrm>
+          <a:prstGeom prst="rect">
+            <a:avLst/>
+          </a:prstGeom>
+          <a:noFill/>
+          <a:ln w="9525">
+            <a:noFill/>
+            <a:miter lim="800000"/>
+            <a:headEnd/>
+            <a:tailEnd/>
+          </a:ln>
+          <a:effectLst/>
+        </p:spPr>
+        <p:txBody>
+          <a:bodyPr wrap="square">
+            <a:spAutoFit/>
+          </a:bodyPr>
+          <a:lstStyle/>
+          <a:p>
+            <a:pPr algn="ctr">
+              <a:defRPr/>
+            </a:pPr>
+            <a:r>
+              <a:rPr lang="en-US" sz="8000" dirty="0">
+                <a:solidFill>
+                  <a:srgbClr val="FFFFFF"/>
+                </a:solidFill>
+                <a:effectLst>
+                  <a:outerShdw blurRad="38100" dist="38100" dir="2700000" algn="tl">
+                    <a:srgbClr val="000000"/>
+                  </a:outerShdw>
+                </a:effectLst>
+                <a:latin typeface="Avenir"/>
+                <a:cs typeface="Avenir"/>
+              </a:rPr>
+              <a:t>Who are you?</a:t>
+            </a:r>
+          </a:p>
+        </p:txBody>
+      </p:sp>
+    </p:spTree>
+    <p:extLst>
+      <p:ext uri="{BB962C8B-B14F-4D97-AF65-F5344CB8AC3E}">
+        <p14:creationId xmlns:p14="http://schemas.microsoft.com/office/powerpoint/2010/main" val="1423272240"/>
+      </p:ext>
+    </p:extLst>
+  </p:cSld>
+  <p:clrMapOvr>
+    <a:masterClrMapping/>
+  </p:clrMapOvr>
+</p:sld>
+</file>
+
+<file path=ppt/slides/slide4.xml><?xml version="1.0" encoding="utf-8"?>
+<p:sld xmlns:a="http://schemas.openxmlformats.org/drawingml/2006/main" xmlns:r="http://schemas.openxmlformats.org/officeDocument/2006/relationships" xmlns:p="http://schemas.openxmlformats.org/presentationml/2006/main">
+  <p:cSld>
+    <p:bg>
+      <p:bgPr>
+        <a:solidFill>
+          <a:schemeClr val="tx1"/>
+        </a:solidFill>
+        <a:effectLst/>
+      </p:bgPr>
+    </p:bg>
+    <p:spTree>
+      <p:nvGrpSpPr>
+        <p:cNvPr id="1" name=""/>
+        <p:cNvGrpSpPr/>
+        <p:nvPr/>
+      </p:nvGrpSpPr>
+      <p:grpSpPr>
+        <a:xfrm>
+          <a:off x="0" y="0"/>
+          <a:ext cx="0" cy="0"/>
+          <a:chOff x="0" y="0"/>
+          <a:chExt cx="0" cy="0"/>
+        </a:xfrm>
+      </p:grpSpPr>
+      <p:sp>
+        <p:nvSpPr>
+          <p:cNvPr id="2" name="Rectangle 2">
+            <a:extLst>
+              <a:ext uri="{FF2B5EF4-FFF2-40B4-BE49-F238E27FC236}">
+                <a16:creationId xmlns:a16="http://schemas.microsoft.com/office/drawing/2014/main" id="{B524D076-306C-BB7A-FF7C-13EB668776DF}"/>
+              </a:ext>
+            </a:extLst>
+          </p:cNvPr>
+          <p:cNvSpPr>
+            <a:spLocks noChangeArrowheads="1"/>
+          </p:cNvSpPr>
+          <p:nvPr/>
+        </p:nvSpPr>
+        <p:spPr bwMode="auto">
+          <a:xfrm>
+            <a:off x="1232490" y="2251307"/>
+            <a:ext cx="9677400" cy="1938992"/>
+          </a:xfrm>
+          <a:prstGeom prst="rect">
+            <a:avLst/>
+          </a:prstGeom>
+          <a:noFill/>
+          <a:ln w="9525">
+            <a:noFill/>
+            <a:miter lim="800000"/>
+            <a:headEnd/>
+            <a:tailEnd/>
+          </a:ln>
+          <a:effectLst/>
+        </p:spPr>
+        <p:txBody>
+          <a:bodyPr wrap="square">
+            <a:spAutoFit/>
+          </a:bodyPr>
+          <a:lstStyle/>
+          <a:p>
+            <a:pPr algn="ctr">
+              <a:defRPr/>
+            </a:pPr>
+            <a:r>
+              <a:rPr lang="en-US" sz="4000" dirty="0">
+                <a:solidFill>
+                  <a:srgbClr val="FFFFFF"/>
+                </a:solidFill>
+                <a:effectLst>
+                  <a:outerShdw blurRad="38100" dist="38100" dir="2700000" algn="tl">
+                    <a:srgbClr val="000000"/>
+                  </a:outerShdw>
+                </a:effectLst>
+                <a:latin typeface="Avenir"/>
+                <a:cs typeface="Avenir"/>
+              </a:rPr>
+              <a:t>Course website: </a:t>
+            </a:r>
+          </a:p>
+          <a:p>
+            <a:pPr algn="ctr">
+              <a:defRPr/>
+            </a:pPr>
+            <a:endParaRPr lang="en-US" sz="4000" dirty="0">
+              <a:solidFill>
+                <a:srgbClr val="FFFFFF"/>
+              </a:solidFill>
+              <a:effectLst>
+                <a:outerShdw blurRad="38100" dist="38100" dir="2700000" algn="tl">
+                  <a:srgbClr val="000000"/>
+                </a:outerShdw>
+              </a:effectLst>
+              <a:latin typeface="Avenir"/>
+              <a:cs typeface="Avenir"/>
+            </a:endParaRPr>
+          </a:p>
+          <a:p>
+            <a:pPr algn="ctr">
+              <a:defRPr/>
+            </a:pPr>
+            <a:r>
+              <a:rPr lang="en-US" sz="4000" dirty="0">
+                <a:solidFill>
+                  <a:srgbClr val="FFFFFF"/>
+                </a:solidFill>
+                <a:effectLst>
+                  <a:outerShdw blurRad="38100" dist="38100" dir="2700000" algn="tl">
+                    <a:srgbClr val="000000"/>
+                  </a:outerShdw>
+                </a:effectLst>
+                <a:latin typeface="Avenir"/>
+                <a:cs typeface="Avenir"/>
+              </a:rPr>
+              <a:t>https://wood-</a:t>
+            </a:r>
+            <a:r>
+              <a:rPr lang="en-US" sz="4000" dirty="0" err="1">
+                <a:solidFill>
+                  <a:srgbClr val="FFFFFF"/>
+                </a:solidFill>
+                <a:effectLst>
+                  <a:outerShdw blurRad="38100" dist="38100" dir="2700000" algn="tl">
+                    <a:srgbClr val="000000"/>
+                  </a:outerShdw>
+                </a:effectLst>
+                <a:latin typeface="Avenir"/>
+                <a:cs typeface="Avenir"/>
+              </a:rPr>
+              <a:t>lab.github.io</a:t>
+            </a:r>
+            <a:r>
+              <a:rPr lang="en-US" sz="4000" dirty="0">
+                <a:solidFill>
+                  <a:srgbClr val="FFFFFF"/>
+                </a:solidFill>
+                <a:effectLst>
+                  <a:outerShdw blurRad="38100" dist="38100" dir="2700000" algn="tl">
+                    <a:srgbClr val="000000"/>
+                  </a:outerShdw>
+                </a:effectLst>
+                <a:latin typeface="Avenir"/>
+                <a:cs typeface="Avenir"/>
+              </a:rPr>
+              <a:t>/fish_406</a:t>
+            </a:r>
+          </a:p>
+        </p:txBody>
+      </p:sp>
+    </p:spTree>
+    <p:extLst>
+      <p:ext uri="{BB962C8B-B14F-4D97-AF65-F5344CB8AC3E}">
+        <p14:creationId xmlns:p14="http://schemas.microsoft.com/office/powerpoint/2010/main" val="2405787196"/>
+      </p:ext>
+    </p:extLst>
+  </p:cSld>
+  <p:clrMapOvr>
+    <a:masterClrMapping/>
+  </p:clrMapOvr>
+</p:sld>
+</file>
+
+<file path=ppt/slides/slide5.xml><?xml version="1.0" encoding="utf-8"?>
+<p:sld xmlns:a="http://schemas.openxmlformats.org/drawingml/2006/main" xmlns:r="http://schemas.openxmlformats.org/officeDocument/2006/relationships" xmlns:p="http://schemas.openxmlformats.org/presentationml/2006/main">
+  <p:cSld>
+    <p:bg>
+      <p:bgPr>
+        <a:solidFill>
+          <a:schemeClr val="tx1"/>
+        </a:solidFill>
+        <a:effectLst/>
+      </p:bgPr>
+    </p:bg>
+    <p:spTree>
+      <p:nvGrpSpPr>
+        <p:cNvPr id="1" name="">
+          <a:extLst>
+            <a:ext uri="{FF2B5EF4-FFF2-40B4-BE49-F238E27FC236}">
+              <a16:creationId xmlns:a16="http://schemas.microsoft.com/office/drawing/2014/main" id="{FF7C0096-F98B-6232-876E-41380BE9913E}"/>
+            </a:ext>
+          </a:extLst>
+        </p:cNvPr>
+        <p:cNvGrpSpPr/>
+        <p:nvPr/>
+      </p:nvGrpSpPr>
+      <p:grpSpPr>
+        <a:xfrm>
+          <a:off x="0" y="0"/>
+          <a:ext cx="0" cy="0"/>
+          <a:chOff x="0" y="0"/>
+          <a:chExt cx="0" cy="0"/>
+        </a:xfrm>
+      </p:grpSpPr>
+      <p:sp>
+        <p:nvSpPr>
+          <p:cNvPr id="2" name="Rectangle 2">
+            <a:extLst>
+              <a:ext uri="{FF2B5EF4-FFF2-40B4-BE49-F238E27FC236}">
+                <a16:creationId xmlns:a16="http://schemas.microsoft.com/office/drawing/2014/main" id="{AF4E8C28-3817-A241-2E96-0195316B06DD}"/>
+              </a:ext>
+            </a:extLst>
+          </p:cNvPr>
+          <p:cNvSpPr>
+            <a:spLocks noChangeArrowheads="1"/>
+          </p:cNvSpPr>
+          <p:nvPr/>
+        </p:nvSpPr>
+        <p:spPr bwMode="auto">
+          <a:xfrm>
+            <a:off x="1232490" y="2265821"/>
+            <a:ext cx="9677400" cy="1938992"/>
+          </a:xfrm>
+          <a:prstGeom prst="rect">
+            <a:avLst/>
+          </a:prstGeom>
+          <a:noFill/>
+          <a:ln w="9525">
+            <a:noFill/>
+            <a:miter lim="800000"/>
+            <a:headEnd/>
+            <a:tailEnd/>
+          </a:ln>
+          <a:effectLst/>
+        </p:spPr>
+        <p:txBody>
+          <a:bodyPr wrap="square">
+            <a:spAutoFit/>
+          </a:bodyPr>
+          <a:lstStyle/>
+          <a:p>
+            <a:pPr algn="ctr">
+              <a:defRPr/>
+            </a:pPr>
+            <a:r>
+              <a:rPr lang="en-US" sz="4000" dirty="0">
+                <a:solidFill>
+                  <a:srgbClr val="FFFFFF"/>
+                </a:solidFill>
+                <a:effectLst>
+                  <a:outerShdw blurRad="38100" dist="38100" dir="2700000" algn="tl">
+                    <a:srgbClr val="000000"/>
+                  </a:outerShdw>
+                </a:effectLst>
+                <a:latin typeface="Avenir"/>
+                <a:cs typeface="Avenir"/>
+              </a:rPr>
+              <a:t>Course Canvas page: </a:t>
+            </a:r>
+          </a:p>
+          <a:p>
+            <a:pPr algn="ctr">
+              <a:defRPr/>
+            </a:pPr>
+            <a:endParaRPr lang="en-US" sz="4000" dirty="0">
+              <a:solidFill>
+                <a:srgbClr val="FFFFFF"/>
+              </a:solidFill>
+              <a:effectLst>
+                <a:outerShdw blurRad="38100" dist="38100" dir="2700000" algn="tl">
+                  <a:srgbClr val="000000"/>
+                </a:outerShdw>
+              </a:effectLst>
+              <a:latin typeface="Avenir"/>
+              <a:cs typeface="Avenir"/>
+            </a:endParaRPr>
+          </a:p>
+          <a:p>
+            <a:pPr algn="ctr">
+              <a:defRPr/>
+            </a:pPr>
+            <a:r>
+              <a:rPr lang="en-US" sz="4000" dirty="0">
+                <a:solidFill>
+                  <a:srgbClr val="FFFFFF"/>
+                </a:solidFill>
+                <a:effectLst>
+                  <a:outerShdw blurRad="38100" dist="38100" dir="2700000" algn="tl">
+                    <a:srgbClr val="000000"/>
+                  </a:outerShdw>
+                </a:effectLst>
+                <a:latin typeface="Avenir"/>
+                <a:cs typeface="Avenir"/>
+              </a:rPr>
+              <a:t>https://</a:t>
+            </a:r>
+            <a:r>
+              <a:rPr lang="en-US" sz="4000" dirty="0" err="1">
+                <a:solidFill>
+                  <a:srgbClr val="FFFFFF"/>
+                </a:solidFill>
+                <a:effectLst>
+                  <a:outerShdw blurRad="38100" dist="38100" dir="2700000" algn="tl">
+                    <a:srgbClr val="000000"/>
+                  </a:outerShdw>
+                </a:effectLst>
+                <a:latin typeface="Avenir"/>
+                <a:cs typeface="Avenir"/>
+              </a:rPr>
+              <a:t>canvas.uw.edu</a:t>
+            </a:r>
+            <a:r>
+              <a:rPr lang="en-US" sz="4000" dirty="0">
+                <a:solidFill>
+                  <a:srgbClr val="FFFFFF"/>
+                </a:solidFill>
+                <a:effectLst>
+                  <a:outerShdw blurRad="38100" dist="38100" dir="2700000" algn="tl">
+                    <a:srgbClr val="000000"/>
+                  </a:outerShdw>
+                </a:effectLst>
+                <a:latin typeface="Avenir"/>
+                <a:cs typeface="Avenir"/>
+              </a:rPr>
+              <a:t>/courses/1829825</a:t>
+            </a:r>
+          </a:p>
+        </p:txBody>
+      </p:sp>
+    </p:spTree>
+    <p:extLst>
+      <p:ext uri="{BB962C8B-B14F-4D97-AF65-F5344CB8AC3E}">
+        <p14:creationId xmlns:p14="http://schemas.microsoft.com/office/powerpoint/2010/main" val="3370688028"/>
+      </p:ext>
+    </p:extLst>
+  </p:cSld>
+  <p:clrMapOvr>
+    <a:masterClrMapping/>
+  </p:clrMapOvr>
+</p:sld>
+</file>
+
+<file path=ppt/slides/slide6.xml><?xml version="1.0" encoding="utf-8"?>
+<p:sld xmlns:a="http://schemas.openxmlformats.org/drawingml/2006/main" xmlns:r="http://schemas.openxmlformats.org/officeDocument/2006/relationships" xmlns:p="http://schemas.openxmlformats.org/presentationml/2006/main">
+  <p:cSld>
+    <p:bg>
+      <p:bgPr>
+        <a:solidFill>
+          <a:schemeClr val="tx1"/>
+        </a:solidFill>
+        <a:effectLst/>
+      </p:bgPr>
+    </p:bg>
+    <p:spTree>
+      <p:nvGrpSpPr>
+        <p:cNvPr id="1" name=""/>
+        <p:cNvGrpSpPr/>
+        <p:nvPr/>
+      </p:nvGrpSpPr>
+      <p:grpSpPr>
+        <a:xfrm>
+          <a:off x="0" y="0"/>
+          <a:ext cx="0" cy="0"/>
+          <a:chOff x="0" y="0"/>
+          <a:chExt cx="0" cy="0"/>
+        </a:xfrm>
+      </p:grpSpPr>
+      <p:sp>
+        <p:nvSpPr>
+          <p:cNvPr id="2050" name="Rectangle 2"/>
+          <p:cNvSpPr>
+            <a:spLocks noChangeArrowheads="1"/>
+          </p:cNvSpPr>
+          <p:nvPr/>
+        </p:nvSpPr>
+        <p:spPr bwMode="auto">
+          <a:xfrm>
+            <a:off x="1874042" y="687328"/>
+            <a:ext cx="8443916" cy="5816977"/>
+          </a:xfrm>
+          <a:prstGeom prst="rect">
+            <a:avLst/>
+          </a:prstGeom>
+          <a:noFill/>
+          <a:ln w="9525">
+            <a:noFill/>
+            <a:miter lim="800000"/>
+            <a:headEnd/>
+            <a:tailEnd/>
+          </a:ln>
+          <a:effectLst/>
+        </p:spPr>
+        <p:txBody>
+          <a:bodyPr wrap="square">
+            <a:spAutoFit/>
+          </a:bodyPr>
+          <a:lstStyle/>
+          <a:p>
+            <a:pPr algn="ctr">
+              <a:defRPr/>
+            </a:pPr>
+            <a:r>
+              <a:rPr lang="en-US" sz="6000" b="1" dirty="0">
+                <a:solidFill>
+                  <a:srgbClr val="FFFFFF"/>
+                </a:solidFill>
+                <a:latin typeface="Avenir"/>
+                <a:cs typeface="Avenir"/>
+              </a:rPr>
+              <a:t>class norms</a:t>
+            </a:r>
+          </a:p>
+          <a:p>
+            <a:pPr algn="ctr">
+              <a:defRPr/>
+            </a:pPr>
+            <a:endParaRPr lang="en-US" sz="3000" dirty="0">
+              <a:solidFill>
+                <a:srgbClr val="FFFFFF"/>
+              </a:solidFill>
+              <a:latin typeface="Avenir"/>
+              <a:cs typeface="Avenir"/>
+            </a:endParaRPr>
+          </a:p>
+          <a:p>
+            <a:pPr marL="571500" indent="-571500">
+              <a:buFont typeface="Arial" panose="020B0604020202020204" pitchFamily="34" charset="0"/>
+              <a:buChar char="•"/>
+              <a:defRPr/>
+            </a:pPr>
+            <a:r>
+              <a:rPr lang="en-US" sz="4000" dirty="0">
+                <a:solidFill>
+                  <a:srgbClr val="FFFFFF"/>
+                </a:solidFill>
+                <a:latin typeface="Avenir"/>
+                <a:cs typeface="Avenir"/>
+              </a:rPr>
+              <a:t>growth mindset</a:t>
+            </a:r>
+          </a:p>
+          <a:p>
+            <a:pPr marL="571500" indent="-571500">
+              <a:buFont typeface="Arial" panose="020B0604020202020204" pitchFamily="34" charset="0"/>
+              <a:buChar char="•"/>
+              <a:defRPr/>
+            </a:pPr>
+            <a:r>
+              <a:rPr lang="en-US" sz="4000" dirty="0">
+                <a:solidFill>
+                  <a:srgbClr val="FFFFFF"/>
+                </a:solidFill>
+                <a:latin typeface="Avenir"/>
+                <a:cs typeface="Avenir"/>
+              </a:rPr>
+              <a:t>respect and support one another</a:t>
+            </a:r>
+          </a:p>
+          <a:p>
+            <a:pPr marL="571500" indent="-571500">
+              <a:buFont typeface="Arial" panose="020B0604020202020204" pitchFamily="34" charset="0"/>
+              <a:buChar char="•"/>
+              <a:defRPr/>
+            </a:pPr>
+            <a:r>
+              <a:rPr lang="en-US" sz="4000" dirty="0">
+                <a:solidFill>
+                  <a:srgbClr val="FFFFFF"/>
+                </a:solidFill>
+                <a:latin typeface="Avenir"/>
+                <a:cs typeface="Avenir"/>
+              </a:rPr>
+              <a:t>actively listen</a:t>
+            </a:r>
+          </a:p>
+          <a:p>
+            <a:pPr marL="571500" indent="-571500">
+              <a:buFont typeface="Arial" panose="020B0604020202020204" pitchFamily="34" charset="0"/>
+              <a:buChar char="•"/>
+              <a:defRPr/>
+            </a:pPr>
+            <a:r>
+              <a:rPr lang="en-US" sz="4000" dirty="0">
+                <a:solidFill>
+                  <a:srgbClr val="FFFFFF"/>
+                </a:solidFill>
+                <a:latin typeface="Avenir"/>
+                <a:cs typeface="Avenir"/>
+              </a:rPr>
+              <a:t>contribute</a:t>
+            </a:r>
+          </a:p>
+          <a:p>
+            <a:pPr marL="571500" indent="-571500">
+              <a:buFont typeface="Arial" panose="020B0604020202020204" pitchFamily="34" charset="0"/>
+              <a:buChar char="•"/>
+              <a:defRPr/>
+            </a:pPr>
+            <a:r>
+              <a:rPr lang="en-US" sz="4000" dirty="0">
+                <a:solidFill>
+                  <a:srgbClr val="FFFFFF"/>
+                </a:solidFill>
+                <a:latin typeface="Avenir"/>
+                <a:cs typeface="Avenir"/>
+              </a:rPr>
+              <a:t>ask questions</a:t>
+            </a:r>
+          </a:p>
+          <a:p>
+            <a:pPr marL="571500" indent="-571500">
+              <a:buFont typeface="Arial" panose="020B0604020202020204" pitchFamily="34" charset="0"/>
+              <a:buChar char="•"/>
+              <a:defRPr/>
+            </a:pPr>
+            <a:r>
+              <a:rPr lang="en-US" sz="4000" dirty="0">
+                <a:solidFill>
+                  <a:srgbClr val="FFFFFF"/>
+                </a:solidFill>
+                <a:latin typeface="Avenir"/>
+                <a:cs typeface="Avenir"/>
+              </a:rPr>
+              <a:t>monitor air time</a:t>
+            </a:r>
+          </a:p>
+          <a:p>
+            <a:pPr algn="ctr">
+              <a:defRPr/>
+            </a:pPr>
+            <a:endParaRPr lang="en-US" sz="3200" dirty="0">
+              <a:solidFill>
+                <a:srgbClr val="FFFFFF"/>
+              </a:solidFill>
+              <a:latin typeface="Avenir"/>
+              <a:cs typeface="Avenir"/>
+            </a:endParaRPr>
+          </a:p>
+        </p:txBody>
+      </p:sp>
+    </p:spTree>
+    <p:extLst>
+      <p:ext uri="{BB962C8B-B14F-4D97-AF65-F5344CB8AC3E}">
+        <p14:creationId xmlns:p14="http://schemas.microsoft.com/office/powerpoint/2010/main" val="2389094736"/>
+      </p:ext>
+    </p:extLst>
+  </p:cSld>
+  <p:clrMapOvr>
+    <a:masterClrMapping/>
+  </p:clrMapOvr>
+</p:sld>
+</file>
+
+<file path=ppt/slides/slide7.xml><?xml version="1.0" encoding="utf-8"?>
+<p:sld xmlns:a="http://schemas.openxmlformats.org/drawingml/2006/main" xmlns:r="http://schemas.openxmlformats.org/officeDocument/2006/relationships" xmlns:p="http://schemas.openxmlformats.org/presentationml/2006/main">
+  <p:cSld>
+    <p:bg>
+      <p:bgPr>
+        <a:solidFill>
+          <a:schemeClr val="tx1"/>
+        </a:solidFill>
+        <a:effectLst/>
+      </p:bgPr>
+    </p:bg>
+    <p:spTree>
+      <p:nvGrpSpPr>
+        <p:cNvPr id="1" name=""/>
+        <p:cNvGrpSpPr/>
+        <p:nvPr/>
+      </p:nvGrpSpPr>
+      <p:grpSpPr>
+        <a:xfrm>
+          <a:off x="0" y="0"/>
+          <a:ext cx="0" cy="0"/>
+          <a:chOff x="0" y="0"/>
+          <a:chExt cx="0" cy="0"/>
+        </a:xfrm>
+      </p:grpSpPr>
+      <p:sp>
+        <p:nvSpPr>
+          <p:cNvPr id="15361" name="Text Box 3"/>
+          <p:cNvSpPr txBox="1">
+            <a:spLocks noChangeArrowheads="1"/>
+          </p:cNvSpPr>
+          <p:nvPr/>
+        </p:nvSpPr>
+        <p:spPr bwMode="auto">
+          <a:xfrm>
+            <a:off x="6353176" y="3489326"/>
+            <a:ext cx="697627" cy="830997"/>
+          </a:xfrm>
+          <a:prstGeom prst="rect">
+            <a:avLst/>
+          </a:prstGeom>
+          <a:noFill/>
+          <a:ln>
+            <a:noFill/>
+          </a:ln>
+          <a:extLst>
+            <a:ext uri="{909E8E84-426E-40dd-AFC4-6F175D3DCCD1}">
+              <a14:hiddenFill xmlns="" xmlns:a14="http://schemas.microsoft.com/office/drawing/2010/main">
+                <a:solidFill>
+                  <a:srgbClr val="FFFFFF"/>
+                </a:solidFill>
+              </a14:hiddenFill>
+            </a:ext>
+            <a:ext uri="{91240B29-F687-4f45-9708-019B960494DF}">
+              <a14:hiddenLine xmlns="" xmlns:a14="http://schemas.microsoft.com/office/drawing/2010/main" w="9525">
+                <a:solidFill>
+                  <a:srgbClr val="000000"/>
+                </a:solidFill>
+                <a:miter lim="800000"/>
+                <a:headEnd/>
+                <a:tailEnd/>
+              </a14:hiddenLine>
+            </a:ext>
+          </a:extLst>
+        </p:spPr>
+        <p:txBody>
+          <a:bodyPr wrap="none">
+            <a:spAutoFit/>
+          </a:bodyPr>
+          <a:lstStyle>
+            <a:lvl1pPr>
+              <a:defRPr sz="2400">
+                <a:solidFill>
+                  <a:schemeClr val="tx1"/>
+                </a:solidFill>
+                <a:latin typeface="Helvetica" charset="0"/>
+                <a:ea typeface="ＭＳ Ｐゴシック" charset="0"/>
+                <a:cs typeface="ＭＳ Ｐゴシック" charset="0"/>
+              </a:defRPr>
+            </a:lvl1pPr>
+            <a:lvl2pPr marL="742950" indent="-285750">
+              <a:defRPr sz="2400">
+                <a:solidFill>
+                  <a:schemeClr val="tx1"/>
+                </a:solidFill>
+                <a:latin typeface="Helvetica" charset="0"/>
+                <a:ea typeface="ＭＳ Ｐゴシック" charset="0"/>
+              </a:defRPr>
+            </a:lvl2pPr>
+            <a:lvl3pPr marL="1143000" indent="-228600">
+              <a:defRPr sz="2400">
+                <a:solidFill>
+                  <a:schemeClr val="tx1"/>
+                </a:solidFill>
+                <a:latin typeface="Helvetica" charset="0"/>
+                <a:ea typeface="ＭＳ Ｐゴシック" charset="0"/>
+              </a:defRPr>
+            </a:lvl3pPr>
+            <a:lvl4pPr marL="1600200" indent="-228600">
+              <a:defRPr sz="2400">
+                <a:solidFill>
+                  <a:schemeClr val="tx1"/>
+                </a:solidFill>
+                <a:latin typeface="Helvetica" charset="0"/>
+                <a:ea typeface="ＭＳ Ｐゴシック" charset="0"/>
+              </a:defRPr>
+            </a:lvl4pPr>
+            <a:lvl5pPr marL="2057400" indent="-228600">
+              <a:defRPr sz="2400">
+                <a:solidFill>
+                  <a:schemeClr val="tx1"/>
+                </a:solidFill>
+                <a:latin typeface="Helvetica" charset="0"/>
+                <a:ea typeface="ＭＳ Ｐゴシック" charset="0"/>
+              </a:defRPr>
+            </a:lvl5pPr>
+            <a:lvl6pPr marL="2514600" indent="-228600" eaLnBrk="0" fontAlgn="base" hangingPunct="0">
+              <a:spcBef>
+                <a:spcPct val="0"/>
+              </a:spcBef>
+              <a:spcAft>
+                <a:spcPct val="0"/>
+              </a:spcAft>
+              <a:defRPr sz="2400">
+                <a:solidFill>
+                  <a:schemeClr val="tx1"/>
+                </a:solidFill>
+                <a:latin typeface="Helvetica" charset="0"/>
+                <a:ea typeface="ＭＳ Ｐゴシック" charset="0"/>
+              </a:defRPr>
+            </a:lvl6pPr>
+            <a:lvl7pPr marL="2971800" indent="-228600" eaLnBrk="0" fontAlgn="base" hangingPunct="0">
+              <a:spcBef>
+                <a:spcPct val="0"/>
+              </a:spcBef>
+              <a:spcAft>
+                <a:spcPct val="0"/>
+              </a:spcAft>
+              <a:defRPr sz="2400">
+                <a:solidFill>
+                  <a:schemeClr val="tx1"/>
+                </a:solidFill>
+                <a:latin typeface="Helvetica" charset="0"/>
+                <a:ea typeface="ＭＳ Ｐゴシック" charset="0"/>
+              </a:defRPr>
+            </a:lvl7pPr>
+            <a:lvl8pPr marL="3429000" indent="-228600" eaLnBrk="0" fontAlgn="base" hangingPunct="0">
+              <a:spcBef>
+                <a:spcPct val="0"/>
+              </a:spcBef>
+              <a:spcAft>
+                <a:spcPct val="0"/>
+              </a:spcAft>
+              <a:defRPr sz="2400">
+                <a:solidFill>
+                  <a:schemeClr val="tx1"/>
+                </a:solidFill>
+                <a:latin typeface="Helvetica" charset="0"/>
+                <a:ea typeface="ＭＳ Ｐゴシック" charset="0"/>
+              </a:defRPr>
+            </a:lvl8pPr>
+            <a:lvl9pPr marL="3886200" indent="-228600" eaLnBrk="0" fontAlgn="base" hangingPunct="0">
+              <a:spcBef>
+                <a:spcPct val="0"/>
+              </a:spcBef>
+              <a:spcAft>
+                <a:spcPct val="0"/>
+              </a:spcAft>
+              <a:defRPr sz="2400">
+                <a:solidFill>
+                  <a:schemeClr val="tx1"/>
+                </a:solidFill>
+                <a:latin typeface="Helvetica" charset="0"/>
+                <a:ea typeface="ＭＳ Ｐゴシック" charset="0"/>
+              </a:defRPr>
+            </a:lvl9pPr>
+          </a:lstStyle>
+          <a:p>
+            <a:r>
+              <a:rPr lang="en-US">
+                <a:latin typeface="Times" charset="0"/>
+              </a:rPr>
+              <a:t>Bob</a:t>
+            </a:r>
+          </a:p>
+          <a:p>
+            <a:r>
+              <a:rPr lang="en-US">
+                <a:latin typeface="Times" charset="0"/>
+              </a:rPr>
+              <a:t>Bell</a:t>
+            </a:r>
+          </a:p>
+        </p:txBody>
+      </p:sp>
+      <p:pic>
+        <p:nvPicPr>
+          <p:cNvPr id="15362" name="Picture 4"/>
+          <p:cNvPicPr>
+            <a:picLocks noChangeAspect="1"/>
+          </p:cNvPicPr>
+          <p:nvPr/>
+        </p:nvPicPr>
+        <p:blipFill>
+          <a:blip r:embed="rId3">
+            <a:extLst>
+              <a:ext uri="{28A0092B-C50C-407E-A947-70E740481C1C}">
+                <a14:useLocalDpi xmlns:a14="http://schemas.microsoft.com/office/drawing/2010/main" val="0"/>
+              </a:ext>
+            </a:extLst>
+          </a:blip>
+          <a:srcRect/>
+          <a:stretch>
+            <a:fillRect/>
+          </a:stretch>
+        </p:blipFill>
+        <p:spPr bwMode="auto">
+          <a:xfrm>
+            <a:off x="6255835" y="11151"/>
+            <a:ext cx="5936166" cy="6852168"/>
+          </a:xfrm>
+          <a:prstGeom prst="rect">
+            <a:avLst/>
+          </a:prstGeom>
+          <a:noFill/>
+          <a:ln>
+            <a:noFill/>
+          </a:ln>
+          <a:extLst>
+            <a:ext uri="{909E8E84-426E-40dd-AFC4-6F175D3DCCD1}">
+              <a14:hiddenFill xmlns="" xmlns:a14="http://schemas.microsoft.com/office/drawing/2010/main">
+                <a:solidFill>
+                  <a:srgbClr val="FFFFFF"/>
+                </a:solidFill>
+              </a14:hiddenFill>
+            </a:ext>
+            <a:ext uri="{91240B29-F687-4f45-9708-019B960494DF}">
+              <a14:hiddenLine xmlns="" xmlns:a14="http://schemas.microsoft.com/office/drawing/2010/main" w="9525">
+                <a:solidFill>
+                  <a:srgbClr val="000000"/>
+                </a:solidFill>
+                <a:miter lim="800000"/>
+                <a:headEnd/>
+                <a:tailEnd/>
+              </a14:hiddenLine>
+            </a:ext>
+          </a:extLst>
+        </p:spPr>
+      </p:pic>
+      <p:sp>
+        <p:nvSpPr>
+          <p:cNvPr id="15363" name="Rectangle 4"/>
+          <p:cNvSpPr>
+            <a:spLocks noChangeArrowheads="1"/>
+          </p:cNvSpPr>
+          <p:nvPr/>
+        </p:nvSpPr>
+        <p:spPr bwMode="auto">
+          <a:xfrm>
+            <a:off x="-1944330" y="2981494"/>
+            <a:ext cx="7710488" cy="1015663"/>
+          </a:xfrm>
+          <a:prstGeom prst="rect">
+            <a:avLst/>
+          </a:prstGeom>
+          <a:noFill/>
+          <a:ln>
+            <a:noFill/>
+          </a:ln>
+          <a:extLst>
+            <a:ext uri="{909E8E84-426E-40dd-AFC4-6F175D3DCCD1}">
+              <a14:hiddenFill xmlns="" xmlns:a14="http://schemas.microsoft.com/office/drawing/2010/main">
+                <a:solidFill>
+                  <a:srgbClr val="FFFFFF"/>
+                </a:solidFill>
+              </a14:hiddenFill>
+            </a:ext>
+            <a:ext uri="{91240B29-F687-4f45-9708-019B960494DF}">
+              <a14:hiddenLine xmlns="" xmlns:a14="http://schemas.microsoft.com/office/drawing/2010/main" w="9525">
+                <a:solidFill>
+                  <a:srgbClr val="000000"/>
+                </a:solidFill>
+                <a:miter lim="800000"/>
+                <a:headEnd/>
+                <a:tailEnd/>
+              </a14:hiddenLine>
+            </a:ext>
+          </a:extLst>
+        </p:spPr>
+        <p:txBody>
+          <a:bodyPr>
+            <a:spAutoFit/>
+          </a:bodyPr>
+          <a:lstStyle/>
+          <a:p>
+            <a:pPr algn="r"/>
+            <a:r>
+              <a:rPr lang="en-US" sz="6000" dirty="0">
+                <a:solidFill>
+                  <a:srgbClr val="FFFFFF"/>
+                </a:solidFill>
+                <a:latin typeface="Avenir" charset="0"/>
+                <a:cs typeface="Avenir" charset="0"/>
+              </a:rPr>
+              <a:t>let’s dive in…</a:t>
+            </a:r>
+          </a:p>
+        </p:txBody>
+      </p:sp>
+    </p:spTree>
+    <p:extLst>
+      <p:ext uri="{BB962C8B-B14F-4D97-AF65-F5344CB8AC3E}">
+        <p14:creationId xmlns:p14="http://schemas.microsoft.com/office/powerpoint/2010/main" val="1198608017"/>
+      </p:ext>
+    </p:extLst>
+  </p:cSld>
+  <p:clrMapOvr>
+    <a:masterClrMapping/>
+  </p:clrMapOvr>
+</p:sld>
+</file>
+
+<file path=ppt/slides/slide8.xml><?xml version="1.0" encoding="utf-8"?>
+<p:sld xmlns:a="http://schemas.openxmlformats.org/drawingml/2006/main" xmlns:r="http://schemas.openxmlformats.org/officeDocument/2006/relationships" xmlns:p="http://schemas.openxmlformats.org/presentationml/2006/main">
+  <p:cSld>
+    <p:spTree>
+      <p:nvGrpSpPr>
+        <p:cNvPr id="1" name=""/>
+        <p:cNvGrpSpPr/>
+        <p:nvPr/>
+      </p:nvGrpSpPr>
+      <p:grpSpPr>
+        <a:xfrm>
+          <a:off x="0" y="0"/>
+          <a:ext cx="0" cy="0"/>
+          <a:chOff x="0" y="0"/>
+          <a:chExt cx="0" cy="0"/>
+        </a:xfrm>
+      </p:grpSpPr>
+      <p:sp>
+        <p:nvSpPr>
+          <p:cNvPr id="2" name="Title 1">
+            <a:extLst>
+              <a:ext uri="{FF2B5EF4-FFF2-40B4-BE49-F238E27FC236}">
+                <a16:creationId xmlns:a16="http://schemas.microsoft.com/office/drawing/2014/main" id="{D46328C8-E57A-4548-E685-7C8547826A9D}"/>
+              </a:ext>
+            </a:extLst>
+          </p:cNvPr>
+          <p:cNvSpPr>
+            <a:spLocks noGrp="1"/>
+          </p:cNvSpPr>
+          <p:nvPr>
+            <p:ph type="ctrTitle"/>
+          </p:nvPr>
+        </p:nvSpPr>
+        <p:spPr/>
+        <p:txBody>
+          <a:bodyPr/>
+          <a:lstStyle/>
+          <a:p>
+            <a:endParaRPr lang="en-US"/>
+          </a:p>
+        </p:txBody>
+      </p:sp>
+      <p:sp>
+        <p:nvSpPr>
+          <p:cNvPr id="3" name="Subtitle 2">
+            <a:extLst>
+              <a:ext uri="{FF2B5EF4-FFF2-40B4-BE49-F238E27FC236}">
+                <a16:creationId xmlns:a16="http://schemas.microsoft.com/office/drawing/2014/main" id="{45A1BAE9-70C8-C269-8AD4-7B4B3D134C13}"/>
+              </a:ext>
+            </a:extLst>
+          </p:cNvPr>
+          <p:cNvSpPr>
+            <a:spLocks noGrp="1"/>
+          </p:cNvSpPr>
+          <p:nvPr>
+            <p:ph type="subTitle" idx="1"/>
+          </p:nvPr>
+        </p:nvSpPr>
+        <p:spPr/>
+        <p:txBody>
+          <a:bodyPr/>
+          <a:lstStyle/>
+          <a:p>
+            <a:endParaRPr lang="en-US"/>
+          </a:p>
+        </p:txBody>
+      </p:sp>
+      <p:pic>
+        <p:nvPicPr>
+          <p:cNvPr id="5" name="slide.url=https://www.polleverywhere.com/multiple_choice_polls/C5Mf4wqoOzxgPhTX3YZyj?state=opened&amp;flow=Default&amp;onscreen=persist">
+            <a:extLst>
+              <a:ext uri="{FF2B5EF4-FFF2-40B4-BE49-F238E27FC236}">
+                <a16:creationId xmlns:a16="http://schemas.microsoft.com/office/drawing/2014/main" id="{C1680DC4-93E8-614B-054E-9D7DCD24A5C6}"/>
+              </a:ext>
+            </a:extLst>
+          </p:cNvPr>
+          <p:cNvPicPr>
+            <a:picLocks/>
+          </p:cNvPicPr>
+          <p:nvPr/>
+        </p:nvPicPr>
+        <p:blipFill>
+          <a:blip r:embed="rId3"/>
+          <a:stretch>
+            <a:fillRect/>
+          </a:stretch>
+        </p:blipFill>
+        <p:spPr>
+          <a:xfrm>
+            <a:off x="63500" y="63500"/>
+            <a:ext cx="12065000" cy="6731000"/>
+          </a:xfrm>
+          <a:prstGeom prst="rect">
+            <a:avLst/>
+          </a:prstGeom>
+        </p:spPr>
+      </p:pic>
+    </p:spTree>
+    <p:extLst>
+      <p:ext uri="{BB962C8B-B14F-4D97-AF65-F5344CB8AC3E}">
+        <p14:creationId xmlns:p14="http://schemas.microsoft.com/office/powerpoint/2010/main" val="1511497431"/>
+      </p:ext>
+    </p:extLst>
+  </p:cSld>
+  <p:clrMapOvr>
+    <a:masterClrMapping/>
+  </p:clrMapOvr>
+</p:sld>
+</file>
+
+<file path=ppt/slides/slide9.xml><?xml version="1.0" encoding="utf-8"?>
+<p:sld xmlns:a="http://schemas.openxmlformats.org/drawingml/2006/main" xmlns:r="http://schemas.openxmlformats.org/officeDocument/2006/relationships" xmlns:p="http://schemas.openxmlformats.org/presentationml/2006/main">
+  <p:cSld>
+    <p:spTree>
+      <p:nvGrpSpPr>
+        <p:cNvPr id="1" name=""/>
+        <p:cNvGrpSpPr/>
+        <p:nvPr/>
+      </p:nvGrpSpPr>
+      <p:grpSpPr>
+        <a:xfrm>
+          <a:off x="0" y="0"/>
+          <a:ext cx="0" cy="0"/>
+          <a:chOff x="0" y="0"/>
+          <a:chExt cx="0" cy="0"/>
+        </a:xfrm>
+      </p:grpSpPr>
+      <p:sp>
+        <p:nvSpPr>
+          <p:cNvPr id="2" name="Title 1">
+            <a:extLst>
+              <a:ext uri="{FF2B5EF4-FFF2-40B4-BE49-F238E27FC236}">
+                <a16:creationId xmlns:a16="http://schemas.microsoft.com/office/drawing/2014/main" id="{817A132B-DB9E-494A-B78D-F786D5645CC0}"/>
+              </a:ext>
+            </a:extLst>
+          </p:cNvPr>
+          <p:cNvSpPr>
+            <a:spLocks noGrp="1"/>
+          </p:cNvSpPr>
+          <p:nvPr>
+            <p:ph type="ctrTitle"/>
+          </p:nvPr>
+        </p:nvSpPr>
+        <p:spPr/>
+        <p:txBody>
+          <a:bodyPr/>
+          <a:lstStyle/>
+          <a:p>
+            <a:endParaRPr lang="en-US"/>
+          </a:p>
+        </p:txBody>
+      </p:sp>
+      <p:sp>
+        <p:nvSpPr>
+          <p:cNvPr id="3" name="Subtitle 2">
+            <a:extLst>
+              <a:ext uri="{FF2B5EF4-FFF2-40B4-BE49-F238E27FC236}">
+                <a16:creationId xmlns:a16="http://schemas.microsoft.com/office/drawing/2014/main" id="{181C6761-0AFB-4A40-910C-04C7202DF597}"/>
+              </a:ext>
+            </a:extLst>
+          </p:cNvPr>
+          <p:cNvSpPr>
+            <a:spLocks noGrp="1"/>
+          </p:cNvSpPr>
+          <p:nvPr>
+            <p:ph type="subTitle" idx="1"/>
+          </p:nvPr>
+        </p:nvSpPr>
+        <p:spPr/>
+        <p:txBody>
+          <a:bodyPr/>
+          <a:lstStyle/>
+          <a:p>
+            <a:endParaRPr lang="en-US"/>
+          </a:p>
+        </p:txBody>
+      </p:sp>
+      <p:pic>
+        <p:nvPicPr>
+          <p:cNvPr id="5" name="slide.url=https://www.polleverywhere.com/free_text_polls/n8mRsosII42qUWMLxN3aH">
+            <a:extLst>
+              <a:ext uri="{FF2B5EF4-FFF2-40B4-BE49-F238E27FC236}">
+                <a16:creationId xmlns:a16="http://schemas.microsoft.com/office/drawing/2014/main" id="{72EB74FD-A9DE-7F46-9103-F417496D3DB3}"/>
+              </a:ext>
+            </a:extLst>
+          </p:cNvPr>
+          <p:cNvPicPr>
+            <a:picLocks/>
+          </p:cNvPicPr>
+          <p:nvPr/>
+        </p:nvPicPr>
+        <p:blipFill>
+          <a:blip r:embed="rId3"/>
+          <a:stretch>
+            <a:fillRect/>
+          </a:stretch>
+        </p:blipFill>
+        <p:spPr>
+          <a:xfrm>
+            <a:off x="63500" y="63500"/>
+            <a:ext cx="12065000" cy="6731000"/>
+          </a:xfrm>
+          <a:prstGeom prst="rect">
+            <a:avLst/>
+          </a:prstGeom>
+        </p:spPr>
+      </p:pic>
+    </p:spTree>
+    <p:extLst>
+      <p:ext uri="{BB962C8B-B14F-4D97-AF65-F5344CB8AC3E}">
+        <p14:creationId xmlns:p14="http://schemas.microsoft.com/office/powerpoint/2010/main" val="4242319848"/>
+      </p:ext>
+    </p:extLst>
+  </p:cSld>
+  <p:clrMapOvr>
+    <a:masterClrMapping/>
+  </p:clrMapOvr>
 </p:sld>
 </file>
 

--- a/lectures/in-class_activities/class_1.pptx
+++ b/lectures/in-class_activities/class_1.pptx
@@ -5,21 +5,23 @@
     <p:sldMasterId id="2147483648" r:id="rId1"/>
   </p:sldMasterIdLst>
   <p:notesMasterIdLst>
-    <p:notesMasterId r:id="rId14"/>
+    <p:notesMasterId r:id="rId16"/>
   </p:notesMasterIdLst>
   <p:sldIdLst>
     <p:sldId id="318" r:id="rId2"/>
     <p:sldId id="319" r:id="rId3"/>
-    <p:sldId id="686" r:id="rId4"/>
-    <p:sldId id="682" r:id="rId5"/>
-    <p:sldId id="683" r:id="rId6"/>
-    <p:sldId id="674" r:id="rId7"/>
-    <p:sldId id="471" r:id="rId8"/>
-    <p:sldId id="685" r:id="rId9"/>
-    <p:sldId id="681" r:id="rId10"/>
-    <p:sldId id="672" r:id="rId11"/>
-    <p:sldId id="684" r:id="rId12"/>
-    <p:sldId id="673" r:id="rId13"/>
+    <p:sldId id="687" r:id="rId4"/>
+    <p:sldId id="688" r:id="rId5"/>
+    <p:sldId id="686" r:id="rId6"/>
+    <p:sldId id="682" r:id="rId7"/>
+    <p:sldId id="683" r:id="rId8"/>
+    <p:sldId id="674" r:id="rId9"/>
+    <p:sldId id="471" r:id="rId10"/>
+    <p:sldId id="685" r:id="rId11"/>
+    <p:sldId id="681" r:id="rId12"/>
+    <p:sldId id="672" r:id="rId13"/>
+    <p:sldId id="684" r:id="rId14"/>
+    <p:sldId id="673" r:id="rId15"/>
   </p:sldIdLst>
   <p:sldSz cx="12192000" cy="6858000"/>
   <p:notesSz cx="6858000" cy="9144000"/>
@@ -792,24 +794,16 @@
           <a:lstStyle/>
           <a:p>
             <a:r>
-              <a:rPr lang="en-US" dirty="0"/>
-              <a:t>https://</a:t>
-            </a:r>
-            <a:r>
-              <a:rPr lang="en-US" dirty="0" err="1"/>
-              <a:t>docs.google.com</a:t>
-            </a:r>
-            <a:r>
-              <a:rPr lang="en-US" dirty="0"/>
-              <a:t>/document/d/1Kk92IApqR0dqP8pjU8KjXSjuFePxToeInctn_EKyqx0/</a:t>
-            </a:r>
-            <a:r>
-              <a:rPr lang="en-US" dirty="0" err="1"/>
-              <a:t>edit?usp</a:t>
-            </a:r>
-            <a:r>
-              <a:rPr lang="en-US" dirty="0"/>
-              <a:t>=sharing</a:t>
+              <a:rPr lang="en-US"/>
+              <a:t>Do not modify the notes in this section to avoid tampering with the Poll Everywhere activity.
+More info at polleverywhere.com/support
+What comes to mind when I say the word "parasite"?</a:t>
+            </a:r>
+          </a:p>
+          <a:p>
+            <a:r>
+              <a:rPr lang="en-US"/>
+              <a:t>https://www.polleverywhere.com/free_text_polls/n8mRsosII42qUWMLxN3aH</a:t>
             </a:r>
           </a:p>
         </p:txBody>
@@ -831,7 +825,7 @@
           <a:p>
             <a:fld id="{34649269-E026-4E44-9951-397123D7CFB5}" type="slidenum">
               <a:rPr lang="en-US" smtClean="0"/>
-              <a:t>10</a:t>
+              <a:t>11</a:t>
             </a:fld>
             <a:endParaRPr lang="en-US"/>
           </a:p>
@@ -840,7 +834,7 @@
     </p:spTree>
     <p:extLst>
       <p:ext uri="{BB962C8B-B14F-4D97-AF65-F5344CB8AC3E}">
-        <p14:creationId xmlns:p14="http://schemas.microsoft.com/office/powerpoint/2010/main" val="983902734"/>
+        <p14:creationId xmlns:p14="http://schemas.microsoft.com/office/powerpoint/2010/main" val="824592114"/>
       </p:ext>
     </p:extLst>
   </p:cSld>
@@ -894,7 +888,26 @@
           <a:bodyPr/>
           <a:lstStyle/>
           <a:p>
-            <a:endParaRPr lang="en-US"/>
+            <a:r>
+              <a:rPr lang="en-US" dirty="0"/>
+              <a:t>https://</a:t>
+            </a:r>
+            <a:r>
+              <a:rPr lang="en-US" dirty="0" err="1"/>
+              <a:t>docs.google.com</a:t>
+            </a:r>
+            <a:r>
+              <a:rPr lang="en-US" dirty="0"/>
+              <a:t>/document/d/1Kk92IApqR0dqP8pjU8KjXSjuFePxToeInctn_EKyqx0/</a:t>
+            </a:r>
+            <a:r>
+              <a:rPr lang="en-US" dirty="0" err="1"/>
+              <a:t>edit?usp</a:t>
+            </a:r>
+            <a:r>
+              <a:rPr lang="en-US" dirty="0"/>
+              <a:t>=sharing</a:t>
+            </a:r>
           </a:p>
         </p:txBody>
       </p:sp>
@@ -915,7 +928,7 @@
           <a:p>
             <a:fld id="{34649269-E026-4E44-9951-397123D7CFB5}" type="slidenum">
               <a:rPr lang="en-US" smtClean="0"/>
-              <a:t>11</a:t>
+              <a:t>12</a:t>
             </a:fld>
             <a:endParaRPr lang="en-US"/>
           </a:p>
@@ -924,7 +937,7 @@
     </p:spTree>
     <p:extLst>
       <p:ext uri="{BB962C8B-B14F-4D97-AF65-F5344CB8AC3E}">
-        <p14:creationId xmlns:p14="http://schemas.microsoft.com/office/powerpoint/2010/main" val="2210722112"/>
+        <p14:creationId xmlns:p14="http://schemas.microsoft.com/office/powerpoint/2010/main" val="983902734"/>
       </p:ext>
     </p:extLst>
   </p:cSld>
@@ -953,6 +966,90 @@
       </p:grpSpPr>
       <p:sp>
         <p:nvSpPr>
+          <p:cNvPr id="2" name="Slide Image Placeholder 1"/>
+          <p:cNvSpPr>
+            <a:spLocks noGrp="1" noRot="1" noChangeAspect="1"/>
+          </p:cNvSpPr>
+          <p:nvPr>
+            <p:ph type="sldImg"/>
+          </p:nvPr>
+        </p:nvSpPr>
+        <p:spPr/>
+      </p:sp>
+      <p:sp>
+        <p:nvSpPr>
+          <p:cNvPr id="3" name="Notes Placeholder 2"/>
+          <p:cNvSpPr>
+            <a:spLocks noGrp="1"/>
+          </p:cNvSpPr>
+          <p:nvPr>
+            <p:ph type="body" idx="1"/>
+          </p:nvPr>
+        </p:nvSpPr>
+        <p:spPr/>
+        <p:txBody>
+          <a:bodyPr/>
+          <a:lstStyle/>
+          <a:p>
+            <a:endParaRPr lang="en-US"/>
+          </a:p>
+        </p:txBody>
+      </p:sp>
+      <p:sp>
+        <p:nvSpPr>
+          <p:cNvPr id="4" name="Slide Number Placeholder 3"/>
+          <p:cNvSpPr>
+            <a:spLocks noGrp="1"/>
+          </p:cNvSpPr>
+          <p:nvPr>
+            <p:ph type="sldNum" sz="quarter" idx="5"/>
+          </p:nvPr>
+        </p:nvSpPr>
+        <p:spPr/>
+        <p:txBody>
+          <a:bodyPr/>
+          <a:lstStyle/>
+          <a:p>
+            <a:fld id="{34649269-E026-4E44-9951-397123D7CFB5}" type="slidenum">
+              <a:rPr lang="en-US" smtClean="0"/>
+              <a:t>13</a:t>
+            </a:fld>
+            <a:endParaRPr lang="en-US"/>
+          </a:p>
+        </p:txBody>
+      </p:sp>
+    </p:spTree>
+    <p:extLst>
+      <p:ext uri="{BB962C8B-B14F-4D97-AF65-F5344CB8AC3E}">
+        <p14:creationId xmlns:p14="http://schemas.microsoft.com/office/powerpoint/2010/main" val="2210722112"/>
+      </p:ext>
+    </p:extLst>
+  </p:cSld>
+  <p:clrMapOvr>
+    <a:masterClrMapping/>
+  </p:clrMapOvr>
+</p:notes>
+</file>
+
+<file path=ppt/notesSlides/notesSlide13.xml><?xml version="1.0" encoding="utf-8"?>
+<p:notes xmlns:a="http://schemas.openxmlformats.org/drawingml/2006/main" xmlns:r="http://schemas.openxmlformats.org/officeDocument/2006/relationships" xmlns:p="http://schemas.openxmlformats.org/presentationml/2006/main">
+  <p:cSld>
+    <p:spTree>
+      <p:nvGrpSpPr>
+        <p:cNvPr id="1" name=""/>
+        <p:cNvGrpSpPr/>
+        <p:nvPr/>
+      </p:nvGrpSpPr>
+      <p:grpSpPr>
+        <a:xfrm>
+          <a:off x="0" y="0"/>
+          <a:ext cx="0" cy="0"/>
+          <a:chOff x="0" y="0"/>
+          <a:chExt cx="0" cy="0"/>
+        </a:xfrm>
+      </p:grpSpPr>
+      <p:sp>
+        <p:nvSpPr>
           <p:cNvPr id="16385" name="Rectangle 7"/>
           <p:cNvSpPr>
             <a:spLocks noGrp="1" noChangeArrowheads="1"/>
@@ -1098,7 +1195,7 @@
             <a:fld id="{2C1D408F-3F93-4F43-8A63-5C97F2D4AA7C}" type="slidenum">
               <a:rPr lang="en-US" sz="1200"/>
               <a:pPr/>
-              <a:t>12</a:t>
+              <a:t>14</a:t>
             </a:fld>
             <a:endParaRPr lang="en-US" sz="1200"/>
           </a:p>
@@ -1427,6 +1524,90 @@
   <p:cSld>
     <p:spTree>
       <p:nvGrpSpPr>
+        <p:cNvPr id="1" name=""/>
+        <p:cNvGrpSpPr/>
+        <p:nvPr/>
+      </p:nvGrpSpPr>
+      <p:grpSpPr>
+        <a:xfrm>
+          <a:off x="0" y="0"/>
+          <a:ext cx="0" cy="0"/>
+          <a:chOff x="0" y="0"/>
+          <a:chExt cx="0" cy="0"/>
+        </a:xfrm>
+      </p:grpSpPr>
+      <p:sp>
+        <p:nvSpPr>
+          <p:cNvPr id="2" name="Slide Image Placeholder 1"/>
+          <p:cNvSpPr>
+            <a:spLocks noGrp="1" noRot="1" noChangeAspect="1"/>
+          </p:cNvSpPr>
+          <p:nvPr>
+            <p:ph type="sldImg"/>
+          </p:nvPr>
+        </p:nvSpPr>
+        <p:spPr/>
+      </p:sp>
+      <p:sp>
+        <p:nvSpPr>
+          <p:cNvPr id="3" name="Notes Placeholder 2"/>
+          <p:cNvSpPr>
+            <a:spLocks noGrp="1"/>
+          </p:cNvSpPr>
+          <p:nvPr>
+            <p:ph type="body" idx="1"/>
+          </p:nvPr>
+        </p:nvSpPr>
+        <p:spPr/>
+        <p:txBody>
+          <a:bodyPr/>
+          <a:lstStyle/>
+          <a:p>
+            <a:endParaRPr lang="en-US"/>
+          </a:p>
+        </p:txBody>
+      </p:sp>
+      <p:sp>
+        <p:nvSpPr>
+          <p:cNvPr id="4" name="Slide Number Placeholder 3"/>
+          <p:cNvSpPr>
+            <a:spLocks noGrp="1"/>
+          </p:cNvSpPr>
+          <p:nvPr>
+            <p:ph type="sldNum" sz="quarter" idx="5"/>
+          </p:nvPr>
+        </p:nvSpPr>
+        <p:spPr/>
+        <p:txBody>
+          <a:bodyPr/>
+          <a:lstStyle/>
+          <a:p>
+            <a:fld id="{34649269-E026-4E44-9951-397123D7CFB5}" type="slidenum">
+              <a:rPr lang="en-US" smtClean="0"/>
+              <a:t>3</a:t>
+            </a:fld>
+            <a:endParaRPr lang="en-US"/>
+          </a:p>
+        </p:txBody>
+      </p:sp>
+    </p:spTree>
+    <p:extLst>
+      <p:ext uri="{BB962C8B-B14F-4D97-AF65-F5344CB8AC3E}">
+        <p14:creationId xmlns:p14="http://schemas.microsoft.com/office/powerpoint/2010/main" val="4277702581"/>
+      </p:ext>
+    </p:extLst>
+  </p:cSld>
+  <p:clrMapOvr>
+    <a:masterClrMapping/>
+  </p:clrMapOvr>
+</p:notes>
+</file>
+
+<file path=ppt/notesSlides/notesSlide4.xml><?xml version="1.0" encoding="utf-8"?>
+<p:notes xmlns:a="http://schemas.openxmlformats.org/drawingml/2006/main" xmlns:r="http://schemas.openxmlformats.org/officeDocument/2006/relationships" xmlns:p="http://schemas.openxmlformats.org/presentationml/2006/main">
+  <p:cSld>
+    <p:spTree>
+      <p:nvGrpSpPr>
         <p:cNvPr id="1" name="">
           <a:extLst>
             <a:ext uri="{FF2B5EF4-FFF2-40B4-BE49-F238E27FC236}">
@@ -1511,7 +1692,7 @@
           <a:p>
             <a:fld id="{34649269-E026-4E44-9951-397123D7CFB5}" type="slidenum">
               <a:rPr lang="en-US" smtClean="0"/>
-              <a:t>3</a:t>
+              <a:t>5</a:t>
             </a:fld>
             <a:endParaRPr lang="en-US"/>
           </a:p>
@@ -1521,90 +1702,6 @@
     <p:extLst>
       <p:ext uri="{BB962C8B-B14F-4D97-AF65-F5344CB8AC3E}">
         <p14:creationId xmlns:p14="http://schemas.microsoft.com/office/powerpoint/2010/main" val="1216782946"/>
-      </p:ext>
-    </p:extLst>
-  </p:cSld>
-  <p:clrMapOvr>
-    <a:masterClrMapping/>
-  </p:clrMapOvr>
-</p:notes>
-</file>
-
-<file path=ppt/notesSlides/notesSlide4.xml><?xml version="1.0" encoding="utf-8"?>
-<p:notes xmlns:a="http://schemas.openxmlformats.org/drawingml/2006/main" xmlns:r="http://schemas.openxmlformats.org/officeDocument/2006/relationships" xmlns:p="http://schemas.openxmlformats.org/presentationml/2006/main">
-  <p:cSld>
-    <p:spTree>
-      <p:nvGrpSpPr>
-        <p:cNvPr id="1" name=""/>
-        <p:cNvGrpSpPr/>
-        <p:nvPr/>
-      </p:nvGrpSpPr>
-      <p:grpSpPr>
-        <a:xfrm>
-          <a:off x="0" y="0"/>
-          <a:ext cx="0" cy="0"/>
-          <a:chOff x="0" y="0"/>
-          <a:chExt cx="0" cy="0"/>
-        </a:xfrm>
-      </p:grpSpPr>
-      <p:sp>
-        <p:nvSpPr>
-          <p:cNvPr id="2" name="Slide Image Placeholder 1"/>
-          <p:cNvSpPr>
-            <a:spLocks noGrp="1" noRot="1" noChangeAspect="1"/>
-          </p:cNvSpPr>
-          <p:nvPr>
-            <p:ph type="sldImg"/>
-          </p:nvPr>
-        </p:nvSpPr>
-        <p:spPr/>
-      </p:sp>
-      <p:sp>
-        <p:nvSpPr>
-          <p:cNvPr id="3" name="Notes Placeholder 2"/>
-          <p:cNvSpPr>
-            <a:spLocks noGrp="1"/>
-          </p:cNvSpPr>
-          <p:nvPr>
-            <p:ph type="body" idx="1"/>
-          </p:nvPr>
-        </p:nvSpPr>
-        <p:spPr/>
-        <p:txBody>
-          <a:bodyPr/>
-          <a:lstStyle/>
-          <a:p>
-            <a:endParaRPr lang="en-US"/>
-          </a:p>
-        </p:txBody>
-      </p:sp>
-      <p:sp>
-        <p:nvSpPr>
-          <p:cNvPr id="4" name="Slide Number Placeholder 3"/>
-          <p:cNvSpPr>
-            <a:spLocks noGrp="1"/>
-          </p:cNvSpPr>
-          <p:nvPr>
-            <p:ph type="sldNum" sz="quarter" idx="5"/>
-          </p:nvPr>
-        </p:nvSpPr>
-        <p:spPr/>
-        <p:txBody>
-          <a:bodyPr/>
-          <a:lstStyle/>
-          <a:p>
-            <a:fld id="{34649269-E026-4E44-9951-397123D7CFB5}" type="slidenum">
-              <a:rPr lang="en-US" smtClean="0"/>
-              <a:t>4</a:t>
-            </a:fld>
-            <a:endParaRPr lang="en-US"/>
-          </a:p>
-        </p:txBody>
-      </p:sp>
-    </p:spTree>
-    <p:extLst>
-      <p:ext uri="{BB962C8B-B14F-4D97-AF65-F5344CB8AC3E}">
-        <p14:creationId xmlns:p14="http://schemas.microsoft.com/office/powerpoint/2010/main" val="2104405"/>
       </p:ext>
     </p:extLst>
   </p:cSld>
@@ -1679,7 +1776,7 @@
           <a:p>
             <a:fld id="{34649269-E026-4E44-9951-397123D7CFB5}" type="slidenum">
               <a:rPr lang="en-US" smtClean="0"/>
-              <a:t>5</a:t>
+              <a:t>6</a:t>
             </a:fld>
             <a:endParaRPr lang="en-US"/>
           </a:p>
@@ -1688,7 +1785,7 @@
     </p:spTree>
     <p:extLst>
       <p:ext uri="{BB962C8B-B14F-4D97-AF65-F5344CB8AC3E}">
-        <p14:creationId xmlns:p14="http://schemas.microsoft.com/office/powerpoint/2010/main" val="51791727"/>
+        <p14:creationId xmlns:p14="http://schemas.microsoft.com/office/powerpoint/2010/main" val="2104405"/>
       </p:ext>
     </p:extLst>
   </p:cSld>
@@ -1717,222 +1814,62 @@
       </p:grpSpPr>
       <p:sp>
         <p:nvSpPr>
-          <p:cNvPr id="18433" name="Rectangle 7"/>
-          <p:cNvSpPr>
-            <a:spLocks noGrp="1" noChangeArrowheads="1"/>
-          </p:cNvSpPr>
-          <p:nvPr>
-            <p:ph type="sldNum" sz="quarter" idx="5"/>
-          </p:nvPr>
-        </p:nvSpPr>
-        <p:spPr>
-          <a:noFill/>
-          <a:ln/>
-          <a:extLst>
-            <a:ext uri="{909E8E84-426E-40dd-AFC4-6F175D3DCCD1}">
-              <a14:hiddenFill xmlns:a14="http://schemas.microsoft.com/office/drawing/2010/main" xmlns="">
-                <a:solidFill>
-                  <a:srgbClr val="FFFFFF"/>
-                </a:solidFill>
-              </a14:hiddenFill>
-            </a:ext>
-            <a:ext uri="{91240B29-F687-4f45-9708-019B960494DF}">
-              <a14:hiddenLine xmlns:a14="http://schemas.microsoft.com/office/drawing/2010/main" xmlns="" w="9525">
-                <a:solidFill>
-                  <a:srgbClr val="000000"/>
-                </a:solidFill>
-                <a:miter lim="800000"/>
-                <a:headEnd/>
-                <a:tailEnd/>
-              </a14:hiddenLine>
-            </a:ext>
-          </a:extLst>
-        </p:spPr>
-        <p:txBody>
-          <a:bodyPr/>
-          <a:lstStyle>
-            <a:lvl1pPr>
-              <a:defRPr sz="2400">
-                <a:solidFill>
-                  <a:schemeClr val="tx1"/>
-                </a:solidFill>
-                <a:latin typeface="Helvetica" charset="0"/>
-                <a:ea typeface="ＭＳ Ｐゴシック" charset="0"/>
-                <a:cs typeface="ＭＳ Ｐゴシック" charset="0"/>
-              </a:defRPr>
-            </a:lvl1pPr>
-            <a:lvl2pPr marL="742950" indent="-285750">
-              <a:defRPr sz="2400">
-                <a:solidFill>
-                  <a:schemeClr val="tx1"/>
-                </a:solidFill>
-                <a:latin typeface="Helvetica" charset="0"/>
-                <a:ea typeface="ＭＳ Ｐゴシック" charset="0"/>
-              </a:defRPr>
-            </a:lvl2pPr>
-            <a:lvl3pPr marL="1143000" indent="-228600">
-              <a:defRPr sz="2400">
-                <a:solidFill>
-                  <a:schemeClr val="tx1"/>
-                </a:solidFill>
-                <a:latin typeface="Helvetica" charset="0"/>
-                <a:ea typeface="ＭＳ Ｐゴシック" charset="0"/>
-              </a:defRPr>
-            </a:lvl3pPr>
-            <a:lvl4pPr marL="1600200" indent="-228600">
-              <a:defRPr sz="2400">
-                <a:solidFill>
-                  <a:schemeClr val="tx1"/>
-                </a:solidFill>
-                <a:latin typeface="Helvetica" charset="0"/>
-                <a:ea typeface="ＭＳ Ｐゴシック" charset="0"/>
-              </a:defRPr>
-            </a:lvl4pPr>
-            <a:lvl5pPr marL="2057400" indent="-228600">
-              <a:defRPr sz="2400">
-                <a:solidFill>
-                  <a:schemeClr val="tx1"/>
-                </a:solidFill>
-                <a:latin typeface="Helvetica" charset="0"/>
-                <a:ea typeface="ＭＳ Ｐゴシック" charset="0"/>
-              </a:defRPr>
-            </a:lvl5pPr>
-            <a:lvl6pPr marL="2514600" indent="-228600" eaLnBrk="0" fontAlgn="base" hangingPunct="0">
-              <a:spcBef>
-                <a:spcPct val="0"/>
-              </a:spcBef>
-              <a:spcAft>
-                <a:spcPct val="0"/>
-              </a:spcAft>
-              <a:defRPr sz="2400">
-                <a:solidFill>
-                  <a:schemeClr val="tx1"/>
-                </a:solidFill>
-                <a:latin typeface="Helvetica" charset="0"/>
-                <a:ea typeface="ＭＳ Ｐゴシック" charset="0"/>
-              </a:defRPr>
-            </a:lvl6pPr>
-            <a:lvl7pPr marL="2971800" indent="-228600" eaLnBrk="0" fontAlgn="base" hangingPunct="0">
-              <a:spcBef>
-                <a:spcPct val="0"/>
-              </a:spcBef>
-              <a:spcAft>
-                <a:spcPct val="0"/>
-              </a:spcAft>
-              <a:defRPr sz="2400">
-                <a:solidFill>
-                  <a:schemeClr val="tx1"/>
-                </a:solidFill>
-                <a:latin typeface="Helvetica" charset="0"/>
-                <a:ea typeface="ＭＳ Ｐゴシック" charset="0"/>
-              </a:defRPr>
-            </a:lvl7pPr>
-            <a:lvl8pPr marL="3429000" indent="-228600" eaLnBrk="0" fontAlgn="base" hangingPunct="0">
-              <a:spcBef>
-                <a:spcPct val="0"/>
-              </a:spcBef>
-              <a:spcAft>
-                <a:spcPct val="0"/>
-              </a:spcAft>
-              <a:defRPr sz="2400">
-                <a:solidFill>
-                  <a:schemeClr val="tx1"/>
-                </a:solidFill>
-                <a:latin typeface="Helvetica" charset="0"/>
-                <a:ea typeface="ＭＳ Ｐゴシック" charset="0"/>
-              </a:defRPr>
-            </a:lvl8pPr>
-            <a:lvl9pPr marL="3886200" indent="-228600" eaLnBrk="0" fontAlgn="base" hangingPunct="0">
-              <a:spcBef>
-                <a:spcPct val="0"/>
-              </a:spcBef>
-              <a:spcAft>
-                <a:spcPct val="0"/>
-              </a:spcAft>
-              <a:defRPr sz="2400">
-                <a:solidFill>
-                  <a:schemeClr val="tx1"/>
-                </a:solidFill>
-                <a:latin typeface="Helvetica" charset="0"/>
-                <a:ea typeface="ＭＳ Ｐゴシック" charset="0"/>
-              </a:defRPr>
-            </a:lvl9pPr>
-          </a:lstStyle>
-          <a:p>
-            <a:fld id="{6101AC86-C8CA-1847-A97E-2A060189EE9C}" type="slidenum">
-              <a:rPr lang="en-US" sz="1200"/>
-              <a:pPr/>
-              <a:t>6</a:t>
-            </a:fld>
-            <a:endParaRPr lang="en-US" sz="1200"/>
-          </a:p>
-        </p:txBody>
-      </p:sp>
-      <p:sp>
-        <p:nvSpPr>
-          <p:cNvPr id="18434" name="Rectangle 2"/>
-          <p:cNvSpPr>
-            <a:spLocks noGrp="1" noRot="1" noChangeAspect="1" noChangeArrowheads="1" noTextEdit="1"/>
+          <p:cNvPr id="2" name="Slide Image Placeholder 1"/>
+          <p:cNvSpPr>
+            <a:spLocks noGrp="1" noRot="1" noChangeAspect="1"/>
           </p:cNvSpPr>
           <p:nvPr>
             <p:ph type="sldImg"/>
           </p:nvPr>
         </p:nvSpPr>
-        <p:spPr>
-          <a:ln/>
-        </p:spPr>
-      </p:sp>
-      <p:sp>
-        <p:nvSpPr>
-          <p:cNvPr id="18435" name="Rectangle 3"/>
-          <p:cNvSpPr>
-            <a:spLocks noGrp="1" noChangeArrowheads="1"/>
+        <p:spPr/>
+      </p:sp>
+      <p:sp>
+        <p:nvSpPr>
+          <p:cNvPr id="3" name="Notes Placeholder 2"/>
+          <p:cNvSpPr>
+            <a:spLocks noGrp="1"/>
           </p:cNvSpPr>
           <p:nvPr>
             <p:ph type="body" idx="1"/>
           </p:nvPr>
         </p:nvSpPr>
-        <p:spPr>
-          <a:noFill/>
-          <a:ln/>
-          <a:extLst>
-            <a:ext uri="{909E8E84-426E-40dd-AFC4-6F175D3DCCD1}">
-              <a14:hiddenFill xmlns:a14="http://schemas.microsoft.com/office/drawing/2010/main" xmlns="">
-                <a:solidFill>
-                  <a:srgbClr val="FFFFFF"/>
-                </a:solidFill>
-              </a14:hiddenFill>
-            </a:ext>
-            <a:ext uri="{91240B29-F687-4f45-9708-019B960494DF}">
-              <a14:hiddenLine xmlns:a14="http://schemas.microsoft.com/office/drawing/2010/main" xmlns="" w="9525">
-                <a:solidFill>
-                  <a:srgbClr val="000000"/>
-                </a:solidFill>
-                <a:miter lim="800000"/>
-                <a:headEnd/>
-                <a:tailEnd/>
-              </a14:hiddenLine>
-            </a:ext>
-            <a:ext uri="{FAA26D3D-D897-4be2-8F04-BA451C77F1D7}">
-              <ma14:placeholderFlag xmlns:ma14="http://schemas.microsoft.com/office/mac/drawingml/2011/main" xmlns="" val="1"/>
-            </a:ext>
-          </a:extLst>
-        </p:spPr>
+        <p:spPr/>
         <p:txBody>
           <a:bodyPr/>
           <a:lstStyle/>
           <a:p>
-            <a:pPr eaLnBrk="1" hangingPunct="1"/>
-            <a:endParaRPr lang="en-US">
-              <a:latin typeface="Times" charset="0"/>
-            </a:endParaRPr>
+            <a:endParaRPr lang="en-US"/>
+          </a:p>
+        </p:txBody>
+      </p:sp>
+      <p:sp>
+        <p:nvSpPr>
+          <p:cNvPr id="4" name="Slide Number Placeholder 3"/>
+          <p:cNvSpPr>
+            <a:spLocks noGrp="1"/>
+          </p:cNvSpPr>
+          <p:nvPr>
+            <p:ph type="sldNum" sz="quarter" idx="5"/>
+          </p:nvPr>
+        </p:nvSpPr>
+        <p:spPr/>
+        <p:txBody>
+          <a:bodyPr/>
+          <a:lstStyle/>
+          <a:p>
+            <a:fld id="{34649269-E026-4E44-9951-397123D7CFB5}" type="slidenum">
+              <a:rPr lang="en-US" smtClean="0"/>
+              <a:t>7</a:t>
+            </a:fld>
+            <a:endParaRPr lang="en-US"/>
           </a:p>
         </p:txBody>
       </p:sp>
     </p:spTree>
     <p:extLst>
       <p:ext uri="{BB962C8B-B14F-4D97-AF65-F5344CB8AC3E}">
-        <p14:creationId xmlns:p14="http://schemas.microsoft.com/office/powerpoint/2010/main" val="1694909980"/>
+        <p14:creationId xmlns:p14="http://schemas.microsoft.com/office/powerpoint/2010/main" val="51791727"/>
       </p:ext>
     </p:extLst>
   </p:cSld>
@@ -1961,7 +1898,7 @@
       </p:grpSpPr>
       <p:sp>
         <p:nvSpPr>
-          <p:cNvPr id="16385" name="Rectangle 7"/>
+          <p:cNvPr id="18433" name="Rectangle 7"/>
           <p:cNvSpPr>
             <a:spLocks noGrp="1" noChangeArrowheads="1"/>
           </p:cNvSpPr>
@@ -2103,10 +2040,10 @@
             </a:lvl9pPr>
           </a:lstStyle>
           <a:p>
-            <a:fld id="{2C1D408F-3F93-4F43-8A63-5C97F2D4AA7C}" type="slidenum">
+            <a:fld id="{6101AC86-C8CA-1847-A97E-2A060189EE9C}" type="slidenum">
               <a:rPr lang="en-US" sz="1200"/>
               <a:pPr/>
-              <a:t>7</a:t>
+              <a:t>8</a:t>
             </a:fld>
             <a:endParaRPr lang="en-US" sz="1200"/>
           </a:p>
@@ -2114,7 +2051,7 @@
       </p:sp>
       <p:sp>
         <p:nvSpPr>
-          <p:cNvPr id="16386" name="Rectangle 2"/>
+          <p:cNvPr id="18434" name="Rectangle 2"/>
           <p:cNvSpPr>
             <a:spLocks noGrp="1" noRot="1" noChangeAspect="1" noChangeArrowheads="1" noTextEdit="1"/>
           </p:cNvSpPr>
@@ -2128,7 +2065,7 @@
       </p:sp>
       <p:sp>
         <p:nvSpPr>
-          <p:cNvPr id="16387" name="Rectangle 3"/>
+          <p:cNvPr id="18435" name="Rectangle 3"/>
           <p:cNvSpPr>
             <a:spLocks noGrp="1" noChangeArrowheads="1"/>
           </p:cNvSpPr>
@@ -2176,7 +2113,7 @@
     </p:spTree>
     <p:extLst>
       <p:ext uri="{BB962C8B-B14F-4D97-AF65-F5344CB8AC3E}">
-        <p14:creationId xmlns:p14="http://schemas.microsoft.com/office/powerpoint/2010/main" val="881785046"/>
+        <p14:creationId xmlns:p14="http://schemas.microsoft.com/office/powerpoint/2010/main" val="1694909980"/>
       </p:ext>
     </p:extLst>
   </p:cSld>
@@ -2205,73 +2142,222 @@
       </p:grpSpPr>
       <p:sp>
         <p:nvSpPr>
-          <p:cNvPr id="2" name="Slide Image Placeholder 1"/>
-          <p:cNvSpPr>
-            <a:spLocks noGrp="1" noRot="1" noChangeAspect="1"/>
+          <p:cNvPr id="16385" name="Rectangle 7"/>
+          <p:cNvSpPr>
+            <a:spLocks noGrp="1" noChangeArrowheads="1"/>
+          </p:cNvSpPr>
+          <p:nvPr>
+            <p:ph type="sldNum" sz="quarter" idx="5"/>
+          </p:nvPr>
+        </p:nvSpPr>
+        <p:spPr>
+          <a:noFill/>
+          <a:ln/>
+          <a:extLst>
+            <a:ext uri="{909E8E84-426E-40dd-AFC4-6F175D3DCCD1}">
+              <a14:hiddenFill xmlns:a14="http://schemas.microsoft.com/office/drawing/2010/main" xmlns="">
+                <a:solidFill>
+                  <a:srgbClr val="FFFFFF"/>
+                </a:solidFill>
+              </a14:hiddenFill>
+            </a:ext>
+            <a:ext uri="{91240B29-F687-4f45-9708-019B960494DF}">
+              <a14:hiddenLine xmlns:a14="http://schemas.microsoft.com/office/drawing/2010/main" xmlns="" w="9525">
+                <a:solidFill>
+                  <a:srgbClr val="000000"/>
+                </a:solidFill>
+                <a:miter lim="800000"/>
+                <a:headEnd/>
+                <a:tailEnd/>
+              </a14:hiddenLine>
+            </a:ext>
+          </a:extLst>
+        </p:spPr>
+        <p:txBody>
+          <a:bodyPr/>
+          <a:lstStyle>
+            <a:lvl1pPr>
+              <a:defRPr sz="2400">
+                <a:solidFill>
+                  <a:schemeClr val="tx1"/>
+                </a:solidFill>
+                <a:latin typeface="Helvetica" charset="0"/>
+                <a:ea typeface="ＭＳ Ｐゴシック" charset="0"/>
+                <a:cs typeface="ＭＳ Ｐゴシック" charset="0"/>
+              </a:defRPr>
+            </a:lvl1pPr>
+            <a:lvl2pPr marL="742950" indent="-285750">
+              <a:defRPr sz="2400">
+                <a:solidFill>
+                  <a:schemeClr val="tx1"/>
+                </a:solidFill>
+                <a:latin typeface="Helvetica" charset="0"/>
+                <a:ea typeface="ＭＳ Ｐゴシック" charset="0"/>
+              </a:defRPr>
+            </a:lvl2pPr>
+            <a:lvl3pPr marL="1143000" indent="-228600">
+              <a:defRPr sz="2400">
+                <a:solidFill>
+                  <a:schemeClr val="tx1"/>
+                </a:solidFill>
+                <a:latin typeface="Helvetica" charset="0"/>
+                <a:ea typeface="ＭＳ Ｐゴシック" charset="0"/>
+              </a:defRPr>
+            </a:lvl3pPr>
+            <a:lvl4pPr marL="1600200" indent="-228600">
+              <a:defRPr sz="2400">
+                <a:solidFill>
+                  <a:schemeClr val="tx1"/>
+                </a:solidFill>
+                <a:latin typeface="Helvetica" charset="0"/>
+                <a:ea typeface="ＭＳ Ｐゴシック" charset="0"/>
+              </a:defRPr>
+            </a:lvl4pPr>
+            <a:lvl5pPr marL="2057400" indent="-228600">
+              <a:defRPr sz="2400">
+                <a:solidFill>
+                  <a:schemeClr val="tx1"/>
+                </a:solidFill>
+                <a:latin typeface="Helvetica" charset="0"/>
+                <a:ea typeface="ＭＳ Ｐゴシック" charset="0"/>
+              </a:defRPr>
+            </a:lvl5pPr>
+            <a:lvl6pPr marL="2514600" indent="-228600" eaLnBrk="0" fontAlgn="base" hangingPunct="0">
+              <a:spcBef>
+                <a:spcPct val="0"/>
+              </a:spcBef>
+              <a:spcAft>
+                <a:spcPct val="0"/>
+              </a:spcAft>
+              <a:defRPr sz="2400">
+                <a:solidFill>
+                  <a:schemeClr val="tx1"/>
+                </a:solidFill>
+                <a:latin typeface="Helvetica" charset="0"/>
+                <a:ea typeface="ＭＳ Ｐゴシック" charset="0"/>
+              </a:defRPr>
+            </a:lvl6pPr>
+            <a:lvl7pPr marL="2971800" indent="-228600" eaLnBrk="0" fontAlgn="base" hangingPunct="0">
+              <a:spcBef>
+                <a:spcPct val="0"/>
+              </a:spcBef>
+              <a:spcAft>
+                <a:spcPct val="0"/>
+              </a:spcAft>
+              <a:defRPr sz="2400">
+                <a:solidFill>
+                  <a:schemeClr val="tx1"/>
+                </a:solidFill>
+                <a:latin typeface="Helvetica" charset="0"/>
+                <a:ea typeface="ＭＳ Ｐゴシック" charset="0"/>
+              </a:defRPr>
+            </a:lvl7pPr>
+            <a:lvl8pPr marL="3429000" indent="-228600" eaLnBrk="0" fontAlgn="base" hangingPunct="0">
+              <a:spcBef>
+                <a:spcPct val="0"/>
+              </a:spcBef>
+              <a:spcAft>
+                <a:spcPct val="0"/>
+              </a:spcAft>
+              <a:defRPr sz="2400">
+                <a:solidFill>
+                  <a:schemeClr val="tx1"/>
+                </a:solidFill>
+                <a:latin typeface="Helvetica" charset="0"/>
+                <a:ea typeface="ＭＳ Ｐゴシック" charset="0"/>
+              </a:defRPr>
+            </a:lvl8pPr>
+            <a:lvl9pPr marL="3886200" indent="-228600" eaLnBrk="0" fontAlgn="base" hangingPunct="0">
+              <a:spcBef>
+                <a:spcPct val="0"/>
+              </a:spcBef>
+              <a:spcAft>
+                <a:spcPct val="0"/>
+              </a:spcAft>
+              <a:defRPr sz="2400">
+                <a:solidFill>
+                  <a:schemeClr val="tx1"/>
+                </a:solidFill>
+                <a:latin typeface="Helvetica" charset="0"/>
+                <a:ea typeface="ＭＳ Ｐゴシック" charset="0"/>
+              </a:defRPr>
+            </a:lvl9pPr>
+          </a:lstStyle>
+          <a:p>
+            <a:fld id="{2C1D408F-3F93-4F43-8A63-5C97F2D4AA7C}" type="slidenum">
+              <a:rPr lang="en-US" sz="1200"/>
+              <a:pPr/>
+              <a:t>9</a:t>
+            </a:fld>
+            <a:endParaRPr lang="en-US" sz="1200"/>
+          </a:p>
+        </p:txBody>
+      </p:sp>
+      <p:sp>
+        <p:nvSpPr>
+          <p:cNvPr id="16386" name="Rectangle 2"/>
+          <p:cNvSpPr>
+            <a:spLocks noGrp="1" noRot="1" noChangeAspect="1" noChangeArrowheads="1" noTextEdit="1"/>
           </p:cNvSpPr>
           <p:nvPr>
             <p:ph type="sldImg"/>
           </p:nvPr>
         </p:nvSpPr>
-        <p:spPr/>
-      </p:sp>
-      <p:sp>
-        <p:nvSpPr>
-          <p:cNvPr id="3" name="Notes Placeholder 2"/>
-          <p:cNvSpPr>
-            <a:spLocks noGrp="1"/>
+        <p:spPr>
+          <a:ln/>
+        </p:spPr>
+      </p:sp>
+      <p:sp>
+        <p:nvSpPr>
+          <p:cNvPr id="16387" name="Rectangle 3"/>
+          <p:cNvSpPr>
+            <a:spLocks noGrp="1" noChangeArrowheads="1"/>
           </p:cNvSpPr>
           <p:nvPr>
             <p:ph type="body" idx="1"/>
           </p:nvPr>
         </p:nvSpPr>
-        <p:spPr/>
+        <p:spPr>
+          <a:noFill/>
+          <a:ln/>
+          <a:extLst>
+            <a:ext uri="{909E8E84-426E-40dd-AFC4-6F175D3DCCD1}">
+              <a14:hiddenFill xmlns:a14="http://schemas.microsoft.com/office/drawing/2010/main" xmlns="">
+                <a:solidFill>
+                  <a:srgbClr val="FFFFFF"/>
+                </a:solidFill>
+              </a14:hiddenFill>
+            </a:ext>
+            <a:ext uri="{91240B29-F687-4f45-9708-019B960494DF}">
+              <a14:hiddenLine xmlns:a14="http://schemas.microsoft.com/office/drawing/2010/main" xmlns="" w="9525">
+                <a:solidFill>
+                  <a:srgbClr val="000000"/>
+                </a:solidFill>
+                <a:miter lim="800000"/>
+                <a:headEnd/>
+                <a:tailEnd/>
+              </a14:hiddenLine>
+            </a:ext>
+            <a:ext uri="{FAA26D3D-D897-4be2-8F04-BA451C77F1D7}">
+              <ma14:placeholderFlag xmlns:ma14="http://schemas.microsoft.com/office/mac/drawingml/2011/main" xmlns="" val="1"/>
+            </a:ext>
+          </a:extLst>
+        </p:spPr>
         <p:txBody>
           <a:bodyPr/>
           <a:lstStyle/>
           <a:p>
-            <a:r>
-              <a:rPr lang="en-US"/>
-              <a:t>Do not modify the notes in this section to avoid tampering with the Poll Everywhere activity.
-More info at polleverywhere.com/support
-Have you watched today's assigned video lectures on the course website?</a:t>
-            </a:r>
-          </a:p>
-          <a:p>
-            <a:r>
-              <a:rPr lang="en-US"/>
-              <a:t>https://www.polleverywhere.com/multiple_choice_polls/C5Mf4wqoOzxgPhTX3YZyj?state=opened&amp;flow=Default&amp;onscreen=persist</a:t>
-            </a:r>
-          </a:p>
-        </p:txBody>
-      </p:sp>
-      <p:sp>
-        <p:nvSpPr>
-          <p:cNvPr id="4" name="Slide Number Placeholder 3"/>
-          <p:cNvSpPr>
-            <a:spLocks noGrp="1"/>
-          </p:cNvSpPr>
-          <p:nvPr>
-            <p:ph type="sldNum" sz="quarter" idx="5"/>
-          </p:nvPr>
-        </p:nvSpPr>
-        <p:spPr/>
-        <p:txBody>
-          <a:bodyPr/>
-          <a:lstStyle/>
-          <a:p>
-            <a:fld id="{34649269-E026-4E44-9951-397123D7CFB5}" type="slidenum">
-              <a:rPr lang="en-US" smtClean="0"/>
-              <a:t>8</a:t>
-            </a:fld>
-            <a:endParaRPr lang="en-US"/>
+            <a:pPr eaLnBrk="1" hangingPunct="1"/>
+            <a:endParaRPr lang="en-US">
+              <a:latin typeface="Times" charset="0"/>
+            </a:endParaRPr>
           </a:p>
         </p:txBody>
       </p:sp>
     </p:spTree>
     <p:extLst>
       <p:ext uri="{BB962C8B-B14F-4D97-AF65-F5344CB8AC3E}">
-        <p14:creationId xmlns:p14="http://schemas.microsoft.com/office/powerpoint/2010/main" val="3672834496"/>
+        <p14:creationId xmlns:p14="http://schemas.microsoft.com/office/powerpoint/2010/main" val="881785046"/>
       </p:ext>
     </p:extLst>
   </p:cSld>
@@ -2329,13 +2415,13 @@
               <a:rPr lang="en-US"/>
               <a:t>Do not modify the notes in this section to avoid tampering with the Poll Everywhere activity.
 More info at polleverywhere.com/support
-What comes to mind when I say the word "parasite"?</a:t>
+Have you watched today's assigned video lectures on the course website?</a:t>
             </a:r>
           </a:p>
           <a:p>
             <a:r>
               <a:rPr lang="en-US"/>
-              <a:t>https://www.polleverywhere.com/free_text_polls/n8mRsosII42qUWMLxN3aH</a:t>
+              <a:t>https://www.polleverywhere.com/multiple_choice_polls/C5Mf4wqoOzxgPhTX3YZyj?state=opened&amp;flow=Default&amp;onscreen=persist</a:t>
             </a:r>
           </a:p>
         </p:txBody>
@@ -2357,7 +2443,7 @@
           <a:p>
             <a:fld id="{34649269-E026-4E44-9951-397123D7CFB5}" type="slidenum">
               <a:rPr lang="en-US" smtClean="0"/>
-              <a:t>9</a:t>
+              <a:t>10</a:t>
             </a:fld>
             <a:endParaRPr lang="en-US"/>
           </a:p>
@@ -2366,7 +2452,7 @@
     </p:spTree>
     <p:extLst>
       <p:ext uri="{BB962C8B-B14F-4D97-AF65-F5344CB8AC3E}">
-        <p14:creationId xmlns:p14="http://schemas.microsoft.com/office/powerpoint/2010/main" val="824592114"/>
+        <p14:creationId xmlns:p14="http://schemas.microsoft.com/office/powerpoint/2010/main" val="3672834496"/>
       </p:ext>
     </p:extLst>
   </p:cSld>
@@ -5922,6 +6008,226 @@
 </file>
 
 <file path=ppt/slides/slide10.xml><?xml version="1.0" encoding="utf-8"?>
+<p:sld xmlns:a="http://schemas.openxmlformats.org/drawingml/2006/main" xmlns:r="http://schemas.openxmlformats.org/officeDocument/2006/relationships" xmlns:p="http://schemas.openxmlformats.org/presentationml/2006/main">
+  <p:cSld>
+    <p:spTree>
+      <p:nvGrpSpPr>
+        <p:cNvPr id="1" name=""/>
+        <p:cNvGrpSpPr/>
+        <p:nvPr/>
+      </p:nvGrpSpPr>
+      <p:grpSpPr>
+        <a:xfrm>
+          <a:off x="0" y="0"/>
+          <a:ext cx="0" cy="0"/>
+          <a:chOff x="0" y="0"/>
+          <a:chExt cx="0" cy="0"/>
+        </a:xfrm>
+      </p:grpSpPr>
+      <p:sp>
+        <p:nvSpPr>
+          <p:cNvPr id="2" name="Title 1">
+            <a:extLst>
+              <a:ext uri="{FF2B5EF4-FFF2-40B4-BE49-F238E27FC236}">
+                <a16:creationId xmlns:a16="http://schemas.microsoft.com/office/drawing/2014/main" id="{D46328C8-E57A-4548-E685-7C8547826A9D}"/>
+              </a:ext>
+            </a:extLst>
+          </p:cNvPr>
+          <p:cNvSpPr>
+            <a:spLocks noGrp="1"/>
+          </p:cNvSpPr>
+          <p:nvPr>
+            <p:ph type="ctrTitle"/>
+          </p:nvPr>
+        </p:nvSpPr>
+        <p:spPr/>
+        <p:txBody>
+          <a:bodyPr/>
+          <a:lstStyle/>
+          <a:p>
+            <a:endParaRPr lang="en-US"/>
+          </a:p>
+        </p:txBody>
+      </p:sp>
+      <p:sp>
+        <p:nvSpPr>
+          <p:cNvPr id="3" name="Subtitle 2">
+            <a:extLst>
+              <a:ext uri="{FF2B5EF4-FFF2-40B4-BE49-F238E27FC236}">
+                <a16:creationId xmlns:a16="http://schemas.microsoft.com/office/drawing/2014/main" id="{45A1BAE9-70C8-C269-8AD4-7B4B3D134C13}"/>
+              </a:ext>
+            </a:extLst>
+          </p:cNvPr>
+          <p:cNvSpPr>
+            <a:spLocks noGrp="1"/>
+          </p:cNvSpPr>
+          <p:nvPr>
+            <p:ph type="subTitle" idx="1"/>
+          </p:nvPr>
+        </p:nvSpPr>
+        <p:spPr/>
+        <p:txBody>
+          <a:bodyPr/>
+          <a:lstStyle/>
+          <a:p>
+            <a:endParaRPr lang="en-US"/>
+          </a:p>
+        </p:txBody>
+      </p:sp>
+      <p:pic>
+        <p:nvPicPr>
+          <p:cNvPr id="5" name="slide.url=https://www.polleverywhere.com/multiple_choice_polls/C5Mf4wqoOzxgPhTX3YZyj?state=opened&amp;flow=Default&amp;onscreen=persist">
+            <a:extLst>
+              <a:ext uri="{FF2B5EF4-FFF2-40B4-BE49-F238E27FC236}">
+                <a16:creationId xmlns:a16="http://schemas.microsoft.com/office/drawing/2014/main" id="{C1680DC4-93E8-614B-054E-9D7DCD24A5C6}"/>
+              </a:ext>
+            </a:extLst>
+          </p:cNvPr>
+          <p:cNvPicPr>
+            <a:picLocks/>
+          </p:cNvPicPr>
+          <p:nvPr/>
+        </p:nvPicPr>
+        <p:blipFill>
+          <a:blip r:embed="rId3"/>
+          <a:stretch>
+            <a:fillRect/>
+          </a:stretch>
+        </p:blipFill>
+        <p:spPr>
+          <a:xfrm>
+            <a:off x="63500" y="63500"/>
+            <a:ext cx="12065000" cy="6731000"/>
+          </a:xfrm>
+          <a:prstGeom prst="rect">
+            <a:avLst/>
+          </a:prstGeom>
+        </p:spPr>
+      </p:pic>
+    </p:spTree>
+    <p:extLst>
+      <p:ext uri="{BB962C8B-B14F-4D97-AF65-F5344CB8AC3E}">
+        <p14:creationId xmlns:p14="http://schemas.microsoft.com/office/powerpoint/2010/main" val="1511497431"/>
+      </p:ext>
+    </p:extLst>
+  </p:cSld>
+  <p:clrMapOvr>
+    <a:masterClrMapping/>
+  </p:clrMapOvr>
+</p:sld>
+</file>
+
+<file path=ppt/slides/slide11.xml><?xml version="1.0" encoding="utf-8"?>
+<p:sld xmlns:a="http://schemas.openxmlformats.org/drawingml/2006/main" xmlns:r="http://schemas.openxmlformats.org/officeDocument/2006/relationships" xmlns:p="http://schemas.openxmlformats.org/presentationml/2006/main">
+  <p:cSld>
+    <p:spTree>
+      <p:nvGrpSpPr>
+        <p:cNvPr id="1" name=""/>
+        <p:cNvGrpSpPr/>
+        <p:nvPr/>
+      </p:nvGrpSpPr>
+      <p:grpSpPr>
+        <a:xfrm>
+          <a:off x="0" y="0"/>
+          <a:ext cx="0" cy="0"/>
+          <a:chOff x="0" y="0"/>
+          <a:chExt cx="0" cy="0"/>
+        </a:xfrm>
+      </p:grpSpPr>
+      <p:sp>
+        <p:nvSpPr>
+          <p:cNvPr id="2" name="Title 1">
+            <a:extLst>
+              <a:ext uri="{FF2B5EF4-FFF2-40B4-BE49-F238E27FC236}">
+                <a16:creationId xmlns:a16="http://schemas.microsoft.com/office/drawing/2014/main" id="{817A132B-DB9E-494A-B78D-F786D5645CC0}"/>
+              </a:ext>
+            </a:extLst>
+          </p:cNvPr>
+          <p:cNvSpPr>
+            <a:spLocks noGrp="1"/>
+          </p:cNvSpPr>
+          <p:nvPr>
+            <p:ph type="ctrTitle"/>
+          </p:nvPr>
+        </p:nvSpPr>
+        <p:spPr/>
+        <p:txBody>
+          <a:bodyPr/>
+          <a:lstStyle/>
+          <a:p>
+            <a:endParaRPr lang="en-US"/>
+          </a:p>
+        </p:txBody>
+      </p:sp>
+      <p:sp>
+        <p:nvSpPr>
+          <p:cNvPr id="3" name="Subtitle 2">
+            <a:extLst>
+              <a:ext uri="{FF2B5EF4-FFF2-40B4-BE49-F238E27FC236}">
+                <a16:creationId xmlns:a16="http://schemas.microsoft.com/office/drawing/2014/main" id="{181C6761-0AFB-4A40-910C-04C7202DF597}"/>
+              </a:ext>
+            </a:extLst>
+          </p:cNvPr>
+          <p:cNvSpPr>
+            <a:spLocks noGrp="1"/>
+          </p:cNvSpPr>
+          <p:nvPr>
+            <p:ph type="subTitle" idx="1"/>
+          </p:nvPr>
+        </p:nvSpPr>
+        <p:spPr/>
+        <p:txBody>
+          <a:bodyPr/>
+          <a:lstStyle/>
+          <a:p>
+            <a:endParaRPr lang="en-US"/>
+          </a:p>
+        </p:txBody>
+      </p:sp>
+      <p:pic>
+        <p:nvPicPr>
+          <p:cNvPr id="5" name="slide.url=https://www.polleverywhere.com/free_text_polls/n8mRsosII42qUWMLxN3aH">
+            <a:extLst>
+              <a:ext uri="{FF2B5EF4-FFF2-40B4-BE49-F238E27FC236}">
+                <a16:creationId xmlns:a16="http://schemas.microsoft.com/office/drawing/2014/main" id="{72EB74FD-A9DE-7F46-9103-F417496D3DB3}"/>
+              </a:ext>
+            </a:extLst>
+          </p:cNvPr>
+          <p:cNvPicPr>
+            <a:picLocks/>
+          </p:cNvPicPr>
+          <p:nvPr/>
+        </p:nvPicPr>
+        <p:blipFill>
+          <a:blip r:embed="rId3"/>
+          <a:stretch>
+            <a:fillRect/>
+          </a:stretch>
+        </p:blipFill>
+        <p:spPr>
+          <a:xfrm>
+            <a:off x="63500" y="63500"/>
+            <a:ext cx="12065000" cy="6731000"/>
+          </a:xfrm>
+          <a:prstGeom prst="rect">
+            <a:avLst/>
+          </a:prstGeom>
+        </p:spPr>
+      </p:pic>
+    </p:spTree>
+    <p:extLst>
+      <p:ext uri="{BB962C8B-B14F-4D97-AF65-F5344CB8AC3E}">
+        <p14:creationId xmlns:p14="http://schemas.microsoft.com/office/powerpoint/2010/main" val="4242319848"/>
+      </p:ext>
+    </p:extLst>
+  </p:cSld>
+  <p:clrMapOvr>
+    <a:masterClrMapping/>
+  </p:clrMapOvr>
+</p:sld>
+</file>
+
+<file path=ppt/slides/slide12.xml><?xml version="1.0" encoding="utf-8"?>
 <p:sld xmlns:a="http://schemas.openxmlformats.org/drawingml/2006/main" xmlns:r="http://schemas.openxmlformats.org/officeDocument/2006/relationships" xmlns:p="http://schemas.openxmlformats.org/presentationml/2006/main">
   <p:cSld>
     <p:spTree>
@@ -6786,7 +7092,7 @@
 </p:sld>
 </file>
 
-<file path=ppt/slides/slide11.xml><?xml version="1.0" encoding="utf-8"?>
+<file path=ppt/slides/slide13.xml><?xml version="1.0" encoding="utf-8"?>
 <p:sld xmlns:a="http://schemas.openxmlformats.org/drawingml/2006/main" xmlns:r="http://schemas.openxmlformats.org/officeDocument/2006/relationships" xmlns:p="http://schemas.openxmlformats.org/presentationml/2006/main">
   <p:cSld>
     <p:bg>
@@ -6888,7 +7194,7 @@
 </p:sld>
 </file>
 
-<file path=ppt/slides/slide12.xml><?xml version="1.0" encoding="utf-8"?>
+<file path=ppt/slides/slide14.xml><?xml version="1.0" encoding="utf-8"?>
 <p:sld xmlns:a="http://schemas.openxmlformats.org/drawingml/2006/main" xmlns:r="http://schemas.openxmlformats.org/officeDocument/2006/relationships" xmlns:p="http://schemas.openxmlformats.org/presentationml/2006/main">
   <p:cSld>
     <p:bg>
@@ -7456,13 +7762,7 @@
     </p:bg>
     <p:spTree>
       <p:nvGrpSpPr>
-        <p:cNvPr id="1" name="">
-          <a:extLst>
-            <a:ext uri="{FF2B5EF4-FFF2-40B4-BE49-F238E27FC236}">
-              <a16:creationId xmlns:a16="http://schemas.microsoft.com/office/drawing/2014/main" id="{ED59F089-B822-D305-22B6-38366F04134D}"/>
-            </a:ext>
-          </a:extLst>
-        </p:cNvPr>
+        <p:cNvPr id="1" name=""/>
         <p:cNvGrpSpPr/>
         <p:nvPr/>
       </p:nvGrpSpPr>
@@ -7474,88 +7774,193 @@
           <a:chExt cx="0" cy="0"/>
         </a:xfrm>
       </p:grpSpPr>
-      <p:sp>
-        <p:nvSpPr>
-          <p:cNvPr id="2" name="Rectangle 2">
+      <p:pic>
+        <p:nvPicPr>
+          <p:cNvPr id="4" name="Online Media 3" descr="Hairworms collected near Lake Okukiso, Japan">
+            <a:hlinkClick r:id="" action="ppaction://media"/>
             <a:extLst>
               <a:ext uri="{FF2B5EF4-FFF2-40B4-BE49-F238E27FC236}">
-                <a16:creationId xmlns:a16="http://schemas.microsoft.com/office/drawing/2014/main" id="{9CD3DD26-8185-4AE6-400C-00A883864BBA}"/>
+                <a16:creationId xmlns:a16="http://schemas.microsoft.com/office/drawing/2014/main" id="{740F5142-67C0-A518-2BFD-4F74A86CE0FE}"/>
               </a:ext>
             </a:extLst>
           </p:cNvPr>
-          <p:cNvSpPr>
-            <a:spLocks noChangeArrowheads="1"/>
-          </p:cNvSpPr>
-          <p:nvPr/>
-        </p:nvSpPr>
-        <p:spPr bwMode="auto">
+          <p:cNvPicPr>
+            <a:picLocks noRot="1" noChangeAspect="1"/>
+          </p:cNvPicPr>
+          <p:nvPr>
+            <a:videoFile r:link="rId1"/>
+          </p:nvPr>
+        </p:nvPicPr>
+        <p:blipFill>
+          <a:blip r:embed="rId4"/>
+          <a:stretch>
+            <a:fillRect/>
+          </a:stretch>
+        </p:blipFill>
+        <p:spPr>
           <a:xfrm>
-            <a:off x="1188948" y="2686735"/>
-            <a:ext cx="9677400" cy="1323439"/>
+            <a:off x="4101192" y="39175"/>
+            <a:ext cx="3852636" cy="6818825"/>
           </a:xfrm>
           <a:prstGeom prst="rect">
             <a:avLst/>
           </a:prstGeom>
-          <a:noFill/>
-          <a:ln w="9525">
-            <a:noFill/>
-            <a:miter lim="800000"/>
-            <a:headEnd/>
-            <a:tailEnd/>
-          </a:ln>
-          <a:effectLst/>
         </p:spPr>
-        <p:txBody>
-          <a:bodyPr wrap="square">
-            <a:spAutoFit/>
-          </a:bodyPr>
-          <a:lstStyle/>
-          <a:p>
-            <a:pPr algn="ctr">
-              <a:defRPr/>
-            </a:pPr>
-            <a:r>
-              <a:rPr lang="en-US" sz="8000" dirty="0">
-                <a:solidFill>
-                  <a:srgbClr val="FFFFFF"/>
-                </a:solidFill>
-                <a:effectLst>
-                  <a:outerShdw blurRad="38100" dist="38100" dir="2700000" algn="tl">
-                    <a:srgbClr val="000000"/>
-                  </a:outerShdw>
-                </a:effectLst>
-                <a:latin typeface="Avenir"/>
-                <a:cs typeface="Avenir"/>
-              </a:rPr>
-              <a:t>Who are you?</a:t>
-            </a:r>
-          </a:p>
-        </p:txBody>
-      </p:sp>
+      </p:pic>
     </p:spTree>
     <p:extLst>
       <p:ext uri="{BB962C8B-B14F-4D97-AF65-F5344CB8AC3E}">
-        <p14:creationId xmlns:p14="http://schemas.microsoft.com/office/powerpoint/2010/main" val="1423272240"/>
+        <p14:creationId xmlns:p14="http://schemas.microsoft.com/office/powerpoint/2010/main" val="1867094172"/>
       </p:ext>
     </p:extLst>
   </p:cSld>
   <p:clrMapOvr>
     <a:masterClrMapping/>
   </p:clrMapOvr>
+  <p:timing>
+    <p:tnLst>
+      <p:par>
+        <p:cTn id="1" dur="indefinite" restart="never" nodeType="tmRoot">
+          <p:childTnLst>
+            <p:seq concurrent="1" nextAc="seek">
+              <p:cTn id="2" dur="indefinite" nodeType="mainSeq">
+                <p:childTnLst>
+                  <p:par>
+                    <p:cTn id="3" fill="hold">
+                      <p:stCondLst>
+                        <p:cond delay="indefinite"/>
+                        <p:cond evt="onBegin" delay="0">
+                          <p:tn val="2"/>
+                        </p:cond>
+                      </p:stCondLst>
+                      <p:childTnLst>
+                        <p:par>
+                          <p:cTn id="4" fill="hold">
+                            <p:stCondLst>
+                              <p:cond delay="0"/>
+                            </p:stCondLst>
+                            <p:childTnLst>
+                              <p:par>
+                                <p:cTn id="5" presetID="1" presetClass="mediacall" presetSubtype="0" fill="hold" nodeType="afterEffect">
+                                  <p:stCondLst>
+                                    <p:cond delay="0"/>
+                                  </p:stCondLst>
+                                  <p:childTnLst>
+                                    <p:cmd type="call" cmd="playFrom(0.0)">
+                                      <p:cBhvr>
+                                        <p:cTn id="6" dur="1" fill="hold"/>
+                                        <p:tgtEl>
+                                          <p:spTgt spid="4"/>
+                                        </p:tgtEl>
+                                      </p:cBhvr>
+                                    </p:cmd>
+                                  </p:childTnLst>
+                                </p:cTn>
+                              </p:par>
+                            </p:childTnLst>
+                          </p:cTn>
+                        </p:par>
+                      </p:childTnLst>
+                    </p:cTn>
+                  </p:par>
+                </p:childTnLst>
+              </p:cTn>
+              <p:prevCondLst>
+                <p:cond evt="onPrev" delay="0">
+                  <p:tgtEl>
+                    <p:sldTgt/>
+                  </p:tgtEl>
+                </p:cond>
+              </p:prevCondLst>
+              <p:nextCondLst>
+                <p:cond evt="onNext" delay="0">
+                  <p:tgtEl>
+                    <p:sldTgt/>
+                  </p:tgtEl>
+                </p:cond>
+              </p:nextCondLst>
+            </p:seq>
+            <p:video>
+              <p:cMediaNode vol="80000">
+                <p:cTn id="7" fill="hold" display="0">
+                  <p:stCondLst>
+                    <p:cond delay="indefinite"/>
+                  </p:stCondLst>
+                </p:cTn>
+                <p:tgtEl>
+                  <p:spTgt spid="4"/>
+                </p:tgtEl>
+              </p:cMediaNode>
+            </p:video>
+            <p:seq concurrent="1" nextAc="seek">
+              <p:cTn id="8" restart="whenNotActive" fill="hold" evtFilter="cancelBubble" nodeType="interactiveSeq">
+                <p:stCondLst>
+                  <p:cond evt="onClick" delay="0">
+                    <p:tgtEl>
+                      <p:spTgt spid="4"/>
+                    </p:tgtEl>
+                  </p:cond>
+                </p:stCondLst>
+                <p:endSync evt="end" delay="0">
+                  <p:rtn val="all"/>
+                </p:endSync>
+                <p:childTnLst>
+                  <p:par>
+                    <p:cTn id="9" fill="hold">
+                      <p:stCondLst>
+                        <p:cond delay="0"/>
+                      </p:stCondLst>
+                      <p:childTnLst>
+                        <p:par>
+                          <p:cTn id="10" fill="hold">
+                            <p:stCondLst>
+                              <p:cond delay="0"/>
+                            </p:stCondLst>
+                            <p:childTnLst>
+                              <p:par>
+                                <p:cTn id="11" presetID="2" presetClass="mediacall" presetSubtype="0" fill="hold" nodeType="clickEffect">
+                                  <p:stCondLst>
+                                    <p:cond delay="0"/>
+                                  </p:stCondLst>
+                                  <p:childTnLst>
+                                    <p:cmd type="call" cmd="togglePause">
+                                      <p:cBhvr>
+                                        <p:cTn id="12" dur="1" fill="hold"/>
+                                        <p:tgtEl>
+                                          <p:spTgt spid="4"/>
+                                        </p:tgtEl>
+                                      </p:cBhvr>
+                                    </p:cmd>
+                                  </p:childTnLst>
+                                </p:cTn>
+                              </p:par>
+                            </p:childTnLst>
+                          </p:cTn>
+                        </p:par>
+                      </p:childTnLst>
+                    </p:cTn>
+                  </p:par>
+                </p:childTnLst>
+              </p:cTn>
+              <p:nextCondLst>
+                <p:cond evt="onClick" delay="0">
+                  <p:tgtEl>
+                    <p:spTgt spid="4"/>
+                  </p:tgtEl>
+                </p:cond>
+              </p:nextCondLst>
+            </p:seq>
+          </p:childTnLst>
+        </p:cTn>
+      </p:par>
+    </p:tnLst>
+  </p:timing>
 </p:sld>
 </file>
 
 <file path=ppt/slides/slide4.xml><?xml version="1.0" encoding="utf-8"?>
 <p:sld xmlns:a="http://schemas.openxmlformats.org/drawingml/2006/main" xmlns:r="http://schemas.openxmlformats.org/officeDocument/2006/relationships" xmlns:p="http://schemas.openxmlformats.org/presentationml/2006/main">
   <p:cSld>
-    <p:bg>
-      <p:bgPr>
-        <a:solidFill>
-          <a:schemeClr val="tx1"/>
-        </a:solidFill>
-        <a:effectLst/>
-      </p:bgPr>
-    </p:bg>
     <p:spTree>
       <p:nvGrpSpPr>
         <p:cNvPr id="1" name=""/>
@@ -7570,135 +7975,40 @@
           <a:chExt cx="0" cy="0"/>
         </a:xfrm>
       </p:grpSpPr>
-      <p:sp>
-        <p:nvSpPr>
-          <p:cNvPr id="2" name="Rectangle 2">
+      <p:pic>
+        <p:nvPicPr>
+          <p:cNvPr id="2" name="Picture 1">
             <a:extLst>
               <a:ext uri="{FF2B5EF4-FFF2-40B4-BE49-F238E27FC236}">
-                <a16:creationId xmlns:a16="http://schemas.microsoft.com/office/drawing/2014/main" id="{B524D076-306C-BB7A-FF7C-13EB668776DF}"/>
+                <a16:creationId xmlns:a16="http://schemas.microsoft.com/office/drawing/2014/main" id="{AA56887B-B52C-DF06-498E-83852EC4E9BB}"/>
               </a:ext>
             </a:extLst>
           </p:cNvPr>
-          <p:cNvSpPr>
-            <a:spLocks noChangeArrowheads="1"/>
-          </p:cNvSpPr>
+          <p:cNvPicPr>
+            <a:picLocks noChangeAspect="1"/>
+          </p:cNvPicPr>
           <p:nvPr/>
-        </p:nvSpPr>
-        <p:spPr bwMode="auto">
+        </p:nvPicPr>
+        <p:blipFill>
+          <a:blip r:embed="rId2"/>
+          <a:stretch>
+            <a:fillRect/>
+          </a:stretch>
+        </p:blipFill>
+        <p:spPr>
           <a:xfrm>
-            <a:off x="1232490" y="2251307"/>
-            <a:ext cx="9677400" cy="1938992"/>
+            <a:off x="3499376" y="0"/>
+            <a:ext cx="5193248" cy="6858000"/>
           </a:xfrm>
           <a:prstGeom prst="rect">
             <a:avLst/>
           </a:prstGeom>
-          <a:noFill/>
-          <a:ln w="9525">
-            <a:noFill/>
-            <a:miter lim="800000"/>
-            <a:headEnd/>
-            <a:tailEnd/>
-          </a:ln>
-          <a:effectLst/>
         </p:spPr>
-        <p:txBody>
-          <a:bodyPr wrap="square">
-            <a:spAutoFit/>
-          </a:bodyPr>
-          <a:lstStyle/>
-          <a:p>
-            <a:pPr algn="ctr">
-              <a:defRPr/>
-            </a:pPr>
-            <a:r>
-              <a:rPr lang="en-US" sz="4000" dirty="0">
-                <a:solidFill>
-                  <a:srgbClr val="FFFFFF"/>
-                </a:solidFill>
-                <a:effectLst>
-                  <a:outerShdw blurRad="38100" dist="38100" dir="2700000" algn="tl">
-                    <a:srgbClr val="000000"/>
-                  </a:outerShdw>
-                </a:effectLst>
-                <a:latin typeface="Avenir"/>
-                <a:cs typeface="Avenir"/>
-              </a:rPr>
-              <a:t>Course website: </a:t>
-            </a:r>
-          </a:p>
-          <a:p>
-            <a:pPr algn="ctr">
-              <a:defRPr/>
-            </a:pPr>
-            <a:endParaRPr lang="en-US" sz="4000" dirty="0">
-              <a:solidFill>
-                <a:srgbClr val="FFFFFF"/>
-              </a:solidFill>
-              <a:effectLst>
-                <a:outerShdw blurRad="38100" dist="38100" dir="2700000" algn="tl">
-                  <a:srgbClr val="000000"/>
-                </a:outerShdw>
-              </a:effectLst>
-              <a:latin typeface="Avenir"/>
-              <a:cs typeface="Avenir"/>
-            </a:endParaRPr>
-          </a:p>
-          <a:p>
-            <a:pPr algn="ctr">
-              <a:defRPr/>
-            </a:pPr>
-            <a:r>
-              <a:rPr lang="en-US" sz="4000" dirty="0">
-                <a:solidFill>
-                  <a:srgbClr val="FFFFFF"/>
-                </a:solidFill>
-                <a:effectLst>
-                  <a:outerShdw blurRad="38100" dist="38100" dir="2700000" algn="tl">
-                    <a:srgbClr val="000000"/>
-                  </a:outerShdw>
-                </a:effectLst>
-                <a:latin typeface="Avenir"/>
-                <a:cs typeface="Avenir"/>
-              </a:rPr>
-              <a:t>https://wood-</a:t>
-            </a:r>
-            <a:r>
-              <a:rPr lang="en-US" sz="4000" dirty="0" err="1">
-                <a:solidFill>
-                  <a:srgbClr val="FFFFFF"/>
-                </a:solidFill>
-                <a:effectLst>
-                  <a:outerShdw blurRad="38100" dist="38100" dir="2700000" algn="tl">
-                    <a:srgbClr val="000000"/>
-                  </a:outerShdw>
-                </a:effectLst>
-                <a:latin typeface="Avenir"/>
-                <a:cs typeface="Avenir"/>
-              </a:rPr>
-              <a:t>lab.github.io</a:t>
-            </a:r>
-            <a:r>
-              <a:rPr lang="en-US" sz="4000" dirty="0">
-                <a:solidFill>
-                  <a:srgbClr val="FFFFFF"/>
-                </a:solidFill>
-                <a:effectLst>
-                  <a:outerShdw blurRad="38100" dist="38100" dir="2700000" algn="tl">
-                    <a:srgbClr val="000000"/>
-                  </a:outerShdw>
-                </a:effectLst>
-                <a:latin typeface="Avenir"/>
-                <a:cs typeface="Avenir"/>
-              </a:rPr>
-              <a:t>/fish_406</a:t>
-            </a:r>
-          </a:p>
-        </p:txBody>
-      </p:sp>
+      </p:pic>
     </p:spTree>
     <p:extLst>
       <p:ext uri="{BB962C8B-B14F-4D97-AF65-F5344CB8AC3E}">
-        <p14:creationId xmlns:p14="http://schemas.microsoft.com/office/powerpoint/2010/main" val="2405787196"/>
+        <p14:creationId xmlns:p14="http://schemas.microsoft.com/office/powerpoint/2010/main" val="277349552"/>
       </p:ext>
     </p:extLst>
   </p:cSld>
@@ -7724,7 +8034,7 @@
         <p:cNvPr id="1" name="">
           <a:extLst>
             <a:ext uri="{FF2B5EF4-FFF2-40B4-BE49-F238E27FC236}">
-              <a16:creationId xmlns:a16="http://schemas.microsoft.com/office/drawing/2014/main" id="{FF7C0096-F98B-6232-876E-41380BE9913E}"/>
+              <a16:creationId xmlns:a16="http://schemas.microsoft.com/office/drawing/2014/main" id="{ED59F089-B822-D305-22B6-38366F04134D}"/>
             </a:ext>
           </a:extLst>
         </p:cNvPr>
@@ -7744,7 +8054,7 @@
           <p:cNvPr id="2" name="Rectangle 2">
             <a:extLst>
               <a:ext uri="{FF2B5EF4-FFF2-40B4-BE49-F238E27FC236}">
-                <a16:creationId xmlns:a16="http://schemas.microsoft.com/office/drawing/2014/main" id="{AF4E8C28-3817-A241-2E96-0195316B06DD}"/>
+                <a16:creationId xmlns:a16="http://schemas.microsoft.com/office/drawing/2014/main" id="{9CD3DD26-8185-4AE6-400C-00A883864BBA}"/>
               </a:ext>
             </a:extLst>
           </p:cNvPr>
@@ -7755,8 +8065,8 @@
         </p:nvSpPr>
         <p:spPr bwMode="auto">
           <a:xfrm>
-            <a:off x="1232490" y="2265821"/>
-            <a:ext cx="9677400" cy="1938992"/>
+            <a:off x="1188948" y="2686735"/>
+            <a:ext cx="9677400" cy="1323439"/>
           </a:xfrm>
           <a:prstGeom prst="rect">
             <a:avLst/>
@@ -7780,7 +8090,7 @@
               <a:defRPr/>
             </a:pPr>
             <a:r>
-              <a:rPr lang="en-US" sz="4000" dirty="0">
+              <a:rPr lang="en-US" sz="8000" dirty="0">
                 <a:solidFill>
                   <a:srgbClr val="FFFFFF"/>
                 </a:solidFill>
@@ -7792,74 +8102,7 @@
                 <a:latin typeface="Avenir"/>
                 <a:cs typeface="Avenir"/>
               </a:rPr>
-              <a:t>Course Canvas page: </a:t>
-            </a:r>
-          </a:p>
-          <a:p>
-            <a:pPr algn="ctr">
-              <a:defRPr/>
-            </a:pPr>
-            <a:endParaRPr lang="en-US" sz="4000" dirty="0">
-              <a:solidFill>
-                <a:srgbClr val="FFFFFF"/>
-              </a:solidFill>
-              <a:effectLst>
-                <a:outerShdw blurRad="38100" dist="38100" dir="2700000" algn="tl">
-                  <a:srgbClr val="000000"/>
-                </a:outerShdw>
-              </a:effectLst>
-              <a:latin typeface="Avenir"/>
-              <a:cs typeface="Avenir"/>
-            </a:endParaRPr>
-          </a:p>
-          <a:p>
-            <a:pPr algn="ctr">
-              <a:defRPr/>
-            </a:pPr>
-            <a:r>
-              <a:rPr lang="en-US" sz="4000" dirty="0">
-                <a:solidFill>
-                  <a:srgbClr val="FFFFFF"/>
-                </a:solidFill>
-                <a:effectLst>
-                  <a:outerShdw blurRad="38100" dist="38100" dir="2700000" algn="tl">
-                    <a:srgbClr val="000000"/>
-                  </a:outerShdw>
-                </a:effectLst>
-                <a:latin typeface="Avenir"/>
-                <a:cs typeface="Avenir"/>
-              </a:rPr>
-              <a:t>https://</a:t>
-            </a:r>
-            <a:r>
-              <a:rPr lang="en-US" sz="4000" dirty="0" err="1">
-                <a:solidFill>
-                  <a:srgbClr val="FFFFFF"/>
-                </a:solidFill>
-                <a:effectLst>
-                  <a:outerShdw blurRad="38100" dist="38100" dir="2700000" algn="tl">
-                    <a:srgbClr val="000000"/>
-                  </a:outerShdw>
-                </a:effectLst>
-                <a:latin typeface="Avenir"/>
-                <a:cs typeface="Avenir"/>
-              </a:rPr>
-              <a:t>canvas.uw.edu</a:t>
-            </a:r>
-            <a:r>
-              <a:rPr lang="en-US" sz="4000" dirty="0">
-                <a:solidFill>
-                  <a:srgbClr val="FFFFFF"/>
-                </a:solidFill>
-                <a:effectLst>
-                  <a:outerShdw blurRad="38100" dist="38100" dir="2700000" algn="tl">
-                    <a:srgbClr val="000000"/>
-                  </a:outerShdw>
-                </a:effectLst>
-                <a:latin typeface="Avenir"/>
-                <a:cs typeface="Avenir"/>
-              </a:rPr>
-              <a:t>/courses/1829825</a:t>
+              <a:t>Who are you?</a:t>
             </a:r>
           </a:p>
         </p:txBody>
@@ -7867,7 +8110,7 @@
     </p:spTree>
     <p:extLst>
       <p:ext uri="{BB962C8B-B14F-4D97-AF65-F5344CB8AC3E}">
-        <p14:creationId xmlns:p14="http://schemas.microsoft.com/office/powerpoint/2010/main" val="3370688028"/>
+        <p14:creationId xmlns:p14="http://schemas.microsoft.com/office/powerpoint/2010/main" val="1423272240"/>
       </p:ext>
     </p:extLst>
   </p:cSld>
@@ -7904,6 +8147,338 @@
       </p:grpSpPr>
       <p:sp>
         <p:nvSpPr>
+          <p:cNvPr id="2" name="Rectangle 2">
+            <a:extLst>
+              <a:ext uri="{FF2B5EF4-FFF2-40B4-BE49-F238E27FC236}">
+                <a16:creationId xmlns:a16="http://schemas.microsoft.com/office/drawing/2014/main" id="{B524D076-306C-BB7A-FF7C-13EB668776DF}"/>
+              </a:ext>
+            </a:extLst>
+          </p:cNvPr>
+          <p:cNvSpPr>
+            <a:spLocks noChangeArrowheads="1"/>
+          </p:cNvSpPr>
+          <p:nvPr/>
+        </p:nvSpPr>
+        <p:spPr bwMode="auto">
+          <a:xfrm>
+            <a:off x="1232490" y="2251307"/>
+            <a:ext cx="9677400" cy="1938992"/>
+          </a:xfrm>
+          <a:prstGeom prst="rect">
+            <a:avLst/>
+          </a:prstGeom>
+          <a:noFill/>
+          <a:ln w="9525">
+            <a:noFill/>
+            <a:miter lim="800000"/>
+            <a:headEnd/>
+            <a:tailEnd/>
+          </a:ln>
+          <a:effectLst/>
+        </p:spPr>
+        <p:txBody>
+          <a:bodyPr wrap="square">
+            <a:spAutoFit/>
+          </a:bodyPr>
+          <a:lstStyle/>
+          <a:p>
+            <a:pPr algn="ctr">
+              <a:defRPr/>
+            </a:pPr>
+            <a:r>
+              <a:rPr lang="en-US" sz="4000" dirty="0">
+                <a:solidFill>
+                  <a:srgbClr val="FFFFFF"/>
+                </a:solidFill>
+                <a:effectLst>
+                  <a:outerShdw blurRad="38100" dist="38100" dir="2700000" algn="tl">
+                    <a:srgbClr val="000000"/>
+                  </a:outerShdw>
+                </a:effectLst>
+                <a:latin typeface="Avenir"/>
+                <a:cs typeface="Avenir"/>
+              </a:rPr>
+              <a:t>Course website: </a:t>
+            </a:r>
+          </a:p>
+          <a:p>
+            <a:pPr algn="ctr">
+              <a:defRPr/>
+            </a:pPr>
+            <a:endParaRPr lang="en-US" sz="4000" dirty="0">
+              <a:solidFill>
+                <a:srgbClr val="FFFFFF"/>
+              </a:solidFill>
+              <a:effectLst>
+                <a:outerShdw blurRad="38100" dist="38100" dir="2700000" algn="tl">
+                  <a:srgbClr val="000000"/>
+                </a:outerShdw>
+              </a:effectLst>
+              <a:latin typeface="Avenir"/>
+              <a:cs typeface="Avenir"/>
+            </a:endParaRPr>
+          </a:p>
+          <a:p>
+            <a:pPr algn="ctr">
+              <a:defRPr/>
+            </a:pPr>
+            <a:r>
+              <a:rPr lang="en-US" sz="4000" dirty="0">
+                <a:solidFill>
+                  <a:srgbClr val="FFFFFF"/>
+                </a:solidFill>
+                <a:effectLst>
+                  <a:outerShdw blurRad="38100" dist="38100" dir="2700000" algn="tl">
+                    <a:srgbClr val="000000"/>
+                  </a:outerShdw>
+                </a:effectLst>
+                <a:latin typeface="Avenir"/>
+                <a:cs typeface="Avenir"/>
+              </a:rPr>
+              <a:t>https://wood-</a:t>
+            </a:r>
+            <a:r>
+              <a:rPr lang="en-US" sz="4000" dirty="0" err="1">
+                <a:solidFill>
+                  <a:srgbClr val="FFFFFF"/>
+                </a:solidFill>
+                <a:effectLst>
+                  <a:outerShdw blurRad="38100" dist="38100" dir="2700000" algn="tl">
+                    <a:srgbClr val="000000"/>
+                  </a:outerShdw>
+                </a:effectLst>
+                <a:latin typeface="Avenir"/>
+                <a:cs typeface="Avenir"/>
+              </a:rPr>
+              <a:t>lab.github.io</a:t>
+            </a:r>
+            <a:r>
+              <a:rPr lang="en-US" sz="4000" dirty="0">
+                <a:solidFill>
+                  <a:srgbClr val="FFFFFF"/>
+                </a:solidFill>
+                <a:effectLst>
+                  <a:outerShdw blurRad="38100" dist="38100" dir="2700000" algn="tl">
+                    <a:srgbClr val="000000"/>
+                  </a:outerShdw>
+                </a:effectLst>
+                <a:latin typeface="Avenir"/>
+                <a:cs typeface="Avenir"/>
+              </a:rPr>
+              <a:t>/fish_406</a:t>
+            </a:r>
+          </a:p>
+        </p:txBody>
+      </p:sp>
+    </p:spTree>
+    <p:extLst>
+      <p:ext uri="{BB962C8B-B14F-4D97-AF65-F5344CB8AC3E}">
+        <p14:creationId xmlns:p14="http://schemas.microsoft.com/office/powerpoint/2010/main" val="2405787196"/>
+      </p:ext>
+    </p:extLst>
+  </p:cSld>
+  <p:clrMapOvr>
+    <a:masterClrMapping/>
+  </p:clrMapOvr>
+</p:sld>
+</file>
+
+<file path=ppt/slides/slide7.xml><?xml version="1.0" encoding="utf-8"?>
+<p:sld xmlns:a="http://schemas.openxmlformats.org/drawingml/2006/main" xmlns:r="http://schemas.openxmlformats.org/officeDocument/2006/relationships" xmlns:p="http://schemas.openxmlformats.org/presentationml/2006/main">
+  <p:cSld>
+    <p:bg>
+      <p:bgPr>
+        <a:solidFill>
+          <a:schemeClr val="tx1"/>
+        </a:solidFill>
+        <a:effectLst/>
+      </p:bgPr>
+    </p:bg>
+    <p:spTree>
+      <p:nvGrpSpPr>
+        <p:cNvPr id="1" name="">
+          <a:extLst>
+            <a:ext uri="{FF2B5EF4-FFF2-40B4-BE49-F238E27FC236}">
+              <a16:creationId xmlns:a16="http://schemas.microsoft.com/office/drawing/2014/main" id="{FF7C0096-F98B-6232-876E-41380BE9913E}"/>
+            </a:ext>
+          </a:extLst>
+        </p:cNvPr>
+        <p:cNvGrpSpPr/>
+        <p:nvPr/>
+      </p:nvGrpSpPr>
+      <p:grpSpPr>
+        <a:xfrm>
+          <a:off x="0" y="0"/>
+          <a:ext cx="0" cy="0"/>
+          <a:chOff x="0" y="0"/>
+          <a:chExt cx="0" cy="0"/>
+        </a:xfrm>
+      </p:grpSpPr>
+      <p:sp>
+        <p:nvSpPr>
+          <p:cNvPr id="2" name="Rectangle 2">
+            <a:extLst>
+              <a:ext uri="{FF2B5EF4-FFF2-40B4-BE49-F238E27FC236}">
+                <a16:creationId xmlns:a16="http://schemas.microsoft.com/office/drawing/2014/main" id="{AF4E8C28-3817-A241-2E96-0195316B06DD}"/>
+              </a:ext>
+            </a:extLst>
+          </p:cNvPr>
+          <p:cNvSpPr>
+            <a:spLocks noChangeArrowheads="1"/>
+          </p:cNvSpPr>
+          <p:nvPr/>
+        </p:nvSpPr>
+        <p:spPr bwMode="auto">
+          <a:xfrm>
+            <a:off x="1232490" y="2265821"/>
+            <a:ext cx="9677400" cy="1938992"/>
+          </a:xfrm>
+          <a:prstGeom prst="rect">
+            <a:avLst/>
+          </a:prstGeom>
+          <a:noFill/>
+          <a:ln w="9525">
+            <a:noFill/>
+            <a:miter lim="800000"/>
+            <a:headEnd/>
+            <a:tailEnd/>
+          </a:ln>
+          <a:effectLst/>
+        </p:spPr>
+        <p:txBody>
+          <a:bodyPr wrap="square">
+            <a:spAutoFit/>
+          </a:bodyPr>
+          <a:lstStyle/>
+          <a:p>
+            <a:pPr algn="ctr">
+              <a:defRPr/>
+            </a:pPr>
+            <a:r>
+              <a:rPr lang="en-US" sz="4000" dirty="0">
+                <a:solidFill>
+                  <a:srgbClr val="FFFFFF"/>
+                </a:solidFill>
+                <a:effectLst>
+                  <a:outerShdw blurRad="38100" dist="38100" dir="2700000" algn="tl">
+                    <a:srgbClr val="000000"/>
+                  </a:outerShdw>
+                </a:effectLst>
+                <a:latin typeface="Avenir"/>
+                <a:cs typeface="Avenir"/>
+              </a:rPr>
+              <a:t>Course Canvas page: </a:t>
+            </a:r>
+          </a:p>
+          <a:p>
+            <a:pPr algn="ctr">
+              <a:defRPr/>
+            </a:pPr>
+            <a:endParaRPr lang="en-US" sz="4000" dirty="0">
+              <a:solidFill>
+                <a:srgbClr val="FFFFFF"/>
+              </a:solidFill>
+              <a:effectLst>
+                <a:outerShdw blurRad="38100" dist="38100" dir="2700000" algn="tl">
+                  <a:srgbClr val="000000"/>
+                </a:outerShdw>
+              </a:effectLst>
+              <a:latin typeface="Avenir"/>
+              <a:cs typeface="Avenir"/>
+            </a:endParaRPr>
+          </a:p>
+          <a:p>
+            <a:pPr algn="ctr">
+              <a:defRPr/>
+            </a:pPr>
+            <a:r>
+              <a:rPr lang="en-US" sz="4000" dirty="0">
+                <a:solidFill>
+                  <a:srgbClr val="FFFFFF"/>
+                </a:solidFill>
+                <a:effectLst>
+                  <a:outerShdw blurRad="38100" dist="38100" dir="2700000" algn="tl">
+                    <a:srgbClr val="000000"/>
+                  </a:outerShdw>
+                </a:effectLst>
+                <a:latin typeface="Avenir"/>
+                <a:cs typeface="Avenir"/>
+              </a:rPr>
+              <a:t>https://</a:t>
+            </a:r>
+            <a:r>
+              <a:rPr lang="en-US" sz="4000" dirty="0" err="1">
+                <a:solidFill>
+                  <a:srgbClr val="FFFFFF"/>
+                </a:solidFill>
+                <a:effectLst>
+                  <a:outerShdw blurRad="38100" dist="38100" dir="2700000" algn="tl">
+                    <a:srgbClr val="000000"/>
+                  </a:outerShdw>
+                </a:effectLst>
+                <a:latin typeface="Avenir"/>
+                <a:cs typeface="Avenir"/>
+              </a:rPr>
+              <a:t>canvas.uw.edu</a:t>
+            </a:r>
+            <a:r>
+              <a:rPr lang="en-US" sz="4000" dirty="0">
+                <a:solidFill>
+                  <a:srgbClr val="FFFFFF"/>
+                </a:solidFill>
+                <a:effectLst>
+                  <a:outerShdw blurRad="38100" dist="38100" dir="2700000" algn="tl">
+                    <a:srgbClr val="000000"/>
+                  </a:outerShdw>
+                </a:effectLst>
+                <a:latin typeface="Avenir"/>
+                <a:cs typeface="Avenir"/>
+              </a:rPr>
+              <a:t>/courses/1829825</a:t>
+            </a:r>
+          </a:p>
+        </p:txBody>
+      </p:sp>
+    </p:spTree>
+    <p:extLst>
+      <p:ext uri="{BB962C8B-B14F-4D97-AF65-F5344CB8AC3E}">
+        <p14:creationId xmlns:p14="http://schemas.microsoft.com/office/powerpoint/2010/main" val="3370688028"/>
+      </p:ext>
+    </p:extLst>
+  </p:cSld>
+  <p:clrMapOvr>
+    <a:masterClrMapping/>
+  </p:clrMapOvr>
+</p:sld>
+</file>
+
+<file path=ppt/slides/slide8.xml><?xml version="1.0" encoding="utf-8"?>
+<p:sld xmlns:a="http://schemas.openxmlformats.org/drawingml/2006/main" xmlns:r="http://schemas.openxmlformats.org/officeDocument/2006/relationships" xmlns:p="http://schemas.openxmlformats.org/presentationml/2006/main">
+  <p:cSld>
+    <p:bg>
+      <p:bgPr>
+        <a:solidFill>
+          <a:schemeClr val="tx1"/>
+        </a:solidFill>
+        <a:effectLst/>
+      </p:bgPr>
+    </p:bg>
+    <p:spTree>
+      <p:nvGrpSpPr>
+        <p:cNvPr id="1" name=""/>
+        <p:cNvGrpSpPr/>
+        <p:nvPr/>
+      </p:nvGrpSpPr>
+      <p:grpSpPr>
+        <a:xfrm>
+          <a:off x="0" y="0"/>
+          <a:ext cx="0" cy="0"/>
+          <a:chOff x="0" y="0"/>
+          <a:chExt cx="0" cy="0"/>
+        </a:xfrm>
+      </p:grpSpPr>
+      <p:sp>
+        <p:nvSpPr>
           <p:cNvPr id="2050" name="Rectangle 2"/>
           <p:cNvSpPr>
             <a:spLocks noChangeArrowheads="1"/>
@@ -8088,7 +8663,7 @@
 </p:sld>
 </file>
 
-<file path=ppt/slides/slide7.xml><?xml version="1.0" encoding="utf-8"?>
+<file path=ppt/slides/slide9.xml><?xml version="1.0" encoding="utf-8"?>
 <p:sld xmlns:a="http://schemas.openxmlformats.org/drawingml/2006/main" xmlns:r="http://schemas.openxmlformats.org/officeDocument/2006/relationships" xmlns:p="http://schemas.openxmlformats.org/presentationml/2006/main">
   <p:cSld>
     <p:bg>
@@ -8401,226 +8976,6 @@
     <p:extLst>
       <p:ext uri="{BB962C8B-B14F-4D97-AF65-F5344CB8AC3E}">
         <p14:creationId xmlns:p14="http://schemas.microsoft.com/office/powerpoint/2010/main" val="1198608017"/>
-      </p:ext>
-    </p:extLst>
-  </p:cSld>
-  <p:clrMapOvr>
-    <a:masterClrMapping/>
-  </p:clrMapOvr>
-</p:sld>
-</file>
-
-<file path=ppt/slides/slide8.xml><?xml version="1.0" encoding="utf-8"?>
-<p:sld xmlns:a="http://schemas.openxmlformats.org/drawingml/2006/main" xmlns:r="http://schemas.openxmlformats.org/officeDocument/2006/relationships" xmlns:p="http://schemas.openxmlformats.org/presentationml/2006/main">
-  <p:cSld>
-    <p:spTree>
-      <p:nvGrpSpPr>
-        <p:cNvPr id="1" name=""/>
-        <p:cNvGrpSpPr/>
-        <p:nvPr/>
-      </p:nvGrpSpPr>
-      <p:grpSpPr>
-        <a:xfrm>
-          <a:off x="0" y="0"/>
-          <a:ext cx="0" cy="0"/>
-          <a:chOff x="0" y="0"/>
-          <a:chExt cx="0" cy="0"/>
-        </a:xfrm>
-      </p:grpSpPr>
-      <p:sp>
-        <p:nvSpPr>
-          <p:cNvPr id="2" name="Title 1">
-            <a:extLst>
-              <a:ext uri="{FF2B5EF4-FFF2-40B4-BE49-F238E27FC236}">
-                <a16:creationId xmlns:a16="http://schemas.microsoft.com/office/drawing/2014/main" id="{D46328C8-E57A-4548-E685-7C8547826A9D}"/>
-              </a:ext>
-            </a:extLst>
-          </p:cNvPr>
-          <p:cNvSpPr>
-            <a:spLocks noGrp="1"/>
-          </p:cNvSpPr>
-          <p:nvPr>
-            <p:ph type="ctrTitle"/>
-          </p:nvPr>
-        </p:nvSpPr>
-        <p:spPr/>
-        <p:txBody>
-          <a:bodyPr/>
-          <a:lstStyle/>
-          <a:p>
-            <a:endParaRPr lang="en-US"/>
-          </a:p>
-        </p:txBody>
-      </p:sp>
-      <p:sp>
-        <p:nvSpPr>
-          <p:cNvPr id="3" name="Subtitle 2">
-            <a:extLst>
-              <a:ext uri="{FF2B5EF4-FFF2-40B4-BE49-F238E27FC236}">
-                <a16:creationId xmlns:a16="http://schemas.microsoft.com/office/drawing/2014/main" id="{45A1BAE9-70C8-C269-8AD4-7B4B3D134C13}"/>
-              </a:ext>
-            </a:extLst>
-          </p:cNvPr>
-          <p:cNvSpPr>
-            <a:spLocks noGrp="1"/>
-          </p:cNvSpPr>
-          <p:nvPr>
-            <p:ph type="subTitle" idx="1"/>
-          </p:nvPr>
-        </p:nvSpPr>
-        <p:spPr/>
-        <p:txBody>
-          <a:bodyPr/>
-          <a:lstStyle/>
-          <a:p>
-            <a:endParaRPr lang="en-US"/>
-          </a:p>
-        </p:txBody>
-      </p:sp>
-      <p:pic>
-        <p:nvPicPr>
-          <p:cNvPr id="5" name="slide.url=https://www.polleverywhere.com/multiple_choice_polls/C5Mf4wqoOzxgPhTX3YZyj?state=opened&amp;flow=Default&amp;onscreen=persist">
-            <a:extLst>
-              <a:ext uri="{FF2B5EF4-FFF2-40B4-BE49-F238E27FC236}">
-                <a16:creationId xmlns:a16="http://schemas.microsoft.com/office/drawing/2014/main" id="{C1680DC4-93E8-614B-054E-9D7DCD24A5C6}"/>
-              </a:ext>
-            </a:extLst>
-          </p:cNvPr>
-          <p:cNvPicPr>
-            <a:picLocks/>
-          </p:cNvPicPr>
-          <p:nvPr/>
-        </p:nvPicPr>
-        <p:blipFill>
-          <a:blip r:embed="rId3"/>
-          <a:stretch>
-            <a:fillRect/>
-          </a:stretch>
-        </p:blipFill>
-        <p:spPr>
-          <a:xfrm>
-            <a:off x="63500" y="63500"/>
-            <a:ext cx="12065000" cy="6731000"/>
-          </a:xfrm>
-          <a:prstGeom prst="rect">
-            <a:avLst/>
-          </a:prstGeom>
-        </p:spPr>
-      </p:pic>
-    </p:spTree>
-    <p:extLst>
-      <p:ext uri="{BB962C8B-B14F-4D97-AF65-F5344CB8AC3E}">
-        <p14:creationId xmlns:p14="http://schemas.microsoft.com/office/powerpoint/2010/main" val="1511497431"/>
-      </p:ext>
-    </p:extLst>
-  </p:cSld>
-  <p:clrMapOvr>
-    <a:masterClrMapping/>
-  </p:clrMapOvr>
-</p:sld>
-</file>
-
-<file path=ppt/slides/slide9.xml><?xml version="1.0" encoding="utf-8"?>
-<p:sld xmlns:a="http://schemas.openxmlformats.org/drawingml/2006/main" xmlns:r="http://schemas.openxmlformats.org/officeDocument/2006/relationships" xmlns:p="http://schemas.openxmlformats.org/presentationml/2006/main">
-  <p:cSld>
-    <p:spTree>
-      <p:nvGrpSpPr>
-        <p:cNvPr id="1" name=""/>
-        <p:cNvGrpSpPr/>
-        <p:nvPr/>
-      </p:nvGrpSpPr>
-      <p:grpSpPr>
-        <a:xfrm>
-          <a:off x="0" y="0"/>
-          <a:ext cx="0" cy="0"/>
-          <a:chOff x="0" y="0"/>
-          <a:chExt cx="0" cy="0"/>
-        </a:xfrm>
-      </p:grpSpPr>
-      <p:sp>
-        <p:nvSpPr>
-          <p:cNvPr id="2" name="Title 1">
-            <a:extLst>
-              <a:ext uri="{FF2B5EF4-FFF2-40B4-BE49-F238E27FC236}">
-                <a16:creationId xmlns:a16="http://schemas.microsoft.com/office/drawing/2014/main" id="{817A132B-DB9E-494A-B78D-F786D5645CC0}"/>
-              </a:ext>
-            </a:extLst>
-          </p:cNvPr>
-          <p:cNvSpPr>
-            <a:spLocks noGrp="1"/>
-          </p:cNvSpPr>
-          <p:nvPr>
-            <p:ph type="ctrTitle"/>
-          </p:nvPr>
-        </p:nvSpPr>
-        <p:spPr/>
-        <p:txBody>
-          <a:bodyPr/>
-          <a:lstStyle/>
-          <a:p>
-            <a:endParaRPr lang="en-US"/>
-          </a:p>
-        </p:txBody>
-      </p:sp>
-      <p:sp>
-        <p:nvSpPr>
-          <p:cNvPr id="3" name="Subtitle 2">
-            <a:extLst>
-              <a:ext uri="{FF2B5EF4-FFF2-40B4-BE49-F238E27FC236}">
-                <a16:creationId xmlns:a16="http://schemas.microsoft.com/office/drawing/2014/main" id="{181C6761-0AFB-4A40-910C-04C7202DF597}"/>
-              </a:ext>
-            </a:extLst>
-          </p:cNvPr>
-          <p:cNvSpPr>
-            <a:spLocks noGrp="1"/>
-          </p:cNvSpPr>
-          <p:nvPr>
-            <p:ph type="subTitle" idx="1"/>
-          </p:nvPr>
-        </p:nvSpPr>
-        <p:spPr/>
-        <p:txBody>
-          <a:bodyPr/>
-          <a:lstStyle/>
-          <a:p>
-            <a:endParaRPr lang="en-US"/>
-          </a:p>
-        </p:txBody>
-      </p:sp>
-      <p:pic>
-        <p:nvPicPr>
-          <p:cNvPr id="5" name="slide.url=https://www.polleverywhere.com/free_text_polls/n8mRsosII42qUWMLxN3aH">
-            <a:extLst>
-              <a:ext uri="{FF2B5EF4-FFF2-40B4-BE49-F238E27FC236}">
-                <a16:creationId xmlns:a16="http://schemas.microsoft.com/office/drawing/2014/main" id="{72EB74FD-A9DE-7F46-9103-F417496D3DB3}"/>
-              </a:ext>
-            </a:extLst>
-          </p:cNvPr>
-          <p:cNvPicPr>
-            <a:picLocks/>
-          </p:cNvPicPr>
-          <p:nvPr/>
-        </p:nvPicPr>
-        <p:blipFill>
-          <a:blip r:embed="rId3"/>
-          <a:stretch>
-            <a:fillRect/>
-          </a:stretch>
-        </p:blipFill>
-        <p:spPr>
-          <a:xfrm>
-            <a:off x="63500" y="63500"/>
-            <a:ext cx="12065000" cy="6731000"/>
-          </a:xfrm>
-          <a:prstGeom prst="rect">
-            <a:avLst/>
-          </a:prstGeom>
-        </p:spPr>
-      </p:pic>
-    </p:spTree>
-    <p:extLst>
-      <p:ext uri="{BB962C8B-B14F-4D97-AF65-F5344CB8AC3E}">
-        <p14:creationId xmlns:p14="http://schemas.microsoft.com/office/powerpoint/2010/main" val="4242319848"/>
       </p:ext>
     </p:extLst>
   </p:cSld>
